--- a/python_course/chapter_01_introduction/introduction_to_python.pptx
+++ b/python_course/chapter_01_introduction/introduction_to_python.pptx
@@ -15,6 +15,9 @@
     <p:sldId id="263" r:id="rId14"/>
     <p:sldId id="264" r:id="rId15"/>
     <p:sldId id="265" r:id="rId16"/>
+    <p:sldId id="266" r:id="rId17"/>
+    <p:sldId id="267" r:id="rId18"/>
+    <p:sldId id="268" r:id="rId19"/>
   </p:sldIdLst>
   <p:sldSz cx="12191695" cy="6858000" type="screen4x3"/>
   <p:notesSz cx="6858000" cy="9144000"/>
@@ -3148,8 +3151,8 @@
         </p:nvSpPr>
         <p:spPr>
           <a:xfrm>
-            <a:off x="914400" y="1828800"/>
-            <a:ext cx="10360152" cy="1371600"/>
+            <a:off x="914400" y="2286000"/>
+            <a:ext cx="10360152" cy="1097280"/>
           </a:xfrm>
           <a:prstGeom prst="rect">
             <a:avLst/>
@@ -3163,14 +3166,14 @@
           <a:lstStyle/>
           <a:p>
             <a:pPr algn="ctr">
-              <a:defRPr sz="5400" b="1">
+              <a:defRPr sz="4800" b="1">
                 <a:solidFill>
                   <a:srgbClr val="003366"/>
                 </a:solidFill>
               </a:defRPr>
             </a:pPr>
             <a:r>
-              <a:t>Chapter 1</a:t>
+              <a:t>Chapter 1: Introduction to Python</a:t>
             </a:r>
           </a:p>
         </p:txBody>
@@ -3184,7 +3187,7 @@
         <p:spPr>
           <a:xfrm>
             <a:off x="914400" y="3657600"/>
-            <a:ext cx="10360152" cy="548640"/>
+            <a:ext cx="10360152" cy="731520"/>
           </a:xfrm>
           <a:prstGeom prst="rect">
             <a:avLst/>
@@ -3205,42 +3208,7 @@
               </a:defRPr>
             </a:pPr>
             <a:r>
-              <a:t>Introduction to Python</a:t>
-            </a:r>
-          </a:p>
-        </p:txBody>
-      </p:sp>
-      <p:sp>
-        <p:nvSpPr>
-          <p:cNvPr id="5" name="TextBox 4"/>
-          <p:cNvSpPr txBox="1"/>
-          <p:nvPr/>
-        </p:nvSpPr>
-        <p:spPr>
-          <a:xfrm>
-            <a:off x="914400" y="4297680"/>
-            <a:ext cx="10360152" cy="548640"/>
-          </a:xfrm>
-          <a:prstGeom prst="rect">
-            <a:avLst/>
-          </a:prstGeom>
-          <a:noFill/>
-        </p:spPr>
-        <p:txBody>
-          <a:bodyPr wrap="none">
-            <a:spAutoFit/>
-          </a:bodyPr>
-          <a:lstStyle/>
-          <a:p>
-            <a:pPr algn="ctr">
-              <a:defRPr sz="2800">
-                <a:solidFill>
-                  <a:srgbClr val="4682B4"/>
-                </a:solidFill>
-              </a:defRPr>
-            </a:pPr>
-            <a:r>
-              <a:t>Your First Steps in Programming</a:t>
+              <a:t>Variables, Data Types, and Basic Operations</a:t>
             </a:r>
           </a:p>
         </p:txBody>
@@ -3254,172 +3222,6 @@
 </file>
 
 <file path=ppt/slides/slide10.xml><?xml version="1.0" encoding="utf-8"?>
-<p:sld xmlns:a="http://schemas.openxmlformats.org/drawingml/2006/main" xmlns:p="http://schemas.openxmlformats.org/presentationml/2006/main" xmlns:r="http://schemas.openxmlformats.org/officeDocument/2006/relationships">
-  <p:cSld>
-    <p:spTree>
-      <p:nvGrpSpPr>
-        <p:cNvPr id="1" name=""/>
-        <p:cNvGrpSpPr/>
-        <p:nvPr/>
-      </p:nvGrpSpPr>
-      <p:grpSpPr/>
-      <p:sp>
-        <p:nvSpPr>
-          <p:cNvPr id="2" name="Rectangle 1"/>
-          <p:cNvSpPr/>
-          <p:nvPr/>
-        </p:nvSpPr>
-        <p:spPr>
-          <a:xfrm>
-            <a:off x="0" y="0"/>
-            <a:ext cx="12191695" cy="6858000"/>
-          </a:xfrm>
-          <a:prstGeom prst="rect">
-            <a:avLst/>
-          </a:prstGeom>
-          <a:solidFill>
-            <a:srgbClr val="F0F8FF"/>
-          </a:solidFill>
-          <a:ln>
-            <a:noFill/>
-          </a:ln>
-        </p:spPr>
-        <p:style>
-          <a:lnRef idx="1">
-            <a:schemeClr val="accent1"/>
-          </a:lnRef>
-          <a:fillRef idx="3">
-            <a:schemeClr val="accent1"/>
-          </a:fillRef>
-          <a:effectRef idx="2">
-            <a:schemeClr val="accent1"/>
-          </a:effectRef>
-          <a:fontRef idx="minor">
-            <a:schemeClr val="lt1"/>
-          </a:fontRef>
-        </p:style>
-        <p:txBody>
-          <a:bodyPr rtlCol="0" anchor="ctr"/>
-          <a:lstStyle/>
-          <a:p>
-            <a:pPr algn="ctr"/>
-          </a:p>
-        </p:txBody>
-      </p:sp>
-      <p:sp>
-        <p:nvSpPr>
-          <p:cNvPr id="3" name="TextBox 2"/>
-          <p:cNvSpPr txBox="1"/>
-          <p:nvPr/>
-        </p:nvSpPr>
-        <p:spPr>
-          <a:xfrm>
-            <a:off x="914400" y="1828800"/>
-            <a:ext cx="10360152" cy="1371600"/>
-          </a:xfrm>
-          <a:prstGeom prst="rect">
-            <a:avLst/>
-          </a:prstGeom>
-          <a:noFill/>
-        </p:spPr>
-        <p:txBody>
-          <a:bodyPr wrap="none">
-            <a:spAutoFit/>
-          </a:bodyPr>
-          <a:lstStyle/>
-          <a:p>
-            <a:pPr algn="ctr">
-              <a:defRPr sz="5400" b="1">
-                <a:solidFill>
-                  <a:srgbClr val="003366"/>
-                </a:solidFill>
-              </a:defRPr>
-            </a:pPr>
-            <a:r>
-              <a:t>Ready to Code!</a:t>
-            </a:r>
-          </a:p>
-        </p:txBody>
-      </p:sp>
-      <p:sp>
-        <p:nvSpPr>
-          <p:cNvPr id="4" name="TextBox 3"/>
-          <p:cNvSpPr txBox="1"/>
-          <p:nvPr/>
-        </p:nvSpPr>
-        <p:spPr>
-          <a:xfrm>
-            <a:off x="914400" y="3657600"/>
-            <a:ext cx="10360152" cy="548640"/>
-          </a:xfrm>
-          <a:prstGeom prst="rect">
-            <a:avLst/>
-          </a:prstGeom>
-          <a:noFill/>
-        </p:spPr>
-        <p:txBody>
-          <a:bodyPr wrap="none">
-            <a:spAutoFit/>
-          </a:bodyPr>
-          <a:lstStyle/>
-          <a:p>
-            <a:pPr algn="ctr">
-              <a:defRPr sz="2800">
-                <a:solidFill>
-                  <a:srgbClr val="4682B4"/>
-                </a:solidFill>
-              </a:defRPr>
-            </a:pPr>
-            <a:r>
-              <a:t>Open the practice notebook and start experimenting</a:t>
-            </a:r>
-          </a:p>
-        </p:txBody>
-      </p:sp>
-      <p:sp>
-        <p:nvSpPr>
-          <p:cNvPr id="5" name="TextBox 4"/>
-          <p:cNvSpPr txBox="1"/>
-          <p:nvPr/>
-        </p:nvSpPr>
-        <p:spPr>
-          <a:xfrm>
-            <a:off x="914400" y="4297680"/>
-            <a:ext cx="10360152" cy="548640"/>
-          </a:xfrm>
-          <a:prstGeom prst="rect">
-            <a:avLst/>
-          </a:prstGeom>
-          <a:noFill/>
-        </p:spPr>
-        <p:txBody>
-          <a:bodyPr wrap="none">
-            <a:spAutoFit/>
-          </a:bodyPr>
-          <a:lstStyle/>
-          <a:p>
-            <a:pPr algn="ctr">
-              <a:defRPr sz="2800">
-                <a:solidFill>
-                  <a:srgbClr val="4682B4"/>
-                </a:solidFill>
-              </a:defRPr>
-            </a:pPr>
-            <a:r>
-              <a:t>Remember: The best way to learn is by doing! 💪</a:t>
-            </a:r>
-          </a:p>
-        </p:txBody>
-      </p:sp>
-    </p:spTree>
-  </p:cSld>
-  <p:clrMapOvr>
-    <a:masterClrMapping/>
-  </p:clrMapOvr>
-</p:sld>
-</file>
-
-<file path=ppt/slides/slide2.xml><?xml version="1.0" encoding="utf-8"?>
 <p:sld xmlns:a="http://schemas.openxmlformats.org/drawingml/2006/main" xmlns:p="http://schemas.openxmlformats.org/presentationml/2006/main" xmlns:r="http://schemas.openxmlformats.org/officeDocument/2006/relationships">
   <p:cSld>
     <p:spTree>
@@ -3523,8 +3325,8 @@
         </p:nvSpPr>
         <p:spPr>
           <a:xfrm>
-            <a:off x="457200" y="365760"/>
-            <a:ext cx="10972800" cy="731520"/>
+            <a:off x="457200" y="320040"/>
+            <a:ext cx="10972800" cy="640080"/>
           </a:xfrm>
           <a:prstGeom prst="rect">
             <a:avLst/>
@@ -3538,71 +3340,28 @@
           <a:lstStyle/>
           <a:p>
             <a:pPr>
-              <a:defRPr sz="4000" b="1">
+              <a:defRPr sz="3600" b="1">
                 <a:solidFill>
                   <a:srgbClr val="003366"/>
                 </a:solidFill>
               </a:defRPr>
             </a:pPr>
             <a:r>
-              <a:t>What is Programming? 🤔</a:t>
-            </a:r>
-          </a:p>
-        </p:txBody>
-      </p:sp>
-      <p:sp>
-        <p:nvSpPr>
-          <p:cNvPr id="5" name="Rectangle 4"/>
-          <p:cNvSpPr/>
+              <a:t>Comments and Code Documentation</a:t>
+            </a:r>
+          </a:p>
+        </p:txBody>
+      </p:sp>
+      <p:sp>
+        <p:nvSpPr>
+          <p:cNvPr id="5" name="TextBox 4"/>
+          <p:cNvSpPr txBox="1"/>
           <p:nvPr/>
         </p:nvSpPr>
         <p:spPr>
           <a:xfrm>
-            <a:off x="457200" y="1005840"/>
-            <a:ext cx="1828800" cy="45720"/>
-          </a:xfrm>
-          <a:prstGeom prst="rect">
-            <a:avLst/>
-          </a:prstGeom>
-          <a:solidFill>
-            <a:srgbClr val="0066CC"/>
-          </a:solidFill>
-          <a:ln>
-            <a:noFill/>
-          </a:ln>
-        </p:spPr>
-        <p:style>
-          <a:lnRef idx="1">
-            <a:schemeClr val="accent1"/>
-          </a:lnRef>
-          <a:fillRef idx="3">
-            <a:schemeClr val="accent1"/>
-          </a:fillRef>
-          <a:effectRef idx="2">
-            <a:schemeClr val="accent1"/>
-          </a:effectRef>
-          <a:fontRef idx="minor">
-            <a:schemeClr val="lt1"/>
-          </a:fontRef>
-        </p:style>
-        <p:txBody>
-          <a:bodyPr rtlCol="0" anchor="ctr"/>
-          <a:lstStyle/>
-          <a:p>
-            <a:pPr algn="ctr"/>
-          </a:p>
-        </p:txBody>
-      </p:sp>
-      <p:sp>
-        <p:nvSpPr>
-          <p:cNvPr id="6" name="TextBox 5"/>
-          <p:cNvSpPr txBox="1"/>
-          <p:nvPr/>
-        </p:nvSpPr>
-        <p:spPr>
-          <a:xfrm>
-            <a:off x="640080" y="1371600"/>
-            <a:ext cx="10789920" cy="4572000"/>
+            <a:off x="640080" y="1188720"/>
+            <a:ext cx="10789920" cy="5303520"/>
           </a:xfrm>
           <a:prstGeom prst="rect">
             <a:avLst/>
@@ -3617,91 +3376,241 @@
           <a:p>
             <a:pPr>
               <a:spcAft>
-                <a:spcPts val="800"/>
-              </a:spcAft>
-              <a:defRPr sz="2000" b="1">
-                <a:solidFill>
-                  <a:srgbClr val="333333"/>
-                </a:solidFill>
-              </a:defRPr>
-            </a:pPr>
-            <a:r>
-              <a:t>Giving Instructions</a:t>
-            </a:r>
-          </a:p>
-          <a:p>
-            <a:pPr>
-              <a:spcAft>
-                <a:spcPts val="800"/>
-              </a:spcAft>
-              <a:defRPr sz="2000" b="1">
-                <a:solidFill>
-                  <a:srgbClr val="333333"/>
-                </a:solidFill>
-              </a:defRPr>
-            </a:pPr>
-            <a:r>
-              <a:t>Programming is like giving step-by-step instructions to a computer</a:t>
-            </a:r>
-          </a:p>
-          <a:p>
-            <a:pPr>
-              <a:spcAft>
-                <a:spcPts val="800"/>
-              </a:spcAft>
-              <a:defRPr sz="2000" b="1">
-                <a:solidFill>
-                  <a:srgbClr val="333333"/>
-                </a:solidFill>
-              </a:defRPr>
-            </a:pPr>
-            <a:r>
-              <a:t>Solving Problems</a:t>
-            </a:r>
-          </a:p>
-          <a:p>
-            <a:pPr>
-              <a:spcAft>
-                <a:spcPts val="800"/>
-              </a:spcAft>
-              <a:defRPr sz="2000" b="1">
-                <a:solidFill>
-                  <a:srgbClr val="333333"/>
-                </a:solidFill>
-              </a:defRPr>
-            </a:pPr>
-            <a:r>
-              <a:t>We use code to solve problems and automate tasks</a:t>
-            </a:r>
-          </a:p>
-          <a:p>
-            <a:pPr>
-              <a:spcAft>
-                <a:spcPts val="800"/>
-              </a:spcAft>
-              <a:defRPr sz="2000" b="1">
-                <a:solidFill>
-                  <a:srgbClr val="333333"/>
-                </a:solidFill>
-              </a:defRPr>
-            </a:pPr>
-            <a:r>
-              <a:t>Speaking Computer Language</a:t>
-            </a:r>
-          </a:p>
-          <a:p>
-            <a:pPr>
-              <a:spcAft>
-                <a:spcPts val="800"/>
-              </a:spcAft>
-              <a:defRPr sz="2000" b="1">
-                <a:solidFill>
-                  <a:srgbClr val="333333"/>
-                </a:solidFill>
-              </a:defRPr>
-            </a:pPr>
-            <a:r>
-              <a:t>Just like we speak English or Arabic, computers understand programming languages</a:t>
+                <a:spcPts val="600"/>
+              </a:spcAft>
+              <a:defRPr b="1" sz="2000">
+                <a:solidFill>
+                  <a:srgbClr val="333333"/>
+                </a:solidFill>
+              </a:defRPr>
+            </a:pPr>
+            <a:r>
+              <a:t>Comments: Notes for humans, ignored by Python</a:t>
+            </a:r>
+          </a:p>
+          <a:p>
+            <a:pPr>
+              <a:spcAft>
+                <a:spcPts val="600"/>
+              </a:spcAft>
+              <a:defRPr b="1" sz="2000">
+                <a:solidFill>
+                  <a:srgbClr val="333333"/>
+                </a:solidFill>
+              </a:defRPr>
+            </a:pPr>
+            <a:r>
+              <a:t>Single-line Comments:</a:t>
+            </a:r>
+          </a:p>
+          <a:p>
+            <a:pPr>
+              <a:spcAft>
+                <a:spcPts val="600"/>
+              </a:spcAft>
+              <a:defRPr sz="1600">
+                <a:solidFill>
+                  <a:srgbClr val="333333"/>
+                </a:solidFill>
+              </a:defRPr>
+            </a:pPr>
+            <a:r>
+              <a:t># This is a comment</a:t>
+            </a:r>
+          </a:p>
+          <a:p>
+            <a:pPr>
+              <a:spcAft>
+                <a:spcPts val="600"/>
+              </a:spcAft>
+              <a:defRPr sz="1600">
+                <a:solidFill>
+                  <a:srgbClr val="333333"/>
+                </a:solidFill>
+              </a:defRPr>
+            </a:pPr>
+            <a:r>
+              <a:t>age = 25  # This explains the variable</a:t>
+            </a:r>
+          </a:p>
+          <a:p>
+            <a:pPr>
+              <a:spcAft>
+                <a:spcPts val="600"/>
+              </a:spcAft>
+              <a:defRPr b="1" sz="2000">
+                <a:solidFill>
+                  <a:srgbClr val="333333"/>
+                </a:solidFill>
+              </a:defRPr>
+            </a:pPr>
+            <a:r>
+              <a:t>Multi-line Comments:</a:t>
+            </a:r>
+          </a:p>
+          <a:p>
+            <a:pPr>
+              <a:spcAft>
+                <a:spcPts val="600"/>
+              </a:spcAft>
+              <a:defRPr sz="1600">
+                <a:solidFill>
+                  <a:srgbClr val="333333"/>
+                </a:solidFill>
+              </a:defRPr>
+            </a:pPr>
+            <a:r>
+              <a:t>"""</a:t>
+            </a:r>
+          </a:p>
+          <a:p>
+            <a:pPr>
+              <a:spcAft>
+                <a:spcPts val="600"/>
+              </a:spcAft>
+              <a:defRPr sz="1600">
+                <a:solidFill>
+                  <a:srgbClr val="333333"/>
+                </a:solidFill>
+              </a:defRPr>
+            </a:pPr>
+            <a:r>
+              <a:t>This is a multi-line comment</a:t>
+            </a:r>
+          </a:p>
+          <a:p>
+            <a:pPr>
+              <a:spcAft>
+                <a:spcPts val="600"/>
+              </a:spcAft>
+              <a:defRPr sz="1600">
+                <a:solidFill>
+                  <a:srgbClr val="333333"/>
+                </a:solidFill>
+              </a:defRPr>
+            </a:pPr>
+            <a:r>
+              <a:t>Useful for longer explanations</a:t>
+            </a:r>
+          </a:p>
+          <a:p>
+            <a:pPr>
+              <a:spcAft>
+                <a:spcPts val="600"/>
+              </a:spcAft>
+              <a:defRPr sz="1600">
+                <a:solidFill>
+                  <a:srgbClr val="333333"/>
+                </a:solidFill>
+              </a:defRPr>
+            </a:pPr>
+            <a:r>
+              <a:t>"""</a:t>
+            </a:r>
+          </a:p>
+          <a:p>
+            <a:pPr>
+              <a:spcAft>
+                <a:spcPts val="600"/>
+              </a:spcAft>
+              <a:defRPr b="1" sz="2000">
+                <a:solidFill>
+                  <a:srgbClr val="333333"/>
+                </a:solidFill>
+              </a:defRPr>
+            </a:pPr>
+            <a:r>
+              <a:t>When to Use Comments:</a:t>
+            </a:r>
+          </a:p>
+          <a:p>
+            <a:pPr lvl="1">
+              <a:spcAft>
+                <a:spcPts val="400"/>
+              </a:spcAft>
+              <a:defRPr sz="1600">
+                <a:solidFill>
+                  <a:srgbClr val="333333"/>
+                </a:solidFill>
+              </a:defRPr>
+            </a:pPr>
+            <a:r>
+              <a:t>• Explain complex logic</a:t>
+            </a:r>
+          </a:p>
+          <a:p>
+            <a:pPr lvl="1">
+              <a:spcAft>
+                <a:spcPts val="400"/>
+              </a:spcAft>
+              <a:defRPr sz="1600">
+                <a:solidFill>
+                  <a:srgbClr val="333333"/>
+                </a:solidFill>
+              </a:defRPr>
+            </a:pPr>
+            <a:r>
+              <a:t>• Document function purposes</a:t>
+            </a:r>
+          </a:p>
+          <a:p>
+            <a:pPr lvl="1">
+              <a:spcAft>
+                <a:spcPts val="400"/>
+              </a:spcAft>
+              <a:defRPr sz="1600">
+                <a:solidFill>
+                  <a:srgbClr val="333333"/>
+                </a:solidFill>
+              </a:defRPr>
+            </a:pPr>
+            <a:r>
+              <a:t>• Add TODO notes</a:t>
+            </a:r>
+          </a:p>
+          <a:p>
+            <a:pPr lvl="1">
+              <a:spcAft>
+                <a:spcPts val="400"/>
+              </a:spcAft>
+              <a:defRPr sz="1600">
+                <a:solidFill>
+                  <a:srgbClr val="333333"/>
+                </a:solidFill>
+              </a:defRPr>
+            </a:pPr>
+            <a:r>
+              <a:t>• Clarify tricky code</a:t>
+            </a:r>
+          </a:p>
+          <a:p>
+            <a:pPr>
+              <a:spcAft>
+                <a:spcPts val="600"/>
+              </a:spcAft>
+              <a:defRPr b="1" sz="2000">
+                <a:solidFill>
+                  <a:srgbClr val="333333"/>
+                </a:solidFill>
+              </a:defRPr>
+            </a:pPr>
+            <a:r>
+              <a:t>Good Comment: # Calculate tax as 15% of price</a:t>
+            </a:r>
+          </a:p>
+          <a:p>
+            <a:pPr>
+              <a:spcAft>
+                <a:spcPts val="600"/>
+              </a:spcAft>
+              <a:defRPr b="1" sz="2000">
+                <a:solidFill>
+                  <a:srgbClr val="333333"/>
+                </a:solidFill>
+              </a:defRPr>
+            </a:pPr>
+            <a:r>
+              <a:t>Bad Comment: # Add 5 to x</a:t>
             </a:r>
           </a:p>
         </p:txBody>
@@ -3714,7 +3623,7 @@
 </p:sld>
 </file>
 
-<file path=ppt/slides/slide3.xml><?xml version="1.0" encoding="utf-8"?>
+<file path=ppt/slides/slide11.xml><?xml version="1.0" encoding="utf-8"?>
 <p:sld xmlns:a="http://schemas.openxmlformats.org/drawingml/2006/main" xmlns:p="http://schemas.openxmlformats.org/presentationml/2006/main" xmlns:r="http://schemas.openxmlformats.org/officeDocument/2006/relationships">
   <p:cSld>
     <p:spTree>
@@ -3818,8 +3727,8 @@
         </p:nvSpPr>
         <p:spPr>
           <a:xfrm>
-            <a:off x="457200" y="365760"/>
-            <a:ext cx="10972800" cy="731520"/>
+            <a:off x="457200" y="320040"/>
+            <a:ext cx="10972800" cy="640080"/>
           </a:xfrm>
           <a:prstGeom prst="rect">
             <a:avLst/>
@@ -3833,71 +3742,28 @@
           <a:lstStyle/>
           <a:p>
             <a:pPr>
-              <a:defRPr sz="4000" b="1">
+              <a:defRPr sz="3600" b="1">
                 <a:solidFill>
                   <a:srgbClr val="003366"/>
                 </a:solidFill>
               </a:defRPr>
             </a:pPr>
             <a:r>
-              <a:t>Why Learn Python? 🐍</a:t>
-            </a:r>
-          </a:p>
-        </p:txBody>
-      </p:sp>
-      <p:sp>
-        <p:nvSpPr>
-          <p:cNvPr id="5" name="Rectangle 4"/>
-          <p:cNvSpPr/>
+              <a:t>Real-World Applications</a:t>
+            </a:r>
+          </a:p>
+        </p:txBody>
+      </p:sp>
+      <p:sp>
+        <p:nvSpPr>
+          <p:cNvPr id="5" name="TextBox 4"/>
+          <p:cNvSpPr txBox="1"/>
           <p:nvPr/>
         </p:nvSpPr>
         <p:spPr>
           <a:xfrm>
-            <a:off x="457200" y="1005840"/>
-            <a:ext cx="1828800" cy="45720"/>
-          </a:xfrm>
-          <a:prstGeom prst="rect">
-            <a:avLst/>
-          </a:prstGeom>
-          <a:solidFill>
-            <a:srgbClr val="0066CC"/>
-          </a:solidFill>
-          <a:ln>
-            <a:noFill/>
-          </a:ln>
-        </p:spPr>
-        <p:style>
-          <a:lnRef idx="1">
-            <a:schemeClr val="accent1"/>
-          </a:lnRef>
-          <a:fillRef idx="3">
-            <a:schemeClr val="accent1"/>
-          </a:fillRef>
-          <a:effectRef idx="2">
-            <a:schemeClr val="accent1"/>
-          </a:effectRef>
-          <a:fontRef idx="minor">
-            <a:schemeClr val="lt1"/>
-          </a:fontRef>
-        </p:style>
-        <p:txBody>
-          <a:bodyPr rtlCol="0" anchor="ctr"/>
-          <a:lstStyle/>
-          <a:p>
-            <a:pPr algn="ctr"/>
-          </a:p>
-        </p:txBody>
-      </p:sp>
-      <p:sp>
-        <p:nvSpPr>
-          <p:cNvPr id="6" name="TextBox 5"/>
-          <p:cNvSpPr txBox="1"/>
-          <p:nvPr/>
-        </p:nvSpPr>
-        <p:spPr>
-          <a:xfrm>
-            <a:off x="640080" y="1371600"/>
-            <a:ext cx="10789920" cy="4572000"/>
+            <a:off x="640080" y="1188720"/>
+            <a:ext cx="10789920" cy="5303520"/>
           </a:xfrm>
           <a:prstGeom prst="rect">
             <a:avLst/>
@@ -3912,121 +3778,241 @@
           <a:p>
             <a:pPr>
               <a:spcAft>
-                <a:spcPts val="800"/>
-              </a:spcAft>
-              <a:defRPr sz="2000" b="1">
-                <a:solidFill>
-                  <a:srgbClr val="333333"/>
-                </a:solidFill>
-              </a:defRPr>
-            </a:pPr>
-            <a:r>
-              <a:t>Easy to Learn</a:t>
-            </a:r>
-          </a:p>
-          <a:p>
-            <a:pPr>
-              <a:spcAft>
-                <a:spcPts val="800"/>
-              </a:spcAft>
-              <a:defRPr sz="2000" b="1">
-                <a:solidFill>
-                  <a:srgbClr val="333333"/>
-                </a:solidFill>
-              </a:defRPr>
-            </a:pPr>
-            <a:r>
-              <a:t>Python reads almost like English, making it perfect for beginners</a:t>
-            </a:r>
-          </a:p>
-          <a:p>
-            <a:pPr>
-              <a:spcAft>
-                <a:spcPts val="800"/>
-              </a:spcAft>
-              <a:defRPr sz="2000" b="1">
-                <a:solidFill>
-                  <a:srgbClr val="333333"/>
-                </a:solidFill>
-              </a:defRPr>
-            </a:pPr>
-            <a:r>
-              <a:t>Powerful</a:t>
-            </a:r>
-          </a:p>
-          <a:p>
-            <a:pPr>
-              <a:spcAft>
-                <a:spcPts val="800"/>
-              </a:spcAft>
-              <a:defRPr sz="2000" b="1">
-                <a:solidFill>
-                  <a:srgbClr val="333333"/>
-                </a:solidFill>
-              </a:defRPr>
-            </a:pPr>
-            <a:r>
-              <a:t>Used by Google, Netflix, NASA, and many big companies</a:t>
-            </a:r>
-          </a:p>
-          <a:p>
-            <a:pPr>
-              <a:spcAft>
-                <a:spcPts val="800"/>
-              </a:spcAft>
-              <a:defRPr sz="2000" b="1">
-                <a:solidFill>
-                  <a:srgbClr val="333333"/>
-                </a:solidFill>
-              </a:defRPr>
-            </a:pPr>
-            <a:r>
-              <a:t>Versatile</a:t>
-            </a:r>
-          </a:p>
-          <a:p>
-            <a:pPr>
-              <a:spcAft>
-                <a:spcPts val="800"/>
-              </a:spcAft>
-              <a:defRPr sz="2000" b="1">
-                <a:solidFill>
-                  <a:srgbClr val="333333"/>
-                </a:solidFill>
-              </a:defRPr>
-            </a:pPr>
-            <a:r>
-              <a:t>Build websites, analyze data, create AI, automate tasks, and more!</a:t>
-            </a:r>
-          </a:p>
-          <a:p>
-            <a:pPr>
-              <a:spcAft>
-                <a:spcPts val="800"/>
-              </a:spcAft>
-              <a:defRPr sz="2000" b="1">
-                <a:solidFill>
-                  <a:srgbClr val="333333"/>
-                </a:solidFill>
-              </a:defRPr>
-            </a:pPr>
-            <a:r>
-              <a:t>Popular</a:t>
-            </a:r>
-          </a:p>
-          <a:p>
-            <a:pPr>
-              <a:spcAft>
-                <a:spcPts val="800"/>
-              </a:spcAft>
-              <a:defRPr sz="2000" b="1">
-                <a:solidFill>
-                  <a:srgbClr val="333333"/>
-                </a:solidFill>
-              </a:defRPr>
-            </a:pPr>
-            <a:r>
-              <a:t>One of the most in-demand programming languages in the world</a:t>
+                <a:spcPts val="600"/>
+              </a:spcAft>
+              <a:defRPr b="1" sz="2000">
+                <a:solidFill>
+                  <a:srgbClr val="333333"/>
+                </a:solidFill>
+              </a:defRPr>
+            </a:pPr>
+            <a:r>
+              <a:t>Temperature Converter:</a:t>
+            </a:r>
+          </a:p>
+          <a:p>
+            <a:pPr>
+              <a:spcAft>
+                <a:spcPts val="600"/>
+              </a:spcAft>
+              <a:defRPr sz="1600">
+                <a:solidFill>
+                  <a:srgbClr val="333333"/>
+                </a:solidFill>
+              </a:defRPr>
+            </a:pPr>
+            <a:r>
+              <a:t>celsius = 25</a:t>
+            </a:r>
+          </a:p>
+          <a:p>
+            <a:pPr>
+              <a:spcAft>
+                <a:spcPts val="600"/>
+              </a:spcAft>
+              <a:defRPr sz="1600">
+                <a:solidFill>
+                  <a:srgbClr val="333333"/>
+                </a:solidFill>
+              </a:defRPr>
+            </a:pPr>
+            <a:r>
+              <a:t>fahrenheit = (celsius * 9/5) + 32</a:t>
+            </a:r>
+          </a:p>
+          <a:p>
+            <a:pPr>
+              <a:spcAft>
+                <a:spcPts val="600"/>
+              </a:spcAft>
+              <a:defRPr b="1" sz="2000">
+                <a:solidFill>
+                  <a:srgbClr val="333333"/>
+                </a:solidFill>
+              </a:defRPr>
+            </a:pPr>
+            <a:r>
+              <a:t>Shopping Calculator:</a:t>
+            </a:r>
+          </a:p>
+          <a:p>
+            <a:pPr>
+              <a:spcAft>
+                <a:spcPts val="600"/>
+              </a:spcAft>
+              <a:defRPr sz="1600">
+                <a:solidFill>
+                  <a:srgbClr val="333333"/>
+                </a:solidFill>
+              </a:defRPr>
+            </a:pPr>
+            <a:r>
+              <a:t>price = 50</a:t>
+            </a:r>
+          </a:p>
+          <a:p>
+            <a:pPr>
+              <a:spcAft>
+                <a:spcPts val="600"/>
+              </a:spcAft>
+              <a:defRPr sz="1600">
+                <a:solidFill>
+                  <a:srgbClr val="333333"/>
+                </a:solidFill>
+              </a:defRPr>
+            </a:pPr>
+            <a:r>
+              <a:t>quantity = 3</a:t>
+            </a:r>
+          </a:p>
+          <a:p>
+            <a:pPr>
+              <a:spcAft>
+                <a:spcPts val="600"/>
+              </a:spcAft>
+              <a:defRPr sz="1600">
+                <a:solidFill>
+                  <a:srgbClr val="333333"/>
+                </a:solidFill>
+              </a:defRPr>
+            </a:pPr>
+            <a:r>
+              <a:t>tax_rate = 0.08</a:t>
+            </a:r>
+          </a:p>
+          <a:p>
+            <a:pPr>
+              <a:spcAft>
+                <a:spcPts val="600"/>
+              </a:spcAft>
+              <a:defRPr sz="1600">
+                <a:solidFill>
+                  <a:srgbClr val="333333"/>
+                </a:solidFill>
+              </a:defRPr>
+            </a:pPr>
+            <a:r>
+              <a:t>total = (price * quantity) * (1 + tax_rate)</a:t>
+            </a:r>
+          </a:p>
+          <a:p>
+            <a:pPr>
+              <a:spcAft>
+                <a:spcPts val="600"/>
+              </a:spcAft>
+              <a:defRPr b="1" sz="2000">
+                <a:solidFill>
+                  <a:srgbClr val="333333"/>
+                </a:solidFill>
+              </a:defRPr>
+            </a:pPr>
+            <a:r>
+              <a:t>Age Calculator:</a:t>
+            </a:r>
+          </a:p>
+          <a:p>
+            <a:pPr>
+              <a:spcAft>
+                <a:spcPts val="600"/>
+              </a:spcAft>
+              <a:defRPr sz="1600">
+                <a:solidFill>
+                  <a:srgbClr val="333333"/>
+                </a:solidFill>
+              </a:defRPr>
+            </a:pPr>
+            <a:r>
+              <a:t>birth_year = 2000</a:t>
+            </a:r>
+          </a:p>
+          <a:p>
+            <a:pPr>
+              <a:spcAft>
+                <a:spcPts val="600"/>
+              </a:spcAft>
+              <a:defRPr sz="1600">
+                <a:solidFill>
+                  <a:srgbClr val="333333"/>
+                </a:solidFill>
+              </a:defRPr>
+            </a:pPr>
+            <a:r>
+              <a:t>current_year = 2025</a:t>
+            </a:r>
+          </a:p>
+          <a:p>
+            <a:pPr>
+              <a:spcAft>
+                <a:spcPts val="600"/>
+              </a:spcAft>
+              <a:defRPr sz="1600">
+                <a:solidFill>
+                  <a:srgbClr val="333333"/>
+                </a:solidFill>
+              </a:defRPr>
+            </a:pPr>
+            <a:r>
+              <a:t>age = current_year - birth_year</a:t>
+            </a:r>
+          </a:p>
+          <a:p>
+            <a:pPr>
+              <a:spcAft>
+                <a:spcPts val="600"/>
+              </a:spcAft>
+              <a:defRPr b="1" sz="2000">
+                <a:solidFill>
+                  <a:srgbClr val="333333"/>
+                </a:solidFill>
+              </a:defRPr>
+            </a:pPr>
+            <a:r>
+              <a:t>BMI Calculator:</a:t>
+            </a:r>
+          </a:p>
+          <a:p>
+            <a:pPr>
+              <a:spcAft>
+                <a:spcPts val="600"/>
+              </a:spcAft>
+              <a:defRPr sz="1600">
+                <a:solidFill>
+                  <a:srgbClr val="333333"/>
+                </a:solidFill>
+              </a:defRPr>
+            </a:pPr>
+            <a:r>
+              <a:t>weight = 70  # kg</a:t>
+            </a:r>
+          </a:p>
+          <a:p>
+            <a:pPr>
+              <a:spcAft>
+                <a:spcPts val="600"/>
+              </a:spcAft>
+              <a:defRPr sz="1600">
+                <a:solidFill>
+                  <a:srgbClr val="333333"/>
+                </a:solidFill>
+              </a:defRPr>
+            </a:pPr>
+            <a:r>
+              <a:t>height = 1.75  # meters</a:t>
+            </a:r>
+          </a:p>
+          <a:p>
+            <a:pPr>
+              <a:spcAft>
+                <a:spcPts val="600"/>
+              </a:spcAft>
+              <a:defRPr sz="1600">
+                <a:solidFill>
+                  <a:srgbClr val="333333"/>
+                </a:solidFill>
+              </a:defRPr>
+            </a:pPr>
+            <a:r>
+              <a:t>bmi = weight / (height ** 2)</a:t>
             </a:r>
           </a:p>
         </p:txBody>
@@ -4039,7 +4025,7 @@
 </p:sld>
 </file>
 
-<file path=ppt/slides/slide4.xml><?xml version="1.0" encoding="utf-8"?>
+<file path=ppt/slides/slide12.xml><?xml version="1.0" encoding="utf-8"?>
 <p:sld xmlns:a="http://schemas.openxmlformats.org/drawingml/2006/main" xmlns:p="http://schemas.openxmlformats.org/presentationml/2006/main" xmlns:r="http://schemas.openxmlformats.org/officeDocument/2006/relationships">
   <p:cSld>
     <p:spTree>
@@ -4143,8 +4129,8 @@
         </p:nvSpPr>
         <p:spPr>
           <a:xfrm>
-            <a:off x="457200" y="365760"/>
-            <a:ext cx="10972800" cy="731520"/>
+            <a:off x="457200" y="320040"/>
+            <a:ext cx="10972800" cy="640080"/>
           </a:xfrm>
           <a:prstGeom prst="rect">
             <a:avLst/>
@@ -4158,71 +4144,28 @@
           <a:lstStyle/>
           <a:p>
             <a:pPr>
-              <a:defRPr sz="4000" b="1">
+              <a:defRPr sz="3600" b="1">
                 <a:solidFill>
                   <a:srgbClr val="003366"/>
                 </a:solidFill>
               </a:defRPr>
             </a:pPr>
             <a:r>
-              <a:t>Variables: Storing Information 📦</a:t>
-            </a:r>
-          </a:p>
-        </p:txBody>
-      </p:sp>
-      <p:sp>
-        <p:nvSpPr>
-          <p:cNvPr id="5" name="Rectangle 4"/>
-          <p:cNvSpPr/>
+              <a:t>Common Mistakes to Avoid</a:t>
+            </a:r>
+          </a:p>
+        </p:txBody>
+      </p:sp>
+      <p:sp>
+        <p:nvSpPr>
+          <p:cNvPr id="5" name="TextBox 4"/>
+          <p:cNvSpPr txBox="1"/>
           <p:nvPr/>
         </p:nvSpPr>
         <p:spPr>
           <a:xfrm>
-            <a:off x="457200" y="1005840"/>
-            <a:ext cx="1828800" cy="45720"/>
-          </a:xfrm>
-          <a:prstGeom prst="rect">
-            <a:avLst/>
-          </a:prstGeom>
-          <a:solidFill>
-            <a:srgbClr val="0066CC"/>
-          </a:solidFill>
-          <a:ln>
-            <a:noFill/>
-          </a:ln>
-        </p:spPr>
-        <p:style>
-          <a:lnRef idx="1">
-            <a:schemeClr val="accent1"/>
-          </a:lnRef>
-          <a:fillRef idx="3">
-            <a:schemeClr val="accent1"/>
-          </a:fillRef>
-          <a:effectRef idx="2">
-            <a:schemeClr val="accent1"/>
-          </a:effectRef>
-          <a:fontRef idx="minor">
-            <a:schemeClr val="lt1"/>
-          </a:fontRef>
-        </p:style>
-        <p:txBody>
-          <a:bodyPr rtlCol="0" anchor="ctr"/>
-          <a:lstStyle/>
-          <a:p>
-            <a:pPr algn="ctr"/>
-          </a:p>
-        </p:txBody>
-      </p:sp>
-      <p:sp>
-        <p:nvSpPr>
-          <p:cNvPr id="6" name="TextBox 5"/>
-          <p:cNvSpPr txBox="1"/>
-          <p:nvPr/>
-        </p:nvSpPr>
-        <p:spPr>
-          <a:xfrm>
-            <a:off x="640080" y="1371600"/>
-            <a:ext cx="10789920" cy="4572000"/>
+            <a:off x="640080" y="1188720"/>
+            <a:ext cx="10789920" cy="5303520"/>
           </a:xfrm>
           <a:prstGeom prst="rect">
             <a:avLst/>
@@ -4237,151 +4180,211 @@
           <a:p>
             <a:pPr>
               <a:spcAft>
-                <a:spcPts val="800"/>
-              </a:spcAft>
-              <a:defRPr sz="2000" b="1">
-                <a:solidFill>
-                  <a:srgbClr val="333333"/>
-                </a:solidFill>
-              </a:defRPr>
-            </a:pPr>
-            <a:r>
-              <a:t>Think of a variable as a labeled box where you can store information</a:t>
-            </a:r>
-          </a:p>
-          <a:p>
-            <a:pPr>
-              <a:spcAft>
-                <a:spcPts val="800"/>
-              </a:spcAft>
-              <a:defRPr sz="2000" b="1">
-                <a:solidFill>
-                  <a:srgbClr val="333333"/>
-                </a:solidFill>
-              </a:defRPr>
-            </a:pPr>
-            <a:r>
-              <a:t>Example:</a:t>
-            </a:r>
-          </a:p>
-          <a:p>
-            <a:pPr>
-              <a:spcAft>
-                <a:spcPts val="800"/>
-              </a:spcAft>
-              <a:defRPr sz="2000" b="1">
-                <a:solidFill>
-                  <a:srgbClr val="333333"/>
-                </a:solidFill>
-              </a:defRPr>
-            </a:pPr>
-            <a:r>
-              <a:t>Box Label</a:t>
-            </a:r>
-          </a:p>
-          <a:p>
-            <a:pPr>
-              <a:spcAft>
-                <a:spcPts val="800"/>
-              </a:spcAft>
-              <a:defRPr sz="2000" b="1">
-                <a:solidFill>
-                  <a:srgbClr val="333333"/>
-                </a:solidFill>
-              </a:defRPr>
-            </a:pPr>
-            <a:r>
-              <a:t>name</a:t>
-            </a:r>
-          </a:p>
-          <a:p>
-            <a:pPr>
-              <a:spcAft>
-                <a:spcPts val="800"/>
-              </a:spcAft>
-              <a:defRPr sz="2000" b="1">
-                <a:solidFill>
-                  <a:srgbClr val="333333"/>
-                </a:solidFill>
-              </a:defRPr>
-            </a:pPr>
-            <a:r>
-              <a:t>Contains: "Sarah"</a:t>
-            </a:r>
-          </a:p>
-          <a:p>
-            <a:pPr>
-              <a:spcAft>
-                <a:spcPts val="800"/>
-              </a:spcAft>
-              <a:defRPr sz="2000" b="1">
-                <a:solidFill>
-                  <a:srgbClr val="333333"/>
-                </a:solidFill>
-              </a:defRPr>
-            </a:pPr>
-            <a:r>
-              <a:t>Box Label</a:t>
-            </a:r>
-          </a:p>
-          <a:p>
-            <a:pPr>
-              <a:spcAft>
-                <a:spcPts val="800"/>
-              </a:spcAft>
-              <a:defRPr sz="2000" b="1">
-                <a:solidFill>
-                  <a:srgbClr val="333333"/>
-                </a:solidFill>
-              </a:defRPr>
-            </a:pPr>
-            <a:r>
-              <a:t>Contains: 20</a:t>
-            </a:r>
-          </a:p>
-          <a:p>
-            <a:pPr>
-              <a:spcAft>
-                <a:spcPts val="800"/>
-              </a:spcAft>
-              <a:defRPr sz="2000" b="1">
-                <a:solidFill>
-                  <a:srgbClr val="333333"/>
-                </a:solidFill>
-              </a:defRPr>
-            </a:pPr>
-            <a:r>
-              <a:t>Box Label</a:t>
-            </a:r>
-          </a:p>
-          <a:p>
-            <a:pPr>
-              <a:spcAft>
-                <a:spcPts val="800"/>
-              </a:spcAft>
-              <a:defRPr sz="2000" b="1">
-                <a:solidFill>
-                  <a:srgbClr val="333333"/>
-                </a:solidFill>
-              </a:defRPr>
-            </a:pPr>
-            <a:r>
-              <a:t>height</a:t>
-            </a:r>
-          </a:p>
-          <a:p>
-            <a:pPr>
-              <a:spcAft>
-                <a:spcPts val="800"/>
-              </a:spcAft>
-              <a:defRPr sz="2000" b="1">
-                <a:solidFill>
-                  <a:srgbClr val="333333"/>
-                </a:solidFill>
-              </a:defRPr>
-            </a:pPr>
-            <a:r>
-              <a:t>Contains: 1.65</a:t>
+                <a:spcPts val="600"/>
+              </a:spcAft>
+              <a:defRPr b="1" sz="2000">
+                <a:solidFill>
+                  <a:srgbClr val="333333"/>
+                </a:solidFill>
+              </a:defRPr>
+            </a:pPr>
+            <a:r>
+              <a:t>Syntax Errors:</a:t>
+            </a:r>
+          </a:p>
+          <a:p>
+            <a:pPr lvl="1">
+              <a:spcAft>
+                <a:spcPts val="400"/>
+              </a:spcAft>
+              <a:defRPr sz="1600">
+                <a:solidFill>
+                  <a:srgbClr val="333333"/>
+                </a:solidFill>
+              </a:defRPr>
+            </a:pPr>
+            <a:r>
+              <a:t>• Forgetting quotes: name = Alice (ERROR)</a:t>
+            </a:r>
+          </a:p>
+          <a:p>
+            <a:pPr lvl="1">
+              <a:spcAft>
+                <a:spcPts val="400"/>
+              </a:spcAft>
+              <a:defRPr sz="1600">
+                <a:solidFill>
+                  <a:srgbClr val="333333"/>
+                </a:solidFill>
+              </a:defRPr>
+            </a:pPr>
+            <a:r>
+              <a:t>• Correct: name = "Alice"</a:t>
+            </a:r>
+          </a:p>
+          <a:p>
+            <a:pPr>
+              <a:spcAft>
+                <a:spcPts val="600"/>
+              </a:spcAft>
+              <a:defRPr b="1" sz="2000">
+                <a:solidFill>
+                  <a:srgbClr val="333333"/>
+                </a:solidFill>
+              </a:defRPr>
+            </a:pPr>
+            <a:r>
+              <a:t>Type Errors:</a:t>
+            </a:r>
+          </a:p>
+          <a:p>
+            <a:pPr lvl="1">
+              <a:spcAft>
+                <a:spcPts val="400"/>
+              </a:spcAft>
+              <a:defRPr sz="1600">
+                <a:solidFill>
+                  <a:srgbClr val="333333"/>
+                </a:solidFill>
+              </a:defRPr>
+            </a:pPr>
+            <a:r>
+              <a:t>• Mixing types: "5" + 3 (ERROR)</a:t>
+            </a:r>
+          </a:p>
+          <a:p>
+            <a:pPr lvl="1">
+              <a:spcAft>
+                <a:spcPts val="400"/>
+              </a:spcAft>
+              <a:defRPr sz="1600">
+                <a:solidFill>
+                  <a:srgbClr val="333333"/>
+                </a:solidFill>
+              </a:defRPr>
+            </a:pPr>
+            <a:r>
+              <a:t>• Correct: int("5") + 3 or "5" + str(3)</a:t>
+            </a:r>
+          </a:p>
+          <a:p>
+            <a:pPr>
+              <a:spcAft>
+                <a:spcPts val="600"/>
+              </a:spcAft>
+              <a:defRPr b="1" sz="2000">
+                <a:solidFill>
+                  <a:srgbClr val="333333"/>
+                </a:solidFill>
+              </a:defRPr>
+            </a:pPr>
+            <a:r>
+              <a:t>Variable Name Errors:</a:t>
+            </a:r>
+          </a:p>
+          <a:p>
+            <a:pPr lvl="1">
+              <a:spcAft>
+                <a:spcPts val="400"/>
+              </a:spcAft>
+              <a:defRPr sz="1600">
+                <a:solidFill>
+                  <a:srgbClr val="333333"/>
+                </a:solidFill>
+              </a:defRPr>
+            </a:pPr>
+            <a:r>
+              <a:t>• Using keywords: for = 5 (ERROR)</a:t>
+            </a:r>
+          </a:p>
+          <a:p>
+            <a:pPr lvl="1">
+              <a:spcAft>
+                <a:spcPts val="400"/>
+              </a:spcAft>
+              <a:defRPr sz="1600">
+                <a:solidFill>
+                  <a:srgbClr val="333333"/>
+                </a:solidFill>
+              </a:defRPr>
+            </a:pPr>
+            <a:r>
+              <a:t>• Starting with number: 2nd_place (ERROR)</a:t>
+            </a:r>
+          </a:p>
+          <a:p>
+            <a:pPr lvl="1">
+              <a:spcAft>
+                <a:spcPts val="400"/>
+              </a:spcAft>
+              <a:defRPr sz="1600">
+                <a:solidFill>
+                  <a:srgbClr val="333333"/>
+                </a:solidFill>
+              </a:defRPr>
+            </a:pPr>
+            <a:r>
+              <a:t>• Correct: second_place</a:t>
+            </a:r>
+          </a:p>
+          <a:p>
+            <a:pPr>
+              <a:spcAft>
+                <a:spcPts val="600"/>
+              </a:spcAft>
+              <a:defRPr b="1" sz="2000">
+                <a:solidFill>
+                  <a:srgbClr val="333333"/>
+                </a:solidFill>
+              </a:defRPr>
+            </a:pPr>
+            <a:r>
+              <a:t>Case Sensitivity:</a:t>
+            </a:r>
+          </a:p>
+          <a:p>
+            <a:pPr lvl="1">
+              <a:spcAft>
+                <a:spcPts val="400"/>
+              </a:spcAft>
+              <a:defRPr sz="1600">
+                <a:solidFill>
+                  <a:srgbClr val="333333"/>
+                </a:solidFill>
+              </a:defRPr>
+            </a:pPr>
+            <a:r>
+              <a:t>• Name ≠ name ≠ NAME</a:t>
+            </a:r>
+          </a:p>
+          <a:p>
+            <a:pPr>
+              <a:spcAft>
+                <a:spcPts val="600"/>
+              </a:spcAft>
+              <a:defRPr b="1" sz="2000">
+                <a:solidFill>
+                  <a:srgbClr val="333333"/>
+                </a:solidFill>
+              </a:defRPr>
+            </a:pPr>
+            <a:r>
+              <a:t>Undefined Variables:</a:t>
+            </a:r>
+          </a:p>
+          <a:p>
+            <a:pPr lvl="1">
+              <a:spcAft>
+                <a:spcPts val="400"/>
+              </a:spcAft>
+              <a:defRPr sz="1600">
+                <a:solidFill>
+                  <a:srgbClr val="333333"/>
+                </a:solidFill>
+              </a:defRPr>
+            </a:pPr>
+            <a:r>
+              <a:t>• print(total) before defining total</a:t>
             </a:r>
           </a:p>
         </p:txBody>
@@ -4394,7 +4397,7 @@
 </p:sld>
 </file>
 
-<file path=ppt/slides/slide5.xml><?xml version="1.0" encoding="utf-8"?>
+<file path=ppt/slides/slide13.xml><?xml version="1.0" encoding="utf-8"?>
 <p:sld xmlns:a="http://schemas.openxmlformats.org/drawingml/2006/main" xmlns:p="http://schemas.openxmlformats.org/presentationml/2006/main" xmlns:r="http://schemas.openxmlformats.org/officeDocument/2006/relationships">
   <p:cSld>
     <p:spTree>
@@ -4498,8 +4501,8 @@
         </p:nvSpPr>
         <p:spPr>
           <a:xfrm>
-            <a:off x="457200" y="365760"/>
-            <a:ext cx="10972800" cy="731520"/>
+            <a:off x="457200" y="320040"/>
+            <a:ext cx="10972800" cy="640080"/>
           </a:xfrm>
           <a:prstGeom prst="rect">
             <a:avLst/>
@@ -4513,71 +4516,28 @@
           <a:lstStyle/>
           <a:p>
             <a:pPr>
-              <a:defRPr sz="4000" b="1">
+              <a:defRPr sz="3600" b="1">
                 <a:solidFill>
                   <a:srgbClr val="003366"/>
                 </a:solidFill>
               </a:defRPr>
             </a:pPr>
             <a:r>
-              <a:t>Data Types: Numbers 🔢</a:t>
-            </a:r>
-          </a:p>
-        </p:txBody>
-      </p:sp>
-      <p:sp>
-        <p:nvSpPr>
-          <p:cNvPr id="5" name="Rectangle 4"/>
-          <p:cNvSpPr/>
+              <a:t>Key Concepts Review</a:t>
+            </a:r>
+          </a:p>
+        </p:txBody>
+      </p:sp>
+      <p:sp>
+        <p:nvSpPr>
+          <p:cNvPr id="5" name="TextBox 4"/>
+          <p:cNvSpPr txBox="1"/>
           <p:nvPr/>
         </p:nvSpPr>
         <p:spPr>
           <a:xfrm>
-            <a:off x="457200" y="1005840"/>
-            <a:ext cx="1828800" cy="45720"/>
-          </a:xfrm>
-          <a:prstGeom prst="rect">
-            <a:avLst/>
-          </a:prstGeom>
-          <a:solidFill>
-            <a:srgbClr val="0066CC"/>
-          </a:solidFill>
-          <a:ln>
-            <a:noFill/>
-          </a:ln>
-        </p:spPr>
-        <p:style>
-          <a:lnRef idx="1">
-            <a:schemeClr val="accent1"/>
-          </a:lnRef>
-          <a:fillRef idx="3">
-            <a:schemeClr val="accent1"/>
-          </a:fillRef>
-          <a:effectRef idx="2">
-            <a:schemeClr val="accent1"/>
-          </a:effectRef>
-          <a:fontRef idx="minor">
-            <a:schemeClr val="lt1"/>
-          </a:fontRef>
-        </p:style>
-        <p:txBody>
-          <a:bodyPr rtlCol="0" anchor="ctr"/>
-          <a:lstStyle/>
-          <a:p>
-            <a:pPr algn="ctr"/>
-          </a:p>
-        </p:txBody>
-      </p:sp>
-      <p:sp>
-        <p:nvSpPr>
-          <p:cNvPr id="6" name="TextBox 5"/>
-          <p:cNvSpPr txBox="1"/>
-          <p:nvPr/>
-        </p:nvSpPr>
-        <p:spPr>
-          <a:xfrm>
-            <a:off x="640080" y="1371600"/>
-            <a:ext cx="10789920" cy="4572000"/>
+            <a:off x="640080" y="1188720"/>
+            <a:ext cx="10789920" cy="5303520"/>
           </a:xfrm>
           <a:prstGeom prst="rect">
             <a:avLst/>
@@ -4592,61 +4552,271 @@
           <a:p>
             <a:pPr>
               <a:spcAft>
-                <a:spcPts val="800"/>
-              </a:spcAft>
-              <a:defRPr sz="2000" b="1">
-                <a:solidFill>
-                  <a:srgbClr val="333333"/>
-                </a:solidFill>
-              </a:defRPr>
-            </a:pPr>
-            <a:r>
-              <a:t>Integers (int)</a:t>
-            </a:r>
-          </a:p>
-          <a:p>
-            <a:pPr>
-              <a:spcAft>
-                <a:spcPts val="800"/>
-              </a:spcAft>
-              <a:defRPr sz="2000" b="1">
-                <a:solidFill>
-                  <a:srgbClr val="333333"/>
-                </a:solidFill>
-              </a:defRPr>
-            </a:pPr>
-            <a:r>
-              <a:t>Whole numbers without decimals</a:t>
-            </a:r>
-          </a:p>
-          <a:p>
-            <a:pPr>
-              <a:spcAft>
-                <a:spcPts val="800"/>
-              </a:spcAft>
-              <a:defRPr sz="2000" b="1">
-                <a:solidFill>
-                  <a:srgbClr val="333333"/>
-                </a:solidFill>
-              </a:defRPr>
-            </a:pPr>
-            <a:r>
-              <a:t>Floats (float)</a:t>
-            </a:r>
-          </a:p>
-          <a:p>
-            <a:pPr>
-              <a:spcAft>
-                <a:spcPts val="800"/>
-              </a:spcAft>
-              <a:defRPr sz="2000" b="1">
-                <a:solidFill>
-                  <a:srgbClr val="333333"/>
-                </a:solidFill>
-              </a:defRPr>
-            </a:pPr>
-            <a:r>
-              <a:t>Numbers with decimal points</a:t>
+                <a:spcPts val="600"/>
+              </a:spcAft>
+              <a:defRPr b="1" sz="2000">
+                <a:solidFill>
+                  <a:srgbClr val="333333"/>
+                </a:solidFill>
+              </a:defRPr>
+            </a:pPr>
+            <a:r>
+              <a:t>Variables: Named storage for data</a:t>
+            </a:r>
+          </a:p>
+          <a:p>
+            <a:pPr lvl="1">
+              <a:spcAft>
+                <a:spcPts val="400"/>
+              </a:spcAft>
+              <a:defRPr sz="1600">
+                <a:solidFill>
+                  <a:srgbClr val="333333"/>
+                </a:solidFill>
+              </a:defRPr>
+            </a:pPr>
+            <a:r>
+              <a:t>• Assignment: variable_name = value</a:t>
+            </a:r>
+          </a:p>
+          <a:p>
+            <a:pPr lvl="1">
+              <a:spcAft>
+                <a:spcPts val="400"/>
+              </a:spcAft>
+              <a:defRPr sz="1600">
+                <a:solidFill>
+                  <a:srgbClr val="333333"/>
+                </a:solidFill>
+              </a:defRPr>
+            </a:pPr>
+            <a:r>
+              <a:t>• Can be updated: x = x + 1</a:t>
+            </a:r>
+          </a:p>
+          <a:p>
+            <a:pPr>
+              <a:spcAft>
+                <a:spcPts val="600"/>
+              </a:spcAft>
+              <a:defRPr b="1" sz="2000">
+                <a:solidFill>
+                  <a:srgbClr val="333333"/>
+                </a:solidFill>
+              </a:defRPr>
+            </a:pPr>
+            <a:r>
+              <a:t>Data Types:</a:t>
+            </a:r>
+          </a:p>
+          <a:p>
+            <a:pPr lvl="1">
+              <a:spcAft>
+                <a:spcPts val="400"/>
+              </a:spcAft>
+              <a:defRPr sz="1600">
+                <a:solidFill>
+                  <a:srgbClr val="333333"/>
+                </a:solidFill>
+              </a:defRPr>
+            </a:pPr>
+            <a:r>
+              <a:t>• int: Whole numbers (42, -10)</a:t>
+            </a:r>
+          </a:p>
+          <a:p>
+            <a:pPr lvl="1">
+              <a:spcAft>
+                <a:spcPts val="400"/>
+              </a:spcAft>
+              <a:defRPr sz="1600">
+                <a:solidFill>
+                  <a:srgbClr val="333333"/>
+                </a:solidFill>
+              </a:defRPr>
+            </a:pPr>
+            <a:r>
+              <a:t>• float: Decimals (3.14, -0.5)</a:t>
+            </a:r>
+          </a:p>
+          <a:p>
+            <a:pPr lvl="1">
+              <a:spcAft>
+                <a:spcPts val="400"/>
+              </a:spcAft>
+              <a:defRPr sz="1600">
+                <a:solidFill>
+                  <a:srgbClr val="333333"/>
+                </a:solidFill>
+              </a:defRPr>
+            </a:pPr>
+            <a:r>
+              <a:t>• str: Text ("Hello", 'Python')</a:t>
+            </a:r>
+          </a:p>
+          <a:p>
+            <a:pPr>
+              <a:spcAft>
+                <a:spcPts val="600"/>
+              </a:spcAft>
+              <a:defRPr b="1" sz="2000">
+                <a:solidFill>
+                  <a:srgbClr val="333333"/>
+                </a:solidFill>
+              </a:defRPr>
+            </a:pPr>
+            <a:r>
+              <a:t>Operations:</a:t>
+            </a:r>
+          </a:p>
+          <a:p>
+            <a:pPr lvl="1">
+              <a:spcAft>
+                <a:spcPts val="400"/>
+              </a:spcAft>
+              <a:defRPr sz="1600">
+                <a:solidFill>
+                  <a:srgbClr val="333333"/>
+                </a:solidFill>
+              </a:defRPr>
+            </a:pPr>
+            <a:r>
+              <a:t>• Arithmetic: +, -, *, /, //, %, **</a:t>
+            </a:r>
+          </a:p>
+          <a:p>
+            <a:pPr lvl="1">
+              <a:spcAft>
+                <a:spcPts val="400"/>
+              </a:spcAft>
+              <a:defRPr sz="1600">
+                <a:solidFill>
+                  <a:srgbClr val="333333"/>
+                </a:solidFill>
+              </a:defRPr>
+            </a:pPr>
+            <a:r>
+              <a:t>• Assignment: =, +=, -=, *=, /=</a:t>
+            </a:r>
+          </a:p>
+          <a:p>
+            <a:pPr>
+              <a:spcAft>
+                <a:spcPts val="600"/>
+              </a:spcAft>
+              <a:defRPr b="1" sz="2000">
+                <a:solidFill>
+                  <a:srgbClr val="333333"/>
+                </a:solidFill>
+              </a:defRPr>
+            </a:pPr>
+            <a:r>
+              <a:t>Functions:</a:t>
+            </a:r>
+          </a:p>
+          <a:p>
+            <a:pPr lvl="1">
+              <a:spcAft>
+                <a:spcPts val="400"/>
+              </a:spcAft>
+              <a:defRPr sz="1600">
+                <a:solidFill>
+                  <a:srgbClr val="333333"/>
+                </a:solidFill>
+              </a:defRPr>
+            </a:pPr>
+            <a:r>
+              <a:t>• print(): Display output</a:t>
+            </a:r>
+          </a:p>
+          <a:p>
+            <a:pPr lvl="1">
+              <a:spcAft>
+                <a:spcPts val="400"/>
+              </a:spcAft>
+              <a:defRPr sz="1600">
+                <a:solidFill>
+                  <a:srgbClr val="333333"/>
+                </a:solidFill>
+              </a:defRPr>
+            </a:pPr>
+            <a:r>
+              <a:t>• type(): Check data type</a:t>
+            </a:r>
+          </a:p>
+          <a:p>
+            <a:pPr lvl="1">
+              <a:spcAft>
+                <a:spcPts val="400"/>
+              </a:spcAft>
+              <a:defRPr sz="1600">
+                <a:solidFill>
+                  <a:srgbClr val="333333"/>
+                </a:solidFill>
+              </a:defRPr>
+            </a:pPr>
+            <a:r>
+              <a:t>• int(), float(), str(): Convert types</a:t>
+            </a:r>
+          </a:p>
+          <a:p>
+            <a:pPr>
+              <a:spcAft>
+                <a:spcPts val="600"/>
+              </a:spcAft>
+              <a:defRPr b="1" sz="2000">
+                <a:solidFill>
+                  <a:srgbClr val="333333"/>
+                </a:solidFill>
+              </a:defRPr>
+            </a:pPr>
+            <a:r>
+              <a:t>Best Practices:</a:t>
+            </a:r>
+          </a:p>
+          <a:p>
+            <a:pPr lvl="1">
+              <a:spcAft>
+                <a:spcPts val="400"/>
+              </a:spcAft>
+              <a:defRPr sz="1600">
+                <a:solidFill>
+                  <a:srgbClr val="333333"/>
+                </a:solidFill>
+              </a:defRPr>
+            </a:pPr>
+            <a:r>
+              <a:t>• Use descriptive variable names</a:t>
+            </a:r>
+          </a:p>
+          <a:p>
+            <a:pPr lvl="1">
+              <a:spcAft>
+                <a:spcPts val="400"/>
+              </a:spcAft>
+              <a:defRPr sz="1600">
+                <a:solidFill>
+                  <a:srgbClr val="333333"/>
+                </a:solidFill>
+              </a:defRPr>
+            </a:pPr>
+            <a:r>
+              <a:t>• Add comments for clarity</a:t>
+            </a:r>
+          </a:p>
+          <a:p>
+            <a:pPr lvl="1">
+              <a:spcAft>
+                <a:spcPts val="400"/>
+              </a:spcAft>
+              <a:defRPr sz="1600">
+                <a:solidFill>
+                  <a:srgbClr val="333333"/>
+                </a:solidFill>
+              </a:defRPr>
+            </a:pPr>
+            <a:r>
+              <a:t>• Test code frequently</a:t>
             </a:r>
           </a:p>
         </p:txBody>
@@ -4659,7 +4829,7 @@
 </p:sld>
 </file>
 
-<file path=ppt/slides/slide6.xml><?xml version="1.0" encoding="utf-8"?>
+<file path=ppt/slides/slide2.xml><?xml version="1.0" encoding="utf-8"?>
 <p:sld xmlns:a="http://schemas.openxmlformats.org/drawingml/2006/main" xmlns:p="http://schemas.openxmlformats.org/presentationml/2006/main" xmlns:r="http://schemas.openxmlformats.org/officeDocument/2006/relationships">
   <p:cSld>
     <p:spTree>
@@ -4763,8 +4933,8 @@
         </p:nvSpPr>
         <p:spPr>
           <a:xfrm>
-            <a:off x="457200" y="365760"/>
-            <a:ext cx="10972800" cy="731520"/>
+            <a:off x="457200" y="320040"/>
+            <a:ext cx="10972800" cy="640080"/>
           </a:xfrm>
           <a:prstGeom prst="rect">
             <a:avLst/>
@@ -4778,71 +4948,28 @@
           <a:lstStyle/>
           <a:p>
             <a:pPr>
-              <a:defRPr sz="4000" b="1">
+              <a:defRPr sz="3600" b="1">
                 <a:solidFill>
                   <a:srgbClr val="003366"/>
                 </a:solidFill>
               </a:defRPr>
             </a:pPr>
             <a:r>
-              <a:t>Data Types: Text (Strings) 📝</a:t>
-            </a:r>
-          </a:p>
-        </p:txBody>
-      </p:sp>
-      <p:sp>
-        <p:nvSpPr>
-          <p:cNvPr id="5" name="Rectangle 4"/>
-          <p:cNvSpPr/>
+              <a:t>What is Programming?</a:t>
+            </a:r>
+          </a:p>
+        </p:txBody>
+      </p:sp>
+      <p:sp>
+        <p:nvSpPr>
+          <p:cNvPr id="5" name="TextBox 4"/>
+          <p:cNvSpPr txBox="1"/>
           <p:nvPr/>
         </p:nvSpPr>
         <p:spPr>
           <a:xfrm>
-            <a:off x="457200" y="1005840"/>
-            <a:ext cx="1828800" cy="45720"/>
-          </a:xfrm>
-          <a:prstGeom prst="rect">
-            <a:avLst/>
-          </a:prstGeom>
-          <a:solidFill>
-            <a:srgbClr val="0066CC"/>
-          </a:solidFill>
-          <a:ln>
-            <a:noFill/>
-          </a:ln>
-        </p:spPr>
-        <p:style>
-          <a:lnRef idx="1">
-            <a:schemeClr val="accent1"/>
-          </a:lnRef>
-          <a:fillRef idx="3">
-            <a:schemeClr val="accent1"/>
-          </a:fillRef>
-          <a:effectRef idx="2">
-            <a:schemeClr val="accent1"/>
-          </a:effectRef>
-          <a:fontRef idx="minor">
-            <a:schemeClr val="lt1"/>
-          </a:fontRef>
-        </p:style>
-        <p:txBody>
-          <a:bodyPr rtlCol="0" anchor="ctr"/>
-          <a:lstStyle/>
-          <a:p>
-            <a:pPr algn="ctr"/>
-          </a:p>
-        </p:txBody>
-      </p:sp>
-      <p:sp>
-        <p:nvSpPr>
-          <p:cNvPr id="6" name="TextBox 5"/>
-          <p:cNvSpPr txBox="1"/>
-          <p:nvPr/>
-        </p:nvSpPr>
-        <p:spPr>
-          <a:xfrm>
-            <a:off x="640080" y="1371600"/>
-            <a:ext cx="10789920" cy="4572000"/>
+            <a:off x="640080" y="1188720"/>
+            <a:ext cx="10789920" cy="5303520"/>
           </a:xfrm>
           <a:prstGeom prst="rect">
             <a:avLst/>
@@ -4857,61 +4984,136 @@
           <a:p>
             <a:pPr>
               <a:spcAft>
-                <a:spcPts val="800"/>
-              </a:spcAft>
-              <a:defRPr sz="2000" b="1">
-                <a:solidFill>
-                  <a:srgbClr val="333333"/>
-                </a:solidFill>
-              </a:defRPr>
-            </a:pPr>
-            <a:r>
-              <a:t>Strings are text enclosed in quotes - single or double</a:t>
-            </a:r>
-          </a:p>
-          <a:p>
-            <a:pPr>
-              <a:spcAft>
-                <a:spcPts val="800"/>
-              </a:spcAft>
-              <a:defRPr sz="2000" b="1">
-                <a:solidFill>
-                  <a:srgbClr val="333333"/>
-                </a:solidFill>
-              </a:defRPr>
-            </a:pPr>
-            <a:r>
-              <a:t>Important:Both 'single' and "double" quotes work, but be consistent!</a:t>
-            </a:r>
-          </a:p>
-          <a:p>
-            <a:pPr>
-              <a:spcAft>
-                <a:spcPts val="800"/>
-              </a:spcAft>
-              <a:defRPr sz="2000" b="1">
-                <a:solidFill>
-                  <a:srgbClr val="333333"/>
-                </a:solidFill>
-              </a:defRPr>
-            </a:pPr>
-            <a:r>
-              <a:t>✓ Correct</a:t>
-            </a:r>
-          </a:p>
-          <a:p>
-            <a:pPr>
-              <a:spcAft>
-                <a:spcPts val="800"/>
-              </a:spcAft>
-              <a:defRPr sz="2000" b="1">
-                <a:solidFill>
-                  <a:srgbClr val="333333"/>
-                </a:solidFill>
-              </a:defRPr>
-            </a:pPr>
-            <a:r>
-              <a:t>✗ Wrong</a:t>
+                <a:spcPts val="600"/>
+              </a:spcAft>
+              <a:defRPr b="1" sz="2000">
+                <a:solidFill>
+                  <a:srgbClr val="333333"/>
+                </a:solidFill>
+              </a:defRPr>
+            </a:pPr>
+            <a:r>
+              <a:t>Programming: Writing instructions for computers to follow</a:t>
+            </a:r>
+          </a:p>
+          <a:p>
+            <a:pPr>
+              <a:spcAft>
+                <a:spcPts val="600"/>
+              </a:spcAft>
+              <a:defRPr b="1" sz="2000">
+                <a:solidFill>
+                  <a:srgbClr val="333333"/>
+                </a:solidFill>
+              </a:defRPr>
+            </a:pPr>
+            <a:r>
+              <a:t>Programmers: People who write these instructions</a:t>
+            </a:r>
+          </a:p>
+          <a:p>
+            <a:pPr>
+              <a:spcAft>
+                <a:spcPts val="600"/>
+              </a:spcAft>
+              <a:defRPr b="1" sz="2000">
+                <a:solidFill>
+                  <a:srgbClr val="333333"/>
+                </a:solidFill>
+              </a:defRPr>
+            </a:pPr>
+            <a:r>
+              <a:t>Programs: Sets of instructions that make computers do useful things</a:t>
+            </a:r>
+          </a:p>
+          <a:p>
+            <a:pPr>
+              <a:spcAft>
+                <a:spcPts val="600"/>
+              </a:spcAft>
+              <a:defRPr sz="1600">
+                <a:solidFill>
+                  <a:srgbClr val="333333"/>
+                </a:solidFill>
+              </a:defRPr>
+            </a:pPr>
+            <a:r>
+              <a:t>Why Learn Programming?</a:t>
+            </a:r>
+          </a:p>
+          <a:p>
+            <a:pPr lvl="1">
+              <a:spcAft>
+                <a:spcPts val="400"/>
+              </a:spcAft>
+              <a:defRPr sz="1600">
+                <a:solidFill>
+                  <a:srgbClr val="333333"/>
+                </a:solidFill>
+              </a:defRPr>
+            </a:pPr>
+            <a:r>
+              <a:t>• Automate repetitive tasks</a:t>
+            </a:r>
+          </a:p>
+          <a:p>
+            <a:pPr lvl="1">
+              <a:spcAft>
+                <a:spcPts val="400"/>
+              </a:spcAft>
+              <a:defRPr sz="1600">
+                <a:solidFill>
+                  <a:srgbClr val="333333"/>
+                </a:solidFill>
+              </a:defRPr>
+            </a:pPr>
+            <a:r>
+              <a:t>• Solve complex problems efficiently</a:t>
+            </a:r>
+          </a:p>
+          <a:p>
+            <a:pPr lvl="1">
+              <a:spcAft>
+                <a:spcPts val="400"/>
+              </a:spcAft>
+              <a:defRPr sz="1600">
+                <a:solidFill>
+                  <a:srgbClr val="333333"/>
+                </a:solidFill>
+              </a:defRPr>
+            </a:pPr>
+            <a:r>
+              <a:t>• Create websites, apps, and games</a:t>
+            </a:r>
+          </a:p>
+          <a:p>
+            <a:pPr lvl="1">
+              <a:spcAft>
+                <a:spcPts val="400"/>
+              </a:spcAft>
+              <a:defRPr sz="1600">
+                <a:solidFill>
+                  <a:srgbClr val="333333"/>
+                </a:solidFill>
+              </a:defRPr>
+            </a:pPr>
+            <a:r>
+              <a:t>• Analyze data and make predictions</a:t>
+            </a:r>
+          </a:p>
+          <a:p>
+            <a:pPr lvl="1">
+              <a:spcAft>
+                <a:spcPts val="400"/>
+              </a:spcAft>
+              <a:defRPr sz="1600">
+                <a:solidFill>
+                  <a:srgbClr val="333333"/>
+                </a:solidFill>
+              </a:defRPr>
+            </a:pPr>
+            <a:r>
+              <a:t>• High demand skill in modern job market</a:t>
             </a:r>
           </a:p>
         </p:txBody>
@@ -4924,7 +5126,7 @@
 </p:sld>
 </file>
 
-<file path=ppt/slides/slide7.xml><?xml version="1.0" encoding="utf-8"?>
+<file path=ppt/slides/slide3.xml><?xml version="1.0" encoding="utf-8"?>
 <p:sld xmlns:a="http://schemas.openxmlformats.org/drawingml/2006/main" xmlns:p="http://schemas.openxmlformats.org/presentationml/2006/main" xmlns:r="http://schemas.openxmlformats.org/officeDocument/2006/relationships">
   <p:cSld>
     <p:spTree>
@@ -5028,8 +5230,8 @@
         </p:nvSpPr>
         <p:spPr>
           <a:xfrm>
-            <a:off x="457200" y="365760"/>
-            <a:ext cx="10972800" cy="731520"/>
+            <a:off x="457200" y="320040"/>
+            <a:ext cx="10972800" cy="640080"/>
           </a:xfrm>
           <a:prstGeom prst="rect">
             <a:avLst/>
@@ -5043,71 +5245,28 @@
           <a:lstStyle/>
           <a:p>
             <a:pPr>
-              <a:defRPr sz="4000" b="1">
+              <a:defRPr sz="3600" b="1">
                 <a:solidFill>
                   <a:srgbClr val="003366"/>
                 </a:solidFill>
               </a:defRPr>
             </a:pPr>
             <a:r>
-              <a:t>Math Operations ➕➖✖️➗</a:t>
-            </a:r>
-          </a:p>
-        </p:txBody>
-      </p:sp>
-      <p:sp>
-        <p:nvSpPr>
-          <p:cNvPr id="5" name="Rectangle 4"/>
-          <p:cNvSpPr/>
+              <a:t>Why Python?</a:t>
+            </a:r>
+          </a:p>
+        </p:txBody>
+      </p:sp>
+      <p:sp>
+        <p:nvSpPr>
+          <p:cNvPr id="5" name="TextBox 4"/>
+          <p:cNvSpPr txBox="1"/>
           <p:nvPr/>
         </p:nvSpPr>
         <p:spPr>
           <a:xfrm>
-            <a:off x="457200" y="1005840"/>
-            <a:ext cx="1828800" cy="45720"/>
-          </a:xfrm>
-          <a:prstGeom prst="rect">
-            <a:avLst/>
-          </a:prstGeom>
-          <a:solidFill>
-            <a:srgbClr val="0066CC"/>
-          </a:solidFill>
-          <a:ln>
-            <a:noFill/>
-          </a:ln>
-        </p:spPr>
-        <p:style>
-          <a:lnRef idx="1">
-            <a:schemeClr val="accent1"/>
-          </a:lnRef>
-          <a:fillRef idx="3">
-            <a:schemeClr val="accent1"/>
-          </a:fillRef>
-          <a:effectRef idx="2">
-            <a:schemeClr val="accent1"/>
-          </a:effectRef>
-          <a:fontRef idx="minor">
-            <a:schemeClr val="lt1"/>
-          </a:fontRef>
-        </p:style>
-        <p:txBody>
-          <a:bodyPr rtlCol="0" anchor="ctr"/>
-          <a:lstStyle/>
-          <a:p>
-            <a:pPr algn="ctr"/>
-          </a:p>
-        </p:txBody>
-      </p:sp>
-      <p:sp>
-        <p:nvSpPr>
-          <p:cNvPr id="6" name="TextBox 5"/>
-          <p:cNvSpPr txBox="1"/>
-          <p:nvPr/>
-        </p:nvSpPr>
-        <p:spPr>
-          <a:xfrm>
-            <a:off x="640080" y="1371600"/>
-            <a:ext cx="10789920" cy="4572000"/>
+            <a:off x="640080" y="1188720"/>
+            <a:ext cx="10789920" cy="5303520"/>
           </a:xfrm>
           <a:prstGeom prst="rect">
             <a:avLst/>
@@ -5122,91 +5281,196 @@
           <a:p>
             <a:pPr>
               <a:spcAft>
-                <a:spcPts val="800"/>
-              </a:spcAft>
-              <a:defRPr sz="2000" b="1">
-                <a:solidFill>
-                  <a:srgbClr val="333333"/>
-                </a:solidFill>
-              </a:defRPr>
-            </a:pPr>
-            <a:r>
-              <a:t>Addition (+)</a:t>
-            </a:r>
-          </a:p>
-          <a:p>
-            <a:pPr>
-              <a:spcAft>
-                <a:spcPts val="800"/>
-              </a:spcAft>
-              <a:defRPr sz="2000" b="1">
-                <a:solidFill>
-                  <a:srgbClr val="333333"/>
-                </a:solidFill>
-              </a:defRPr>
-            </a:pPr>
-            <a:r>
-              <a:t>Subtraction (-)</a:t>
-            </a:r>
-          </a:p>
-          <a:p>
-            <a:pPr>
-              <a:spcAft>
-                <a:spcPts val="800"/>
-              </a:spcAft>
-              <a:defRPr sz="2000" b="1">
-                <a:solidFill>
-                  <a:srgbClr val="333333"/>
-                </a:solidFill>
-              </a:defRPr>
-            </a:pPr>
-            <a:r>
-              <a:t>Multiplication (*)</a:t>
-            </a:r>
-          </a:p>
-          <a:p>
-            <a:pPr>
-              <a:spcAft>
-                <a:spcPts val="800"/>
-              </a:spcAft>
-              <a:defRPr sz="2000" b="1">
-                <a:solidFill>
-                  <a:srgbClr val="333333"/>
-                </a:solidFill>
-              </a:defRPr>
-            </a:pPr>
-            <a:r>
-              <a:t>Division (/)</a:t>
-            </a:r>
-          </a:p>
-          <a:p>
-            <a:pPr>
-              <a:spcAft>
-                <a:spcPts val="800"/>
-              </a:spcAft>
-              <a:defRPr sz="2000" b="1">
-                <a:solidFill>
-                  <a:srgbClr val="333333"/>
-                </a:solidFill>
-              </a:defRPr>
-            </a:pPr>
-            <a:r>
-              <a:t>Power (**)</a:t>
-            </a:r>
-          </a:p>
-          <a:p>
-            <a:pPr>
-              <a:spcAft>
-                <a:spcPts val="800"/>
-              </a:spcAft>
-              <a:defRPr sz="2000" b="1">
-                <a:solidFill>
-                  <a:srgbClr val="333333"/>
-                </a:solidFill>
-              </a:defRPr>
-            </a:pPr>
-            <a:r>
-              <a:t>Remainder (%)</a:t>
+                <a:spcPts val="600"/>
+              </a:spcAft>
+              <a:defRPr sz="1600">
+                <a:solidFill>
+                  <a:srgbClr val="333333"/>
+                </a:solidFill>
+              </a:defRPr>
+            </a:pPr>
+            <a:r>
+              <a:t>Easy to Read and Write</a:t>
+            </a:r>
+          </a:p>
+          <a:p>
+            <a:pPr lvl="1">
+              <a:spcAft>
+                <a:spcPts val="400"/>
+              </a:spcAft>
+              <a:defRPr sz="1600">
+                <a:solidFill>
+                  <a:srgbClr val="333333"/>
+                </a:solidFill>
+              </a:defRPr>
+            </a:pPr>
+            <a:r>
+              <a:t>• Syntax is close to natural English</a:t>
+            </a:r>
+          </a:p>
+          <a:p>
+            <a:pPr lvl="1">
+              <a:spcAft>
+                <a:spcPts val="400"/>
+              </a:spcAft>
+              <a:defRPr sz="1600">
+                <a:solidFill>
+                  <a:srgbClr val="333333"/>
+                </a:solidFill>
+              </a:defRPr>
+            </a:pPr>
+            <a:r>
+              <a:t>• Less punctuation than other languages</a:t>
+            </a:r>
+          </a:p>
+          <a:p>
+            <a:pPr lvl="1">
+              <a:spcAft>
+                <a:spcPts val="400"/>
+              </a:spcAft>
+              <a:defRPr sz="1600">
+                <a:solidFill>
+                  <a:srgbClr val="333333"/>
+                </a:solidFill>
+              </a:defRPr>
+            </a:pPr>
+            <a:r>
+              <a:t>• Focus on solving problems, not syntax</a:t>
+            </a:r>
+          </a:p>
+          <a:p>
+            <a:pPr>
+              <a:spcAft>
+                <a:spcPts val="600"/>
+              </a:spcAft>
+              <a:defRPr sz="1600">
+                <a:solidFill>
+                  <a:srgbClr val="333333"/>
+                </a:solidFill>
+              </a:defRPr>
+            </a:pPr>
+            <a:r>
+              <a:t>Versatile and Powerful</a:t>
+            </a:r>
+          </a:p>
+          <a:p>
+            <a:pPr lvl="1">
+              <a:spcAft>
+                <a:spcPts val="400"/>
+              </a:spcAft>
+              <a:defRPr sz="1600">
+                <a:solidFill>
+                  <a:srgbClr val="333333"/>
+                </a:solidFill>
+              </a:defRPr>
+            </a:pPr>
+            <a:r>
+              <a:t>• Web development (Django, Flask)</a:t>
+            </a:r>
+          </a:p>
+          <a:p>
+            <a:pPr lvl="1">
+              <a:spcAft>
+                <a:spcPts val="400"/>
+              </a:spcAft>
+              <a:defRPr sz="1600">
+                <a:solidFill>
+                  <a:srgbClr val="333333"/>
+                </a:solidFill>
+              </a:defRPr>
+            </a:pPr>
+            <a:r>
+              <a:t>• Data science and machine learning</a:t>
+            </a:r>
+          </a:p>
+          <a:p>
+            <a:pPr lvl="1">
+              <a:spcAft>
+                <a:spcPts val="400"/>
+              </a:spcAft>
+              <a:defRPr sz="1600">
+                <a:solidFill>
+                  <a:srgbClr val="333333"/>
+                </a:solidFill>
+              </a:defRPr>
+            </a:pPr>
+            <a:r>
+              <a:t>• Automation and scripting</a:t>
+            </a:r>
+          </a:p>
+          <a:p>
+            <a:pPr lvl="1">
+              <a:spcAft>
+                <a:spcPts val="400"/>
+              </a:spcAft>
+              <a:defRPr sz="1600">
+                <a:solidFill>
+                  <a:srgbClr val="333333"/>
+                </a:solidFill>
+              </a:defRPr>
+            </a:pPr>
+            <a:r>
+              <a:t>• Scientific computing</a:t>
+            </a:r>
+          </a:p>
+          <a:p>
+            <a:pPr>
+              <a:spcAft>
+                <a:spcPts val="600"/>
+              </a:spcAft>
+              <a:defRPr sz="1600">
+                <a:solidFill>
+                  <a:srgbClr val="333333"/>
+                </a:solidFill>
+              </a:defRPr>
+            </a:pPr>
+            <a:r>
+              <a:t>Large Community</a:t>
+            </a:r>
+          </a:p>
+          <a:p>
+            <a:pPr lvl="1">
+              <a:spcAft>
+                <a:spcPts val="400"/>
+              </a:spcAft>
+              <a:defRPr sz="1600">
+                <a:solidFill>
+                  <a:srgbClr val="333333"/>
+                </a:solidFill>
+              </a:defRPr>
+            </a:pPr>
+            <a:r>
+              <a:t>• Millions of developers worldwide</a:t>
+            </a:r>
+          </a:p>
+          <a:p>
+            <a:pPr lvl="1">
+              <a:spcAft>
+                <a:spcPts val="400"/>
+              </a:spcAft>
+              <a:defRPr sz="1600">
+                <a:solidFill>
+                  <a:srgbClr val="333333"/>
+                </a:solidFill>
+              </a:defRPr>
+            </a:pPr>
+            <a:r>
+              <a:t>• Extensive libraries and packages</a:t>
+            </a:r>
+          </a:p>
+          <a:p>
+            <a:pPr lvl="1">
+              <a:spcAft>
+                <a:spcPts val="400"/>
+              </a:spcAft>
+              <a:defRPr sz="1600">
+                <a:solidFill>
+                  <a:srgbClr val="333333"/>
+                </a:solidFill>
+              </a:defRPr>
+            </a:pPr>
+            <a:r>
+              <a:t>• Great learning resources</a:t>
             </a:r>
           </a:p>
         </p:txBody>
@@ -5219,7 +5483,7 @@
 </p:sld>
 </file>
 
-<file path=ppt/slides/slide8.xml><?xml version="1.0" encoding="utf-8"?>
+<file path=ppt/slides/slide4.xml><?xml version="1.0" encoding="utf-8"?>
 <p:sld xmlns:a="http://schemas.openxmlformats.org/drawingml/2006/main" xmlns:p="http://schemas.openxmlformats.org/presentationml/2006/main" xmlns:r="http://schemas.openxmlformats.org/officeDocument/2006/relationships">
   <p:cSld>
     <p:spTree>
@@ -5323,8 +5587,8 @@
         </p:nvSpPr>
         <p:spPr>
           <a:xfrm>
-            <a:off x="457200" y="365760"/>
-            <a:ext cx="10972800" cy="731520"/>
+            <a:off x="457200" y="320040"/>
+            <a:ext cx="10972800" cy="640080"/>
           </a:xfrm>
           <a:prstGeom prst="rect">
             <a:avLst/>
@@ -5338,71 +5602,28 @@
           <a:lstStyle/>
           <a:p>
             <a:pPr>
-              <a:defRPr sz="4000" b="1">
+              <a:defRPr sz="3600" b="1">
                 <a:solidFill>
                   <a:srgbClr val="003366"/>
                 </a:solidFill>
               </a:defRPr>
             </a:pPr>
             <a:r>
-              <a:t>Displaying Output: print() 🖨️</a:t>
-            </a:r>
-          </a:p>
-        </p:txBody>
-      </p:sp>
-      <p:sp>
-        <p:nvSpPr>
-          <p:cNvPr id="5" name="Rectangle 4"/>
-          <p:cNvSpPr/>
+              <a:t>Variables: Storing Information</a:t>
+            </a:r>
+          </a:p>
+        </p:txBody>
+      </p:sp>
+      <p:sp>
+        <p:nvSpPr>
+          <p:cNvPr id="5" name="TextBox 4"/>
+          <p:cNvSpPr txBox="1"/>
           <p:nvPr/>
         </p:nvSpPr>
         <p:spPr>
           <a:xfrm>
-            <a:off x="457200" y="1005840"/>
-            <a:ext cx="1828800" cy="45720"/>
-          </a:xfrm>
-          <a:prstGeom prst="rect">
-            <a:avLst/>
-          </a:prstGeom>
-          <a:solidFill>
-            <a:srgbClr val="0066CC"/>
-          </a:solidFill>
-          <a:ln>
-            <a:noFill/>
-          </a:ln>
-        </p:spPr>
-        <p:style>
-          <a:lnRef idx="1">
-            <a:schemeClr val="accent1"/>
-          </a:lnRef>
-          <a:fillRef idx="3">
-            <a:schemeClr val="accent1"/>
-          </a:fillRef>
-          <a:effectRef idx="2">
-            <a:schemeClr val="accent1"/>
-          </a:effectRef>
-          <a:fontRef idx="minor">
-            <a:schemeClr val="lt1"/>
-          </a:fontRef>
-        </p:style>
-        <p:txBody>
-          <a:bodyPr rtlCol="0" anchor="ctr"/>
-          <a:lstStyle/>
-          <a:p>
-            <a:pPr algn="ctr"/>
-          </a:p>
-        </p:txBody>
-      </p:sp>
-      <p:sp>
-        <p:nvSpPr>
-          <p:cNvPr id="6" name="TextBox 5"/>
-          <p:cNvSpPr txBox="1"/>
-          <p:nvPr/>
-        </p:nvSpPr>
-        <p:spPr>
-          <a:xfrm>
-            <a:off x="640080" y="1371600"/>
-            <a:ext cx="10789920" cy="4572000"/>
+            <a:off x="640080" y="1188720"/>
+            <a:ext cx="10789920" cy="5303520"/>
           </a:xfrm>
           <a:prstGeom prst="rect">
             <a:avLst/>
@@ -5417,31 +5638,181 @@
           <a:p>
             <a:pPr>
               <a:spcAft>
-                <a:spcPts val="800"/>
-              </a:spcAft>
-              <a:defRPr sz="2000" b="1">
-                <a:solidFill>
-                  <a:srgbClr val="333333"/>
-                </a:solidFill>
-              </a:defRPr>
-            </a:pPr>
-            <a:r>
-              <a:t>The print() function displays information on the screen</a:t>
-            </a:r>
-          </a:p>
-          <a:p>
-            <a:pPr>
-              <a:spcAft>
-                <a:spcPts val="800"/>
-              </a:spcAft>
-              <a:defRPr sz="2000" b="1">
-                <a:solidFill>
-                  <a:srgbClr val="333333"/>
-                </a:solidFill>
-              </a:defRPr>
-            </a:pPr>
-            <a:r>
-              <a:t>Examples:</a:t>
+                <a:spcPts val="600"/>
+              </a:spcAft>
+              <a:defRPr sz="1600">
+                <a:solidFill>
+                  <a:srgbClr val="333333"/>
+                </a:solidFill>
+              </a:defRPr>
+            </a:pPr>
+            <a:r>
+              <a:t>Variables are named storage locations for data</a:t>
+            </a:r>
+          </a:p>
+          <a:p>
+            <a:pPr>
+              <a:spcAft>
+                <a:spcPts val="600"/>
+              </a:spcAft>
+              <a:defRPr b="1" sz="2000">
+                <a:solidFill>
+                  <a:srgbClr val="333333"/>
+                </a:solidFill>
+              </a:defRPr>
+            </a:pPr>
+            <a:r>
+              <a:t>Creating Variables:</a:t>
+            </a:r>
+          </a:p>
+          <a:p>
+            <a:pPr>
+              <a:spcAft>
+                <a:spcPts val="600"/>
+              </a:spcAft>
+              <a:defRPr sz="1600">
+                <a:solidFill>
+                  <a:srgbClr val="333333"/>
+                </a:solidFill>
+              </a:defRPr>
+            </a:pPr>
+            <a:r>
+              <a:t>name = "Alice"</a:t>
+            </a:r>
+          </a:p>
+          <a:p>
+            <a:pPr>
+              <a:spcAft>
+                <a:spcPts val="600"/>
+              </a:spcAft>
+              <a:defRPr sz="1600">
+                <a:solidFill>
+                  <a:srgbClr val="333333"/>
+                </a:solidFill>
+              </a:defRPr>
+            </a:pPr>
+            <a:r>
+              <a:t>age = 25</a:t>
+            </a:r>
+          </a:p>
+          <a:p>
+            <a:pPr>
+              <a:spcAft>
+                <a:spcPts val="600"/>
+              </a:spcAft>
+              <a:defRPr sz="1600">
+                <a:solidFill>
+                  <a:srgbClr val="333333"/>
+                </a:solidFill>
+              </a:defRPr>
+            </a:pPr>
+            <a:r>
+              <a:t>height = 1.75</a:t>
+            </a:r>
+          </a:p>
+          <a:p>
+            <a:pPr>
+              <a:spcAft>
+                <a:spcPts val="600"/>
+              </a:spcAft>
+              <a:defRPr b="1" sz="2000">
+                <a:solidFill>
+                  <a:srgbClr val="333333"/>
+                </a:solidFill>
+              </a:defRPr>
+            </a:pPr>
+            <a:r>
+              <a:t>Variable Naming Rules:</a:t>
+            </a:r>
+          </a:p>
+          <a:p>
+            <a:pPr lvl="1">
+              <a:spcAft>
+                <a:spcPts val="400"/>
+              </a:spcAft>
+              <a:defRPr sz="1600">
+                <a:solidFill>
+                  <a:srgbClr val="333333"/>
+                </a:solidFill>
+              </a:defRPr>
+            </a:pPr>
+            <a:r>
+              <a:t>• Must start with letter or underscore</a:t>
+            </a:r>
+          </a:p>
+          <a:p>
+            <a:pPr lvl="1">
+              <a:spcAft>
+                <a:spcPts val="400"/>
+              </a:spcAft>
+              <a:defRPr sz="1600">
+                <a:solidFill>
+                  <a:srgbClr val="333333"/>
+                </a:solidFill>
+              </a:defRPr>
+            </a:pPr>
+            <a:r>
+              <a:t>• Can contain letters, numbers, underscores</a:t>
+            </a:r>
+          </a:p>
+          <a:p>
+            <a:pPr lvl="1">
+              <a:spcAft>
+                <a:spcPts val="400"/>
+              </a:spcAft>
+              <a:defRPr sz="1600">
+                <a:solidFill>
+                  <a:srgbClr val="333333"/>
+                </a:solidFill>
+              </a:defRPr>
+            </a:pPr>
+            <a:r>
+              <a:t>• Case-sensitive (age ≠ Age)</a:t>
+            </a:r>
+          </a:p>
+          <a:p>
+            <a:pPr lvl="1">
+              <a:spcAft>
+                <a:spcPts val="400"/>
+              </a:spcAft>
+              <a:defRPr sz="1600">
+                <a:solidFill>
+                  <a:srgbClr val="333333"/>
+                </a:solidFill>
+              </a:defRPr>
+            </a:pPr>
+            <a:r>
+              <a:t>• Cannot use Python keywords (if, for, while)</a:t>
+            </a:r>
+          </a:p>
+          <a:p>
+            <a:pPr>
+              <a:spcAft>
+                <a:spcPts val="600"/>
+              </a:spcAft>
+              <a:defRPr b="1" sz="2000">
+                <a:solidFill>
+                  <a:srgbClr val="333333"/>
+                </a:solidFill>
+              </a:defRPr>
+            </a:pPr>
+            <a:r>
+              <a:t>Good Names: student_name, total_score, user_age</a:t>
+            </a:r>
+          </a:p>
+          <a:p>
+            <a:pPr>
+              <a:spcAft>
+                <a:spcPts val="600"/>
+              </a:spcAft>
+              <a:defRPr b="1" sz="2000">
+                <a:solidFill>
+                  <a:srgbClr val="333333"/>
+                </a:solidFill>
+              </a:defRPr>
+            </a:pPr>
+            <a:r>
+              <a:t>Bad Names: x, temp, data (too vague)</a:t>
             </a:r>
           </a:p>
         </p:txBody>
@@ -5454,7 +5825,7 @@
 </p:sld>
 </file>
 
-<file path=ppt/slides/slide9.xml><?xml version="1.0" encoding="utf-8"?>
+<file path=ppt/slides/slide5.xml><?xml version="1.0" encoding="utf-8"?>
 <p:sld xmlns:a="http://schemas.openxmlformats.org/drawingml/2006/main" xmlns:p="http://schemas.openxmlformats.org/presentationml/2006/main" xmlns:r="http://schemas.openxmlformats.org/officeDocument/2006/relationships">
   <p:cSld>
     <p:spTree>
@@ -5558,8 +5929,8 @@
         </p:nvSpPr>
         <p:spPr>
           <a:xfrm>
-            <a:off x="457200" y="365760"/>
-            <a:ext cx="10972800" cy="731520"/>
+            <a:off x="457200" y="320040"/>
+            <a:ext cx="10972800" cy="640080"/>
           </a:xfrm>
           <a:prstGeom prst="rect">
             <a:avLst/>
@@ -5573,28 +5944,292 @@
           <a:lstStyle/>
           <a:p>
             <a:pPr>
-              <a:defRPr sz="4000" b="1">
+              <a:defRPr sz="3600" b="1">
                 <a:solidFill>
                   <a:srgbClr val="003366"/>
                 </a:solidFill>
               </a:defRPr>
             </a:pPr>
             <a:r>
-              <a:t>Let's Build Something! 🔨</a:t>
-            </a:r>
-          </a:p>
-        </p:txBody>
-      </p:sp>
-      <p:sp>
-        <p:nvSpPr>
-          <p:cNvPr id="5" name="Rectangle 4"/>
+              <a:t>Data Types: Numbers</a:t>
+            </a:r>
+          </a:p>
+        </p:txBody>
+      </p:sp>
+      <p:sp>
+        <p:nvSpPr>
+          <p:cNvPr id="5" name="TextBox 4"/>
+          <p:cNvSpPr txBox="1"/>
+          <p:nvPr/>
+        </p:nvSpPr>
+        <p:spPr>
+          <a:xfrm>
+            <a:off x="640080" y="1188720"/>
+            <a:ext cx="10789920" cy="5303520"/>
+          </a:xfrm>
+          <a:prstGeom prst="rect">
+            <a:avLst/>
+          </a:prstGeom>
+          <a:noFill/>
+        </p:spPr>
+        <p:txBody>
+          <a:bodyPr wrap="square">
+            <a:spAutoFit/>
+          </a:bodyPr>
+          <a:lstStyle/>
+          <a:p>
+            <a:pPr>
+              <a:spcAft>
+                <a:spcPts val="600"/>
+              </a:spcAft>
+              <a:defRPr b="1" sz="2000">
+                <a:solidFill>
+                  <a:srgbClr val="333333"/>
+                </a:solidFill>
+              </a:defRPr>
+            </a:pPr>
+            <a:r>
+              <a:t>Integers (int): Whole numbers</a:t>
+            </a:r>
+          </a:p>
+          <a:p>
+            <a:pPr lvl="1">
+              <a:spcAft>
+                <a:spcPts val="400"/>
+              </a:spcAft>
+              <a:defRPr sz="1600">
+                <a:solidFill>
+                  <a:srgbClr val="333333"/>
+                </a:solidFill>
+              </a:defRPr>
+            </a:pPr>
+            <a:r>
+              <a:t>• Examples: 42, -17, 0, 1000</a:t>
+            </a:r>
+          </a:p>
+          <a:p>
+            <a:pPr lvl="1">
+              <a:spcAft>
+                <a:spcPts val="400"/>
+              </a:spcAft>
+              <a:defRPr sz="1600">
+                <a:solidFill>
+                  <a:srgbClr val="333333"/>
+                </a:solidFill>
+              </a:defRPr>
+            </a:pPr>
+            <a:r>
+              <a:t>• Used for counting, indexing</a:t>
+            </a:r>
+          </a:p>
+          <a:p>
+            <a:pPr>
+              <a:spcAft>
+                <a:spcPts val="600"/>
+              </a:spcAft>
+              <a:defRPr b="1" sz="2000">
+                <a:solidFill>
+                  <a:srgbClr val="333333"/>
+                </a:solidFill>
+              </a:defRPr>
+            </a:pPr>
+            <a:r>
+              <a:t>Floats (float): Decimal numbers</a:t>
+            </a:r>
+          </a:p>
+          <a:p>
+            <a:pPr lvl="1">
+              <a:spcAft>
+                <a:spcPts val="400"/>
+              </a:spcAft>
+              <a:defRPr sz="1600">
+                <a:solidFill>
+                  <a:srgbClr val="333333"/>
+                </a:solidFill>
+              </a:defRPr>
+            </a:pPr>
+            <a:r>
+              <a:t>• Examples: 3.14, -0.5, 2.0</a:t>
+            </a:r>
+          </a:p>
+          <a:p>
+            <a:pPr lvl="1">
+              <a:spcAft>
+                <a:spcPts val="400"/>
+              </a:spcAft>
+              <a:defRPr sz="1600">
+                <a:solidFill>
+                  <a:srgbClr val="333333"/>
+                </a:solidFill>
+              </a:defRPr>
+            </a:pPr>
+            <a:r>
+              <a:t>• Used for measurements, calculations</a:t>
+            </a:r>
+          </a:p>
+          <a:p>
+            <a:pPr>
+              <a:spcAft>
+                <a:spcPts val="600"/>
+              </a:spcAft>
+              <a:defRPr b="1" sz="2000">
+                <a:solidFill>
+                  <a:srgbClr val="333333"/>
+                </a:solidFill>
+              </a:defRPr>
+            </a:pPr>
+            <a:r>
+              <a:t>Type Checking:</a:t>
+            </a:r>
+          </a:p>
+          <a:p>
+            <a:pPr>
+              <a:spcAft>
+                <a:spcPts val="600"/>
+              </a:spcAft>
+              <a:defRPr sz="1600">
+                <a:solidFill>
+                  <a:srgbClr val="333333"/>
+                </a:solidFill>
+              </a:defRPr>
+            </a:pPr>
+            <a:r>
+              <a:t>type(42)      # &lt;class 'int'&gt;</a:t>
+            </a:r>
+          </a:p>
+          <a:p>
+            <a:pPr>
+              <a:spcAft>
+                <a:spcPts val="600"/>
+              </a:spcAft>
+              <a:defRPr sz="1600">
+                <a:solidFill>
+                  <a:srgbClr val="333333"/>
+                </a:solidFill>
+              </a:defRPr>
+            </a:pPr>
+            <a:r>
+              <a:t>type(3.14)    # &lt;class 'float'&gt;</a:t>
+            </a:r>
+          </a:p>
+          <a:p>
+            <a:pPr>
+              <a:spcAft>
+                <a:spcPts val="600"/>
+              </a:spcAft>
+              <a:defRPr b="1" sz="2000">
+                <a:solidFill>
+                  <a:srgbClr val="333333"/>
+                </a:solidFill>
+              </a:defRPr>
+            </a:pPr>
+            <a:r>
+              <a:t>Converting Between Types:</a:t>
+            </a:r>
+          </a:p>
+          <a:p>
+            <a:pPr>
+              <a:spcAft>
+                <a:spcPts val="600"/>
+              </a:spcAft>
+              <a:defRPr sz="1600">
+                <a:solidFill>
+                  <a:srgbClr val="333333"/>
+                </a:solidFill>
+              </a:defRPr>
+            </a:pPr>
+            <a:r>
+              <a:t>int(3.9)      # 3 (truncates)</a:t>
+            </a:r>
+          </a:p>
+          <a:p>
+            <a:pPr>
+              <a:spcAft>
+                <a:spcPts val="600"/>
+              </a:spcAft>
+              <a:defRPr sz="1600">
+                <a:solidFill>
+                  <a:srgbClr val="333333"/>
+                </a:solidFill>
+              </a:defRPr>
+            </a:pPr>
+            <a:r>
+              <a:t>float(42)     # 42.0</a:t>
+            </a:r>
+          </a:p>
+        </p:txBody>
+      </p:sp>
+    </p:spTree>
+  </p:cSld>
+  <p:clrMapOvr>
+    <a:masterClrMapping/>
+  </p:clrMapOvr>
+</p:sld>
+</file>
+
+<file path=ppt/slides/slide6.xml><?xml version="1.0" encoding="utf-8"?>
+<p:sld xmlns:a="http://schemas.openxmlformats.org/drawingml/2006/main" xmlns:p="http://schemas.openxmlformats.org/presentationml/2006/main" xmlns:r="http://schemas.openxmlformats.org/officeDocument/2006/relationships">
+  <p:cSld>
+    <p:spTree>
+      <p:nvGrpSpPr>
+        <p:cNvPr id="1" name=""/>
+        <p:cNvGrpSpPr/>
+        <p:nvPr/>
+      </p:nvGrpSpPr>
+      <p:grpSpPr/>
+      <p:sp>
+        <p:nvSpPr>
+          <p:cNvPr id="2" name="Rectangle 1"/>
           <p:cNvSpPr/>
           <p:nvPr/>
         </p:nvSpPr>
         <p:spPr>
           <a:xfrm>
-            <a:off x="457200" y="1005840"/>
-            <a:ext cx="1828800" cy="45720"/>
+            <a:off x="0" y="0"/>
+            <a:ext cx="12191695" cy="6858000"/>
+          </a:xfrm>
+          <a:prstGeom prst="rect">
+            <a:avLst/>
+          </a:prstGeom>
+          <a:solidFill>
+            <a:srgbClr val="FFFFFF"/>
+          </a:solidFill>
+          <a:ln>
+            <a:noFill/>
+          </a:ln>
+        </p:spPr>
+        <p:style>
+          <a:lnRef idx="1">
+            <a:schemeClr val="accent1"/>
+          </a:lnRef>
+          <a:fillRef idx="3">
+            <a:schemeClr val="accent1"/>
+          </a:fillRef>
+          <a:effectRef idx="2">
+            <a:schemeClr val="accent1"/>
+          </a:effectRef>
+          <a:fontRef idx="minor">
+            <a:schemeClr val="lt1"/>
+          </a:fontRef>
+        </p:style>
+        <p:txBody>
+          <a:bodyPr rtlCol="0" anchor="ctr"/>
+          <a:lstStyle/>
+          <a:p>
+            <a:pPr algn="ctr"/>
+          </a:p>
+        </p:txBody>
+      </p:sp>
+      <p:sp>
+        <p:nvSpPr>
+          <p:cNvPr id="3" name="Rectangle 2"/>
+          <p:cNvSpPr/>
+          <p:nvPr/>
+        </p:nvSpPr>
+        <p:spPr>
+          <a:xfrm>
+            <a:off x="0" y="0"/>
+            <a:ext cx="12191695" cy="137160"/>
           </a:xfrm>
           <a:prstGeom prst="rect">
             <a:avLst/>
@@ -5630,14 +6265,14 @@
       </p:sp>
       <p:sp>
         <p:nvSpPr>
-          <p:cNvPr id="6" name="TextBox 5"/>
+          <p:cNvPr id="4" name="TextBox 3"/>
           <p:cNvSpPr txBox="1"/>
           <p:nvPr/>
         </p:nvSpPr>
         <p:spPr>
           <a:xfrm>
-            <a:off x="640080" y="1371600"/>
-            <a:ext cx="10789920" cy="4572000"/>
+            <a:off x="457200" y="320040"/>
+            <a:ext cx="10972800" cy="640080"/>
           </a:xfrm>
           <a:prstGeom prst="rect">
             <a:avLst/>
@@ -5645,6 +6280,41 @@
           <a:noFill/>
         </p:spPr>
         <p:txBody>
+          <a:bodyPr wrap="none">
+            <a:spAutoFit/>
+          </a:bodyPr>
+          <a:lstStyle/>
+          <a:p>
+            <a:pPr>
+              <a:defRPr sz="3600" b="1">
+                <a:solidFill>
+                  <a:srgbClr val="003366"/>
+                </a:solidFill>
+              </a:defRPr>
+            </a:pPr>
+            <a:r>
+              <a:t>Data Types: Strings</a:t>
+            </a:r>
+          </a:p>
+        </p:txBody>
+      </p:sp>
+      <p:sp>
+        <p:nvSpPr>
+          <p:cNvPr id="5" name="TextBox 4"/>
+          <p:cNvSpPr txBox="1"/>
+          <p:nvPr/>
+        </p:nvSpPr>
+        <p:spPr>
+          <a:xfrm>
+            <a:off x="640080" y="1188720"/>
+            <a:ext cx="10789920" cy="5303520"/>
+          </a:xfrm>
+          <a:prstGeom prst="rect">
+            <a:avLst/>
+          </a:prstGeom>
+          <a:noFill/>
+        </p:spPr>
+        <p:txBody>
           <a:bodyPr wrap="square">
             <a:spAutoFit/>
           </a:bodyPr>
@@ -5652,16 +6322,1297 @@
           <a:p>
             <a:pPr>
               <a:spcAft>
-                <a:spcPts val="800"/>
-              </a:spcAft>
-              <a:defRPr sz="2000" b="1">
-                <a:solidFill>
-                  <a:srgbClr val="333333"/>
-                </a:solidFill>
-              </a:defRPr>
-            </a:pPr>
-            <a:r>
-              <a:t>A Simple Calculator</a:t>
+                <a:spcPts val="600"/>
+              </a:spcAft>
+              <a:defRPr b="1" sz="2000">
+                <a:solidFill>
+                  <a:srgbClr val="333333"/>
+                </a:solidFill>
+              </a:defRPr>
+            </a:pPr>
+            <a:r>
+              <a:t>Strings (str): Text data</a:t>
+            </a:r>
+          </a:p>
+          <a:p>
+            <a:pPr lvl="1">
+              <a:spcAft>
+                <a:spcPts val="400"/>
+              </a:spcAft>
+              <a:defRPr sz="1600">
+                <a:solidFill>
+                  <a:srgbClr val="333333"/>
+                </a:solidFill>
+              </a:defRPr>
+            </a:pPr>
+            <a:r>
+              <a:t>• Enclosed in quotes: "..." or '...'</a:t>
+            </a:r>
+          </a:p>
+          <a:p>
+            <a:pPr lvl="1">
+              <a:spcAft>
+                <a:spcPts val="400"/>
+              </a:spcAft>
+              <a:defRPr sz="1600">
+                <a:solidFill>
+                  <a:srgbClr val="333333"/>
+                </a:solidFill>
+              </a:defRPr>
+            </a:pPr>
+            <a:r>
+              <a:t>• Examples: "Hello", 'Python', "123"</a:t>
+            </a:r>
+          </a:p>
+          <a:p>
+            <a:pPr>
+              <a:spcAft>
+                <a:spcPts val="600"/>
+              </a:spcAft>
+              <a:defRPr b="1" sz="2000">
+                <a:solidFill>
+                  <a:srgbClr val="333333"/>
+                </a:solidFill>
+              </a:defRPr>
+            </a:pPr>
+            <a:r>
+              <a:t>String Operations:</a:t>
+            </a:r>
+          </a:p>
+          <a:p>
+            <a:pPr>
+              <a:spcAft>
+                <a:spcPts val="600"/>
+              </a:spcAft>
+              <a:defRPr b="1" sz="2000">
+                <a:solidFill>
+                  <a:srgbClr val="333333"/>
+                </a:solidFill>
+              </a:defRPr>
+            </a:pPr>
+            <a:r>
+              <a:t>Concatenation: "Hello" + " " + "World"</a:t>
+            </a:r>
+          </a:p>
+          <a:p>
+            <a:pPr>
+              <a:spcAft>
+                <a:spcPts val="600"/>
+              </a:spcAft>
+              <a:defRPr b="1" sz="2000">
+                <a:solidFill>
+                  <a:srgbClr val="333333"/>
+                </a:solidFill>
+              </a:defRPr>
+            </a:pPr>
+            <a:r>
+              <a:t>Repetition: "Ha" * 3  # "HaHaHa"</a:t>
+            </a:r>
+          </a:p>
+          <a:p>
+            <a:pPr>
+              <a:spcAft>
+                <a:spcPts val="600"/>
+              </a:spcAft>
+              <a:defRPr b="1" sz="2000">
+                <a:solidFill>
+                  <a:srgbClr val="333333"/>
+                </a:solidFill>
+              </a:defRPr>
+            </a:pPr>
+            <a:r>
+              <a:t>F-Strings (Formatted Strings):</a:t>
+            </a:r>
+          </a:p>
+          <a:p>
+            <a:pPr>
+              <a:spcAft>
+                <a:spcPts val="600"/>
+              </a:spcAft>
+              <a:defRPr sz="1600">
+                <a:solidFill>
+                  <a:srgbClr val="333333"/>
+                </a:solidFill>
+              </a:defRPr>
+            </a:pPr>
+            <a:r>
+              <a:t>name = "Alice"</a:t>
+            </a:r>
+          </a:p>
+          <a:p>
+            <a:pPr>
+              <a:spcAft>
+                <a:spcPts val="600"/>
+              </a:spcAft>
+              <a:defRPr sz="1600">
+                <a:solidFill>
+                  <a:srgbClr val="333333"/>
+                </a:solidFill>
+              </a:defRPr>
+            </a:pPr>
+            <a:r>
+              <a:t>age = 25</a:t>
+            </a:r>
+          </a:p>
+          <a:p>
+            <a:pPr>
+              <a:spcAft>
+                <a:spcPts val="600"/>
+              </a:spcAft>
+              <a:defRPr sz="1600">
+                <a:solidFill>
+                  <a:srgbClr val="333333"/>
+                </a:solidFill>
+              </a:defRPr>
+            </a:pPr>
+            <a:r>
+              <a:t>f"My name is {name} and I am {age}"</a:t>
+            </a:r>
+          </a:p>
+          <a:p>
+            <a:pPr>
+              <a:spcAft>
+                <a:spcPts val="600"/>
+              </a:spcAft>
+              <a:defRPr b="1" sz="2000">
+                <a:solidFill>
+                  <a:srgbClr val="333333"/>
+                </a:solidFill>
+              </a:defRPr>
+            </a:pPr>
+            <a:r>
+              <a:t>Multi-line Strings:</a:t>
+            </a:r>
+          </a:p>
+          <a:p>
+            <a:pPr>
+              <a:spcAft>
+                <a:spcPts val="600"/>
+              </a:spcAft>
+              <a:defRPr sz="1600">
+                <a:solidFill>
+                  <a:srgbClr val="333333"/>
+                </a:solidFill>
+              </a:defRPr>
+            </a:pPr>
+            <a:r>
+              <a:t>Use triple quotes """..."""</a:t>
+            </a:r>
+          </a:p>
+        </p:txBody>
+      </p:sp>
+    </p:spTree>
+  </p:cSld>
+  <p:clrMapOvr>
+    <a:masterClrMapping/>
+  </p:clrMapOvr>
+</p:sld>
+</file>
+
+<file path=ppt/slides/slide7.xml><?xml version="1.0" encoding="utf-8"?>
+<p:sld xmlns:a="http://schemas.openxmlformats.org/drawingml/2006/main" xmlns:p="http://schemas.openxmlformats.org/presentationml/2006/main" xmlns:r="http://schemas.openxmlformats.org/officeDocument/2006/relationships">
+  <p:cSld>
+    <p:spTree>
+      <p:nvGrpSpPr>
+        <p:cNvPr id="1" name=""/>
+        <p:cNvGrpSpPr/>
+        <p:nvPr/>
+      </p:nvGrpSpPr>
+      <p:grpSpPr/>
+      <p:sp>
+        <p:nvSpPr>
+          <p:cNvPr id="2" name="Rectangle 1"/>
+          <p:cNvSpPr/>
+          <p:nvPr/>
+        </p:nvSpPr>
+        <p:spPr>
+          <a:xfrm>
+            <a:off x="0" y="0"/>
+            <a:ext cx="12191695" cy="6858000"/>
+          </a:xfrm>
+          <a:prstGeom prst="rect">
+            <a:avLst/>
+          </a:prstGeom>
+          <a:solidFill>
+            <a:srgbClr val="FFFFFF"/>
+          </a:solidFill>
+          <a:ln>
+            <a:noFill/>
+          </a:ln>
+        </p:spPr>
+        <p:style>
+          <a:lnRef idx="1">
+            <a:schemeClr val="accent1"/>
+          </a:lnRef>
+          <a:fillRef idx="3">
+            <a:schemeClr val="accent1"/>
+          </a:fillRef>
+          <a:effectRef idx="2">
+            <a:schemeClr val="accent1"/>
+          </a:effectRef>
+          <a:fontRef idx="minor">
+            <a:schemeClr val="lt1"/>
+          </a:fontRef>
+        </p:style>
+        <p:txBody>
+          <a:bodyPr rtlCol="0" anchor="ctr"/>
+          <a:lstStyle/>
+          <a:p>
+            <a:pPr algn="ctr"/>
+          </a:p>
+        </p:txBody>
+      </p:sp>
+      <p:sp>
+        <p:nvSpPr>
+          <p:cNvPr id="3" name="Rectangle 2"/>
+          <p:cNvSpPr/>
+          <p:nvPr/>
+        </p:nvSpPr>
+        <p:spPr>
+          <a:xfrm>
+            <a:off x="0" y="0"/>
+            <a:ext cx="12191695" cy="137160"/>
+          </a:xfrm>
+          <a:prstGeom prst="rect">
+            <a:avLst/>
+          </a:prstGeom>
+          <a:solidFill>
+            <a:srgbClr val="0066CC"/>
+          </a:solidFill>
+          <a:ln>
+            <a:noFill/>
+          </a:ln>
+        </p:spPr>
+        <p:style>
+          <a:lnRef idx="1">
+            <a:schemeClr val="accent1"/>
+          </a:lnRef>
+          <a:fillRef idx="3">
+            <a:schemeClr val="accent1"/>
+          </a:fillRef>
+          <a:effectRef idx="2">
+            <a:schemeClr val="accent1"/>
+          </a:effectRef>
+          <a:fontRef idx="minor">
+            <a:schemeClr val="lt1"/>
+          </a:fontRef>
+        </p:style>
+        <p:txBody>
+          <a:bodyPr rtlCol="0" anchor="ctr"/>
+          <a:lstStyle/>
+          <a:p>
+            <a:pPr algn="ctr"/>
+          </a:p>
+        </p:txBody>
+      </p:sp>
+      <p:sp>
+        <p:nvSpPr>
+          <p:cNvPr id="4" name="TextBox 3"/>
+          <p:cNvSpPr txBox="1"/>
+          <p:nvPr/>
+        </p:nvSpPr>
+        <p:spPr>
+          <a:xfrm>
+            <a:off x="457200" y="320040"/>
+            <a:ext cx="10972800" cy="640080"/>
+          </a:xfrm>
+          <a:prstGeom prst="rect">
+            <a:avLst/>
+          </a:prstGeom>
+          <a:noFill/>
+        </p:spPr>
+        <p:txBody>
+          <a:bodyPr wrap="none">
+            <a:spAutoFit/>
+          </a:bodyPr>
+          <a:lstStyle/>
+          <a:p>
+            <a:pPr>
+              <a:defRPr sz="3600" b="1">
+                <a:solidFill>
+                  <a:srgbClr val="003366"/>
+                </a:solidFill>
+              </a:defRPr>
+            </a:pPr>
+            <a:r>
+              <a:t>Arithmetic Operations</a:t>
+            </a:r>
+          </a:p>
+        </p:txBody>
+      </p:sp>
+      <p:sp>
+        <p:nvSpPr>
+          <p:cNvPr id="5" name="TextBox 4"/>
+          <p:cNvSpPr txBox="1"/>
+          <p:nvPr/>
+        </p:nvSpPr>
+        <p:spPr>
+          <a:xfrm>
+            <a:off x="640080" y="1188720"/>
+            <a:ext cx="10789920" cy="5303520"/>
+          </a:xfrm>
+          <a:prstGeom prst="rect">
+            <a:avLst/>
+          </a:prstGeom>
+          <a:noFill/>
+        </p:spPr>
+        <p:txBody>
+          <a:bodyPr wrap="square">
+            <a:spAutoFit/>
+          </a:bodyPr>
+          <a:lstStyle/>
+          <a:p>
+            <a:pPr>
+              <a:spcAft>
+                <a:spcPts val="600"/>
+              </a:spcAft>
+              <a:defRPr b="1" sz="2000">
+                <a:solidFill>
+                  <a:srgbClr val="333333"/>
+                </a:solidFill>
+              </a:defRPr>
+            </a:pPr>
+            <a:r>
+              <a:t>Basic Operations:</a:t>
+            </a:r>
+          </a:p>
+          <a:p>
+            <a:pPr lvl="1">
+              <a:spcAft>
+                <a:spcPts val="400"/>
+              </a:spcAft>
+              <a:defRPr sz="1600">
+                <a:solidFill>
+                  <a:srgbClr val="333333"/>
+                </a:solidFill>
+              </a:defRPr>
+            </a:pPr>
+            <a:r>
+              <a:t>• Addition: 5 + 3 = 8</a:t>
+            </a:r>
+          </a:p>
+          <a:p>
+            <a:pPr lvl="1">
+              <a:spcAft>
+                <a:spcPts val="400"/>
+              </a:spcAft>
+              <a:defRPr sz="1600">
+                <a:solidFill>
+                  <a:srgbClr val="333333"/>
+                </a:solidFill>
+              </a:defRPr>
+            </a:pPr>
+            <a:r>
+              <a:t>• Subtraction: 10 - 4 = 6</a:t>
+            </a:r>
+          </a:p>
+          <a:p>
+            <a:pPr lvl="1">
+              <a:spcAft>
+                <a:spcPts val="400"/>
+              </a:spcAft>
+              <a:defRPr sz="1600">
+                <a:solidFill>
+                  <a:srgbClr val="333333"/>
+                </a:solidFill>
+              </a:defRPr>
+            </a:pPr>
+            <a:r>
+              <a:t>• Multiplication: 6 * 7 = 42</a:t>
+            </a:r>
+          </a:p>
+          <a:p>
+            <a:pPr lvl="1">
+              <a:spcAft>
+                <a:spcPts val="400"/>
+              </a:spcAft>
+              <a:defRPr sz="1600">
+                <a:solidFill>
+                  <a:srgbClr val="333333"/>
+                </a:solidFill>
+              </a:defRPr>
+            </a:pPr>
+            <a:r>
+              <a:t>• Division: 15 / 3 = 5.0 (always float)</a:t>
+            </a:r>
+          </a:p>
+          <a:p>
+            <a:pPr>
+              <a:spcAft>
+                <a:spcPts val="600"/>
+              </a:spcAft>
+              <a:defRPr b="1" sz="2000">
+                <a:solidFill>
+                  <a:srgbClr val="333333"/>
+                </a:solidFill>
+              </a:defRPr>
+            </a:pPr>
+            <a:r>
+              <a:t>Advanced Operations:</a:t>
+            </a:r>
+          </a:p>
+          <a:p>
+            <a:pPr lvl="1">
+              <a:spcAft>
+                <a:spcPts val="400"/>
+              </a:spcAft>
+              <a:defRPr sz="1600">
+                <a:solidFill>
+                  <a:srgbClr val="333333"/>
+                </a:solidFill>
+              </a:defRPr>
+            </a:pPr>
+            <a:r>
+              <a:t>• Power: 2 ** 3 = 8 (2³)</a:t>
+            </a:r>
+          </a:p>
+          <a:p>
+            <a:pPr lvl="1">
+              <a:spcAft>
+                <a:spcPts val="400"/>
+              </a:spcAft>
+              <a:defRPr sz="1600">
+                <a:solidFill>
+                  <a:srgbClr val="333333"/>
+                </a:solidFill>
+              </a:defRPr>
+            </a:pPr>
+            <a:r>
+              <a:t>• Floor Division: 17 // 5 = 3 (rounds down)</a:t>
+            </a:r>
+          </a:p>
+          <a:p>
+            <a:pPr lvl="1">
+              <a:spcAft>
+                <a:spcPts val="400"/>
+              </a:spcAft>
+              <a:defRPr sz="1600">
+                <a:solidFill>
+                  <a:srgbClr val="333333"/>
+                </a:solidFill>
+              </a:defRPr>
+            </a:pPr>
+            <a:r>
+              <a:t>• Modulus: 17 % 5 = 2 (remainder)</a:t>
+            </a:r>
+          </a:p>
+          <a:p>
+            <a:pPr>
+              <a:spcAft>
+                <a:spcPts val="600"/>
+              </a:spcAft>
+              <a:defRPr b="1" sz="2000">
+                <a:solidFill>
+                  <a:srgbClr val="333333"/>
+                </a:solidFill>
+              </a:defRPr>
+            </a:pPr>
+            <a:r>
+              <a:t>Operator Precedence (PEMDAS):</a:t>
+            </a:r>
+          </a:p>
+          <a:p>
+            <a:pPr>
+              <a:spcAft>
+                <a:spcPts val="600"/>
+              </a:spcAft>
+              <a:defRPr sz="1600">
+                <a:solidFill>
+                  <a:srgbClr val="333333"/>
+                </a:solidFill>
+              </a:defRPr>
+            </a:pPr>
+            <a:r>
+              <a:t>1. Parentheses ()</a:t>
+            </a:r>
+          </a:p>
+          <a:p>
+            <a:pPr>
+              <a:spcAft>
+                <a:spcPts val="600"/>
+              </a:spcAft>
+              <a:defRPr sz="1600">
+                <a:solidFill>
+                  <a:srgbClr val="333333"/>
+                </a:solidFill>
+              </a:defRPr>
+            </a:pPr>
+            <a:r>
+              <a:t>2. Exponents **</a:t>
+            </a:r>
+          </a:p>
+          <a:p>
+            <a:pPr>
+              <a:spcAft>
+                <a:spcPts val="600"/>
+              </a:spcAft>
+              <a:defRPr sz="1600">
+                <a:solidFill>
+                  <a:srgbClr val="333333"/>
+                </a:solidFill>
+              </a:defRPr>
+            </a:pPr>
+            <a:r>
+              <a:t>3. Multiplication *, Division /, Modulus %</a:t>
+            </a:r>
+          </a:p>
+          <a:p>
+            <a:pPr>
+              <a:spcAft>
+                <a:spcPts val="600"/>
+              </a:spcAft>
+              <a:defRPr sz="1600">
+                <a:solidFill>
+                  <a:srgbClr val="333333"/>
+                </a:solidFill>
+              </a:defRPr>
+            </a:pPr>
+            <a:r>
+              <a:t>4. Addition +, Subtraction -</a:t>
+            </a:r>
+          </a:p>
+        </p:txBody>
+      </p:sp>
+    </p:spTree>
+  </p:cSld>
+  <p:clrMapOvr>
+    <a:masterClrMapping/>
+  </p:clrMapOvr>
+</p:sld>
+</file>
+
+<file path=ppt/slides/slide8.xml><?xml version="1.0" encoding="utf-8"?>
+<p:sld xmlns:a="http://schemas.openxmlformats.org/drawingml/2006/main" xmlns:p="http://schemas.openxmlformats.org/presentationml/2006/main" xmlns:r="http://schemas.openxmlformats.org/officeDocument/2006/relationships">
+  <p:cSld>
+    <p:spTree>
+      <p:nvGrpSpPr>
+        <p:cNvPr id="1" name=""/>
+        <p:cNvGrpSpPr/>
+        <p:nvPr/>
+      </p:nvGrpSpPr>
+      <p:grpSpPr/>
+      <p:sp>
+        <p:nvSpPr>
+          <p:cNvPr id="2" name="Rectangle 1"/>
+          <p:cNvSpPr/>
+          <p:nvPr/>
+        </p:nvSpPr>
+        <p:spPr>
+          <a:xfrm>
+            <a:off x="0" y="0"/>
+            <a:ext cx="12191695" cy="6858000"/>
+          </a:xfrm>
+          <a:prstGeom prst="rect">
+            <a:avLst/>
+          </a:prstGeom>
+          <a:solidFill>
+            <a:srgbClr val="FFFFFF"/>
+          </a:solidFill>
+          <a:ln>
+            <a:noFill/>
+          </a:ln>
+        </p:spPr>
+        <p:style>
+          <a:lnRef idx="1">
+            <a:schemeClr val="accent1"/>
+          </a:lnRef>
+          <a:fillRef idx="3">
+            <a:schemeClr val="accent1"/>
+          </a:fillRef>
+          <a:effectRef idx="2">
+            <a:schemeClr val="accent1"/>
+          </a:effectRef>
+          <a:fontRef idx="minor">
+            <a:schemeClr val="lt1"/>
+          </a:fontRef>
+        </p:style>
+        <p:txBody>
+          <a:bodyPr rtlCol="0" anchor="ctr"/>
+          <a:lstStyle/>
+          <a:p>
+            <a:pPr algn="ctr"/>
+          </a:p>
+        </p:txBody>
+      </p:sp>
+      <p:sp>
+        <p:nvSpPr>
+          <p:cNvPr id="3" name="Rectangle 2"/>
+          <p:cNvSpPr/>
+          <p:nvPr/>
+        </p:nvSpPr>
+        <p:spPr>
+          <a:xfrm>
+            <a:off x="0" y="0"/>
+            <a:ext cx="12191695" cy="137160"/>
+          </a:xfrm>
+          <a:prstGeom prst="rect">
+            <a:avLst/>
+          </a:prstGeom>
+          <a:solidFill>
+            <a:srgbClr val="0066CC"/>
+          </a:solidFill>
+          <a:ln>
+            <a:noFill/>
+          </a:ln>
+        </p:spPr>
+        <p:style>
+          <a:lnRef idx="1">
+            <a:schemeClr val="accent1"/>
+          </a:lnRef>
+          <a:fillRef idx="3">
+            <a:schemeClr val="accent1"/>
+          </a:fillRef>
+          <a:effectRef idx="2">
+            <a:schemeClr val="accent1"/>
+          </a:effectRef>
+          <a:fontRef idx="minor">
+            <a:schemeClr val="lt1"/>
+          </a:fontRef>
+        </p:style>
+        <p:txBody>
+          <a:bodyPr rtlCol="0" anchor="ctr"/>
+          <a:lstStyle/>
+          <a:p>
+            <a:pPr algn="ctr"/>
+          </a:p>
+        </p:txBody>
+      </p:sp>
+      <p:sp>
+        <p:nvSpPr>
+          <p:cNvPr id="4" name="TextBox 3"/>
+          <p:cNvSpPr txBox="1"/>
+          <p:nvPr/>
+        </p:nvSpPr>
+        <p:spPr>
+          <a:xfrm>
+            <a:off x="457200" y="320040"/>
+            <a:ext cx="10972800" cy="640080"/>
+          </a:xfrm>
+          <a:prstGeom prst="rect">
+            <a:avLst/>
+          </a:prstGeom>
+          <a:noFill/>
+        </p:spPr>
+        <p:txBody>
+          <a:bodyPr wrap="none">
+            <a:spAutoFit/>
+          </a:bodyPr>
+          <a:lstStyle/>
+          <a:p>
+            <a:pPr>
+              <a:defRPr sz="3600" b="1">
+                <a:solidFill>
+                  <a:srgbClr val="003366"/>
+                </a:solidFill>
+              </a:defRPr>
+            </a:pPr>
+            <a:r>
+              <a:t>Operations with Variables</a:t>
+            </a:r>
+          </a:p>
+        </p:txBody>
+      </p:sp>
+      <p:sp>
+        <p:nvSpPr>
+          <p:cNvPr id="5" name="TextBox 4"/>
+          <p:cNvSpPr txBox="1"/>
+          <p:nvPr/>
+        </p:nvSpPr>
+        <p:spPr>
+          <a:xfrm>
+            <a:off x="640080" y="1188720"/>
+            <a:ext cx="10789920" cy="5303520"/>
+          </a:xfrm>
+          <a:prstGeom prst="rect">
+            <a:avLst/>
+          </a:prstGeom>
+          <a:noFill/>
+        </p:spPr>
+        <p:txBody>
+          <a:bodyPr wrap="square">
+            <a:spAutoFit/>
+          </a:bodyPr>
+          <a:lstStyle/>
+          <a:p>
+            <a:pPr>
+              <a:spcAft>
+                <a:spcPts val="600"/>
+              </a:spcAft>
+              <a:defRPr b="1" sz="2000">
+                <a:solidFill>
+                  <a:srgbClr val="333333"/>
+                </a:solidFill>
+              </a:defRPr>
+            </a:pPr>
+            <a:r>
+              <a:t>Using Variables in Calculations:</a:t>
+            </a:r>
+          </a:p>
+          <a:p>
+            <a:pPr>
+              <a:spcAft>
+                <a:spcPts val="600"/>
+              </a:spcAft>
+              <a:defRPr sz="1600">
+                <a:solidFill>
+                  <a:srgbClr val="333333"/>
+                </a:solidFill>
+              </a:defRPr>
+            </a:pPr>
+            <a:r>
+              <a:t>length = 10</a:t>
+            </a:r>
+          </a:p>
+          <a:p>
+            <a:pPr>
+              <a:spcAft>
+                <a:spcPts val="600"/>
+              </a:spcAft>
+              <a:defRPr sz="1600">
+                <a:solidFill>
+                  <a:srgbClr val="333333"/>
+                </a:solidFill>
+              </a:defRPr>
+            </a:pPr>
+            <a:r>
+              <a:t>width = 5</a:t>
+            </a:r>
+          </a:p>
+          <a:p>
+            <a:pPr>
+              <a:spcAft>
+                <a:spcPts val="600"/>
+              </a:spcAft>
+              <a:defRPr sz="1600">
+                <a:solidFill>
+                  <a:srgbClr val="333333"/>
+                </a:solidFill>
+              </a:defRPr>
+            </a:pPr>
+            <a:r>
+              <a:t>area = length * width  # 50</a:t>
+            </a:r>
+          </a:p>
+          <a:p>
+            <a:pPr>
+              <a:spcAft>
+                <a:spcPts val="600"/>
+              </a:spcAft>
+              <a:defRPr b="1" sz="2000">
+                <a:solidFill>
+                  <a:srgbClr val="333333"/>
+                </a:solidFill>
+              </a:defRPr>
+            </a:pPr>
+            <a:r>
+              <a:t>Updating Variables:</a:t>
+            </a:r>
+          </a:p>
+          <a:p>
+            <a:pPr>
+              <a:spcAft>
+                <a:spcPts val="600"/>
+              </a:spcAft>
+              <a:defRPr sz="1600">
+                <a:solidFill>
+                  <a:srgbClr val="333333"/>
+                </a:solidFill>
+              </a:defRPr>
+            </a:pPr>
+            <a:r>
+              <a:t>score = 100</a:t>
+            </a:r>
+          </a:p>
+          <a:p>
+            <a:pPr>
+              <a:spcAft>
+                <a:spcPts val="600"/>
+              </a:spcAft>
+              <a:defRPr sz="1600">
+                <a:solidFill>
+                  <a:srgbClr val="333333"/>
+                </a:solidFill>
+              </a:defRPr>
+            </a:pPr>
+            <a:r>
+              <a:t>score = score + 10  # 110</a:t>
+            </a:r>
+          </a:p>
+          <a:p>
+            <a:pPr>
+              <a:spcAft>
+                <a:spcPts val="600"/>
+              </a:spcAft>
+              <a:defRPr b="1" sz="2000">
+                <a:solidFill>
+                  <a:srgbClr val="333333"/>
+                </a:solidFill>
+              </a:defRPr>
+            </a:pPr>
+            <a:r>
+              <a:t>Shorthand Operators:</a:t>
+            </a:r>
+          </a:p>
+          <a:p>
+            <a:pPr lvl="1">
+              <a:spcAft>
+                <a:spcPts val="400"/>
+              </a:spcAft>
+              <a:defRPr sz="1600">
+                <a:solidFill>
+                  <a:srgbClr val="333333"/>
+                </a:solidFill>
+              </a:defRPr>
+            </a:pPr>
+            <a:r>
+              <a:t>• score += 10  # Same as: score = score + 10</a:t>
+            </a:r>
+          </a:p>
+          <a:p>
+            <a:pPr lvl="1">
+              <a:spcAft>
+                <a:spcPts val="400"/>
+              </a:spcAft>
+              <a:defRPr sz="1600">
+                <a:solidFill>
+                  <a:srgbClr val="333333"/>
+                </a:solidFill>
+              </a:defRPr>
+            </a:pPr>
+            <a:r>
+              <a:t>• score -= 5   # Same as: score = score - 5</a:t>
+            </a:r>
+          </a:p>
+          <a:p>
+            <a:pPr lvl="1">
+              <a:spcAft>
+                <a:spcPts val="400"/>
+              </a:spcAft>
+              <a:defRPr sz="1600">
+                <a:solidFill>
+                  <a:srgbClr val="333333"/>
+                </a:solidFill>
+              </a:defRPr>
+            </a:pPr>
+            <a:r>
+              <a:t>• score *= 2   # Same as: score = score * 2</a:t>
+            </a:r>
+          </a:p>
+          <a:p>
+            <a:pPr lvl="1">
+              <a:spcAft>
+                <a:spcPts val="400"/>
+              </a:spcAft>
+              <a:defRPr sz="1600">
+                <a:solidFill>
+                  <a:srgbClr val="333333"/>
+                </a:solidFill>
+              </a:defRPr>
+            </a:pPr>
+            <a:r>
+              <a:t>• score /= 4   # Same as: score = score / 4</a:t>
+            </a:r>
+          </a:p>
+          <a:p>
+            <a:pPr>
+              <a:spcAft>
+                <a:spcPts val="600"/>
+              </a:spcAft>
+              <a:defRPr b="1" sz="2000">
+                <a:solidFill>
+                  <a:srgbClr val="333333"/>
+                </a:solidFill>
+              </a:defRPr>
+            </a:pPr>
+            <a:r>
+              <a:t>Multiple Operations:</a:t>
+            </a:r>
+          </a:p>
+          <a:p>
+            <a:pPr>
+              <a:spcAft>
+                <a:spcPts val="600"/>
+              </a:spcAft>
+              <a:defRPr sz="1600">
+                <a:solidFill>
+                  <a:srgbClr val="333333"/>
+                </a:solidFill>
+              </a:defRPr>
+            </a:pPr>
+            <a:r>
+              <a:t>total = (price * quantity) + tax</a:t>
+            </a:r>
+          </a:p>
+        </p:txBody>
+      </p:sp>
+    </p:spTree>
+  </p:cSld>
+  <p:clrMapOvr>
+    <a:masterClrMapping/>
+  </p:clrMapOvr>
+</p:sld>
+</file>
+
+<file path=ppt/slides/slide9.xml><?xml version="1.0" encoding="utf-8"?>
+<p:sld xmlns:a="http://schemas.openxmlformats.org/drawingml/2006/main" xmlns:p="http://schemas.openxmlformats.org/presentationml/2006/main" xmlns:r="http://schemas.openxmlformats.org/officeDocument/2006/relationships">
+  <p:cSld>
+    <p:spTree>
+      <p:nvGrpSpPr>
+        <p:cNvPr id="1" name=""/>
+        <p:cNvGrpSpPr/>
+        <p:nvPr/>
+      </p:nvGrpSpPr>
+      <p:grpSpPr/>
+      <p:sp>
+        <p:nvSpPr>
+          <p:cNvPr id="2" name="Rectangle 1"/>
+          <p:cNvSpPr/>
+          <p:nvPr/>
+        </p:nvSpPr>
+        <p:spPr>
+          <a:xfrm>
+            <a:off x="0" y="0"/>
+            <a:ext cx="12191695" cy="6858000"/>
+          </a:xfrm>
+          <a:prstGeom prst="rect">
+            <a:avLst/>
+          </a:prstGeom>
+          <a:solidFill>
+            <a:srgbClr val="FFFFFF"/>
+          </a:solidFill>
+          <a:ln>
+            <a:noFill/>
+          </a:ln>
+        </p:spPr>
+        <p:style>
+          <a:lnRef idx="1">
+            <a:schemeClr val="accent1"/>
+          </a:lnRef>
+          <a:fillRef idx="3">
+            <a:schemeClr val="accent1"/>
+          </a:fillRef>
+          <a:effectRef idx="2">
+            <a:schemeClr val="accent1"/>
+          </a:effectRef>
+          <a:fontRef idx="minor">
+            <a:schemeClr val="lt1"/>
+          </a:fontRef>
+        </p:style>
+        <p:txBody>
+          <a:bodyPr rtlCol="0" anchor="ctr"/>
+          <a:lstStyle/>
+          <a:p>
+            <a:pPr algn="ctr"/>
+          </a:p>
+        </p:txBody>
+      </p:sp>
+      <p:sp>
+        <p:nvSpPr>
+          <p:cNvPr id="3" name="Rectangle 2"/>
+          <p:cNvSpPr/>
+          <p:nvPr/>
+        </p:nvSpPr>
+        <p:spPr>
+          <a:xfrm>
+            <a:off x="0" y="0"/>
+            <a:ext cx="12191695" cy="137160"/>
+          </a:xfrm>
+          <a:prstGeom prst="rect">
+            <a:avLst/>
+          </a:prstGeom>
+          <a:solidFill>
+            <a:srgbClr val="0066CC"/>
+          </a:solidFill>
+          <a:ln>
+            <a:noFill/>
+          </a:ln>
+        </p:spPr>
+        <p:style>
+          <a:lnRef idx="1">
+            <a:schemeClr val="accent1"/>
+          </a:lnRef>
+          <a:fillRef idx="3">
+            <a:schemeClr val="accent1"/>
+          </a:fillRef>
+          <a:effectRef idx="2">
+            <a:schemeClr val="accent1"/>
+          </a:effectRef>
+          <a:fontRef idx="minor">
+            <a:schemeClr val="lt1"/>
+          </a:fontRef>
+        </p:style>
+        <p:txBody>
+          <a:bodyPr rtlCol="0" anchor="ctr"/>
+          <a:lstStyle/>
+          <a:p>
+            <a:pPr algn="ctr"/>
+          </a:p>
+        </p:txBody>
+      </p:sp>
+      <p:sp>
+        <p:nvSpPr>
+          <p:cNvPr id="4" name="TextBox 3"/>
+          <p:cNvSpPr txBox="1"/>
+          <p:nvPr/>
+        </p:nvSpPr>
+        <p:spPr>
+          <a:xfrm>
+            <a:off x="457200" y="320040"/>
+            <a:ext cx="10972800" cy="640080"/>
+          </a:xfrm>
+          <a:prstGeom prst="rect">
+            <a:avLst/>
+          </a:prstGeom>
+          <a:noFill/>
+        </p:spPr>
+        <p:txBody>
+          <a:bodyPr wrap="none">
+            <a:spAutoFit/>
+          </a:bodyPr>
+          <a:lstStyle/>
+          <a:p>
+            <a:pPr>
+              <a:defRPr sz="3600" b="1">
+                <a:solidFill>
+                  <a:srgbClr val="003366"/>
+                </a:solidFill>
+              </a:defRPr>
+            </a:pPr>
+            <a:r>
+              <a:t>The print() Function</a:t>
+            </a:r>
+          </a:p>
+        </p:txBody>
+      </p:sp>
+      <p:sp>
+        <p:nvSpPr>
+          <p:cNvPr id="5" name="TextBox 4"/>
+          <p:cNvSpPr txBox="1"/>
+          <p:nvPr/>
+        </p:nvSpPr>
+        <p:spPr>
+          <a:xfrm>
+            <a:off x="640080" y="1188720"/>
+            <a:ext cx="10789920" cy="5303520"/>
+          </a:xfrm>
+          <a:prstGeom prst="rect">
+            <a:avLst/>
+          </a:prstGeom>
+          <a:noFill/>
+        </p:spPr>
+        <p:txBody>
+          <a:bodyPr wrap="square">
+            <a:spAutoFit/>
+          </a:bodyPr>
+          <a:lstStyle/>
+          <a:p>
+            <a:pPr>
+              <a:spcAft>
+                <a:spcPts val="600"/>
+              </a:spcAft>
+              <a:defRPr b="1" sz="2000">
+                <a:solidFill>
+                  <a:srgbClr val="333333"/>
+                </a:solidFill>
+              </a:defRPr>
+            </a:pPr>
+            <a:r>
+              <a:t>Displaying Output to Screen:</a:t>
+            </a:r>
+          </a:p>
+          <a:p>
+            <a:pPr>
+              <a:spcAft>
+                <a:spcPts val="600"/>
+              </a:spcAft>
+              <a:defRPr b="1" sz="2000">
+                <a:solidFill>
+                  <a:srgbClr val="333333"/>
+                </a:solidFill>
+              </a:defRPr>
+            </a:pPr>
+            <a:r>
+              <a:t>print("Hello")  # Displays: Hello</a:t>
+            </a:r>
+          </a:p>
+          <a:p>
+            <a:pPr>
+              <a:spcAft>
+                <a:spcPts val="600"/>
+              </a:spcAft>
+              <a:defRPr b="1" sz="2000">
+                <a:solidFill>
+                  <a:srgbClr val="333333"/>
+                </a:solidFill>
+              </a:defRPr>
+            </a:pPr>
+            <a:r>
+              <a:t>Printing Multiple Items:</a:t>
+            </a:r>
+          </a:p>
+          <a:p>
+            <a:pPr>
+              <a:spcAft>
+                <a:spcPts val="600"/>
+              </a:spcAft>
+              <a:defRPr b="1" sz="2000">
+                <a:solidFill>
+                  <a:srgbClr val="333333"/>
+                </a:solidFill>
+              </a:defRPr>
+            </a:pPr>
+            <a:r>
+              <a:t>print("Name:", name, "Age:", age)</a:t>
+            </a:r>
+          </a:p>
+          <a:p>
+            <a:pPr>
+              <a:spcAft>
+                <a:spcPts val="600"/>
+              </a:spcAft>
+              <a:defRPr b="1" sz="2000">
+                <a:solidFill>
+                  <a:srgbClr val="333333"/>
+                </a:solidFill>
+              </a:defRPr>
+            </a:pPr>
+            <a:r>
+              <a:t>Print with Separators:</a:t>
+            </a:r>
+          </a:p>
+          <a:p>
+            <a:pPr>
+              <a:spcAft>
+                <a:spcPts val="600"/>
+              </a:spcAft>
+              <a:defRPr sz="1600">
+                <a:solidFill>
+                  <a:srgbClr val="333333"/>
+                </a:solidFill>
+              </a:defRPr>
+            </a:pPr>
+            <a:r>
+              <a:t>print("A", "B", "C", sep="-")  # A-B-C</a:t>
+            </a:r>
+          </a:p>
+          <a:p>
+            <a:pPr>
+              <a:spcAft>
+                <a:spcPts val="600"/>
+              </a:spcAft>
+              <a:defRPr b="1" sz="2000">
+                <a:solidFill>
+                  <a:srgbClr val="333333"/>
+                </a:solidFill>
+              </a:defRPr>
+            </a:pPr>
+            <a:r>
+              <a:t>Print without Newline:</a:t>
+            </a:r>
+          </a:p>
+          <a:p>
+            <a:pPr>
+              <a:spcAft>
+                <a:spcPts val="600"/>
+              </a:spcAft>
+              <a:defRPr sz="1600">
+                <a:solidFill>
+                  <a:srgbClr val="333333"/>
+                </a:solidFill>
+              </a:defRPr>
+            </a:pPr>
+            <a:r>
+              <a:t>print("Hello", end=" ")</a:t>
+            </a:r>
+          </a:p>
+          <a:p>
+            <a:pPr>
+              <a:spcAft>
+                <a:spcPts val="600"/>
+              </a:spcAft>
+              <a:defRPr sz="1600">
+                <a:solidFill>
+                  <a:srgbClr val="333333"/>
+                </a:solidFill>
+              </a:defRPr>
+            </a:pPr>
+            <a:r>
+              <a:t>print("World")  # Hello World</a:t>
+            </a:r>
+          </a:p>
+          <a:p>
+            <a:pPr>
+              <a:spcAft>
+                <a:spcPts val="600"/>
+              </a:spcAft>
+              <a:defRPr b="1" sz="2000">
+                <a:solidFill>
+                  <a:srgbClr val="333333"/>
+                </a:solidFill>
+              </a:defRPr>
+            </a:pPr>
+            <a:r>
+              <a:t>Formatted Output:</a:t>
+            </a:r>
+          </a:p>
+          <a:p>
+            <a:pPr>
+              <a:spcAft>
+                <a:spcPts val="600"/>
+              </a:spcAft>
+              <a:defRPr sz="1600">
+                <a:solidFill>
+                  <a:srgbClr val="333333"/>
+                </a:solidFill>
+              </a:defRPr>
+            </a:pPr>
+            <a:r>
+              <a:t>price = 19.99</a:t>
+            </a:r>
+          </a:p>
+          <a:p>
+            <a:pPr>
+              <a:spcAft>
+                <a:spcPts val="600"/>
+              </a:spcAft>
+              <a:defRPr b="1" sz="2000">
+                <a:solidFill>
+                  <a:srgbClr val="333333"/>
+                </a:solidFill>
+              </a:defRPr>
+            </a:pPr>
+            <a:r>
+              <a:t>print(f"Price: ${price:.2f}")  # Price: $19.99</a:t>
+            </a:r>
+          </a:p>
+          <a:p>
+            <a:pPr>
+              <a:spcAft>
+                <a:spcPts val="600"/>
+              </a:spcAft>
+              <a:defRPr b="1" sz="2000">
+                <a:solidFill>
+                  <a:srgbClr val="333333"/>
+                </a:solidFill>
+              </a:defRPr>
+            </a:pPr>
+            <a:r>
+              <a:t>Escape Sequences:</a:t>
+            </a:r>
+          </a:p>
+          <a:p>
+            <a:pPr>
+              <a:spcAft>
+                <a:spcPts val="600"/>
+              </a:spcAft>
+              <a:defRPr sz="1600">
+                <a:solidFill>
+                  <a:srgbClr val="333333"/>
+                </a:solidFill>
+              </a:defRPr>
+            </a:pPr>
+            <a:r>
+              <a:t>\n = newline, \t = tab, \\ = backslash</a:t>
             </a:r>
           </a:p>
         </p:txBody>

--- a/python_course/chapter_01_introduction/introduction_to_python.pptx
+++ b/python_course/chapter_01_introduction/introduction_to_python.pptx
@@ -21,6 +21,11 @@
     <p:sldId id="269" r:id="rId20"/>
     <p:sldId id="270" r:id="rId21"/>
     <p:sldId id="271" r:id="rId22"/>
+    <p:sldId id="272" r:id="rId23"/>
+    <p:sldId id="273" r:id="rId24"/>
+    <p:sldId id="274" r:id="rId25"/>
+    <p:sldId id="275" r:id="rId26"/>
+    <p:sldId id="276" r:id="rId27"/>
   </p:sldIdLst>
   <p:sldSz cx="12191695" cy="6858000" type="screen4x3"/>
   <p:notesSz cx="6858000" cy="9144000"/>
@@ -4366,14 +4371,14 @@
         </p:nvSpPr>
         <p:spPr>
           <a:xfrm>
-            <a:off x="365760" y="5897880"/>
-            <a:ext cx="11430000" cy="365760"/>
-          </a:xfrm>
-          <a:prstGeom prst="rect">
-            <a:avLst/>
-          </a:prstGeom>
-          <a:solidFill>
-            <a:srgbClr val="0078D7"/>
+            <a:off x="640080" y="5897880"/>
+            <a:ext cx="10789920" cy="411480"/>
+          </a:xfrm>
+          <a:prstGeom prst="rect">
+            <a:avLst/>
+          </a:prstGeom>
+          <a:solidFill>
+            <a:srgbClr val="282C34"/>
           </a:solidFill>
           <a:ln>
             <a:noFill/>
@@ -4403,14 +4408,57 @@
       </p:sp>
       <p:sp>
         <p:nvSpPr>
-          <p:cNvPr id="28" name="TextBox 27"/>
-          <p:cNvSpPr txBox="1"/>
-          <p:nvPr/>
-        </p:nvSpPr>
-        <p:spPr>
-          <a:xfrm>
-            <a:off x="548640" y="5943600"/>
-            <a:ext cx="10972800" cy="274320"/>
+          <p:cNvPr id="28" name="Rectangle 27"/>
+          <p:cNvSpPr/>
+          <p:nvPr/>
+        </p:nvSpPr>
+        <p:spPr>
+          <a:xfrm>
+            <a:off x="640080" y="5897880"/>
+            <a:ext cx="73152" cy="411480"/>
+          </a:xfrm>
+          <a:prstGeom prst="rect">
+            <a:avLst/>
+          </a:prstGeom>
+          <a:solidFill>
+            <a:srgbClr val="61AFEF"/>
+          </a:solidFill>
+          <a:ln>
+            <a:noFill/>
+          </a:ln>
+        </p:spPr>
+        <p:style>
+          <a:lnRef idx="1">
+            <a:schemeClr val="accent1"/>
+          </a:lnRef>
+          <a:fillRef idx="3">
+            <a:schemeClr val="accent1"/>
+          </a:fillRef>
+          <a:effectRef idx="2">
+            <a:schemeClr val="accent1"/>
+          </a:effectRef>
+          <a:fontRef idx="minor">
+            <a:schemeClr val="lt1"/>
+          </a:fontRef>
+        </p:style>
+        <p:txBody>
+          <a:bodyPr rtlCol="0" anchor="ctr"/>
+          <a:lstStyle/>
+          <a:p>
+            <a:pPr algn="ctr"/>
+          </a:p>
+        </p:txBody>
+      </p:sp>
+      <p:sp>
+        <p:nvSpPr>
+          <p:cNvPr id="29" name="TextBox 28"/>
+          <p:cNvSpPr txBox="1"/>
+          <p:nvPr/>
+        </p:nvSpPr>
+        <p:spPr>
+          <a:xfrm>
+            <a:off x="914400" y="5943600"/>
+            <a:ext cx="10241280" cy="320040"/>
           </a:xfrm>
           <a:prstGeom prst="rect">
             <a:avLst/>
@@ -4424,14 +4472,18 @@
           <a:lstStyle/>
           <a:p>
             <a:pPr>
-              <a:defRPr sz="2000" b="1">
-                <a:solidFill>
-                  <a:srgbClr val="FFFFFF"/>
-                </a:solidFill>
-              </a:defRPr>
-            </a:pPr>
-            <a:r>
-              <a:t>print(f"Price: ${price:.2f}")  # Price: $19.99</a:t>
+              <a:spcAft>
+                <a:spcPts val="200"/>
+              </a:spcAft>
+              <a:defRPr sz="1400">
+                <a:solidFill>
+                  <a:srgbClr val="ABB2BF"/>
+                </a:solidFill>
+                <a:latin typeface="Consolas"/>
+              </a:defRPr>
+            </a:pPr>
+            <a:r>
+              <a:t>price = 19.99</a:t>
             </a:r>
           </a:p>
         </p:txBody>
@@ -4469,7 +4521,7 @@
             <a:avLst/>
           </a:prstGeom>
           <a:solidFill>
-            <a:srgbClr val="0066CC"/>
+            <a:srgbClr val="FAFAFA"/>
           </a:solidFill>
           <a:ln>
             <a:noFill/>
@@ -4505,14 +4557,14 @@
         </p:nvSpPr>
         <p:spPr>
           <a:xfrm>
-            <a:off x="0" y="2743200"/>
-            <a:ext cx="3657600" cy="137160"/>
-          </a:xfrm>
-          <a:prstGeom prst="rect">
-            <a:avLst/>
-          </a:prstGeom>
-          <a:solidFill>
-            <a:srgbClr val="FFBB33"/>
+            <a:off x="0" y="0"/>
+            <a:ext cx="12191695" cy="1097280"/>
+          </a:xfrm>
+          <a:prstGeom prst="rect">
+            <a:avLst/>
+          </a:prstGeom>
+          <a:solidFill>
+            <a:srgbClr val="0066CC"/>
           </a:solidFill>
           <a:ln>
             <a:noFill/>
@@ -4548,8 +4600,8 @@
         </p:nvSpPr>
         <p:spPr>
           <a:xfrm>
-            <a:off x="8531352" y="4114800"/>
-            <a:ext cx="3657600" cy="137160"/>
+            <a:off x="0" y="1097280"/>
+            <a:ext cx="137160" cy="5760720"/>
           </a:xfrm>
           <a:prstGeom prst="rect">
             <a:avLst/>
@@ -4591,29 +4643,310 @@
         </p:nvSpPr>
         <p:spPr>
           <a:xfrm>
-            <a:off x="914400" y="2560320"/>
-            <a:ext cx="10360152" cy="1371600"/>
-          </a:xfrm>
-          <a:prstGeom prst="rect">
-            <a:avLst/>
-          </a:prstGeom>
-          <a:noFill/>
-        </p:spPr>
-        <p:txBody>
-          <a:bodyPr wrap="none">
-            <a:spAutoFit/>
-          </a:bodyPr>
-          <a:lstStyle/>
-          <a:p>
-            <a:pPr algn="ctr">
-              <a:defRPr sz="4800" b="1">
+            <a:off x="365760" y="274320"/>
+            <a:ext cx="10972800" cy="640080"/>
+          </a:xfrm>
+          <a:prstGeom prst="rect">
+            <a:avLst/>
+          </a:prstGeom>
+          <a:noFill/>
+        </p:spPr>
+        <p:txBody>
+          <a:bodyPr wrap="none">
+            <a:spAutoFit/>
+          </a:bodyPr>
+          <a:lstStyle/>
+          <a:p>
+            <a:pPr>
+              <a:defRPr sz="3600" b="1">
                 <a:solidFill>
                   <a:srgbClr val="FFFFFF"/>
                 </a:solidFill>
               </a:defRPr>
             </a:pPr>
             <a:r>
-              <a:t>Comments and Code Documentation</a:t>
+              <a:t>The print() Function (continued)</a:t>
+            </a:r>
+          </a:p>
+        </p:txBody>
+      </p:sp>
+      <p:sp>
+        <p:nvSpPr>
+          <p:cNvPr id="6" name="Rectangle 5"/>
+          <p:cNvSpPr/>
+          <p:nvPr/>
+        </p:nvSpPr>
+        <p:spPr>
+          <a:xfrm>
+            <a:off x="365760" y="1325880"/>
+            <a:ext cx="11430000" cy="365760"/>
+          </a:xfrm>
+          <a:prstGeom prst="rect">
+            <a:avLst/>
+          </a:prstGeom>
+          <a:solidFill>
+            <a:srgbClr val="0078D7"/>
+          </a:solidFill>
+          <a:ln>
+            <a:noFill/>
+          </a:ln>
+        </p:spPr>
+        <p:style>
+          <a:lnRef idx="1">
+            <a:schemeClr val="accent1"/>
+          </a:lnRef>
+          <a:fillRef idx="3">
+            <a:schemeClr val="accent1"/>
+          </a:fillRef>
+          <a:effectRef idx="2">
+            <a:schemeClr val="accent1"/>
+          </a:effectRef>
+          <a:fontRef idx="minor">
+            <a:schemeClr val="lt1"/>
+          </a:fontRef>
+        </p:style>
+        <p:txBody>
+          <a:bodyPr rtlCol="0" anchor="ctr"/>
+          <a:lstStyle/>
+          <a:p>
+            <a:pPr algn="ctr"/>
+          </a:p>
+        </p:txBody>
+      </p:sp>
+      <p:sp>
+        <p:nvSpPr>
+          <p:cNvPr id="7" name="TextBox 6"/>
+          <p:cNvSpPr txBox="1"/>
+          <p:nvPr/>
+        </p:nvSpPr>
+        <p:spPr>
+          <a:xfrm>
+            <a:off x="548640" y="1371600"/>
+            <a:ext cx="10972800" cy="274320"/>
+          </a:xfrm>
+          <a:prstGeom prst="rect">
+            <a:avLst/>
+          </a:prstGeom>
+          <a:noFill/>
+        </p:spPr>
+        <p:txBody>
+          <a:bodyPr wrap="none">
+            <a:spAutoFit/>
+          </a:bodyPr>
+          <a:lstStyle/>
+          <a:p>
+            <a:pPr>
+              <a:defRPr sz="2000" b="1">
+                <a:solidFill>
+                  <a:srgbClr val="FFFFFF"/>
+                </a:solidFill>
+              </a:defRPr>
+            </a:pPr>
+            <a:r>
+              <a:t>print(f"Price: ${price:.2f}")  # Price: $19.99</a:t>
+            </a:r>
+          </a:p>
+        </p:txBody>
+      </p:sp>
+      <p:sp>
+        <p:nvSpPr>
+          <p:cNvPr id="8" name="Rectangle 7"/>
+          <p:cNvSpPr/>
+          <p:nvPr/>
+        </p:nvSpPr>
+        <p:spPr>
+          <a:xfrm>
+            <a:off x="365760" y="1783080"/>
+            <a:ext cx="11430000" cy="365760"/>
+          </a:xfrm>
+          <a:prstGeom prst="rect">
+            <a:avLst/>
+          </a:prstGeom>
+          <a:solidFill>
+            <a:srgbClr val="0078D7"/>
+          </a:solidFill>
+          <a:ln>
+            <a:noFill/>
+          </a:ln>
+        </p:spPr>
+        <p:style>
+          <a:lnRef idx="1">
+            <a:schemeClr val="accent1"/>
+          </a:lnRef>
+          <a:fillRef idx="3">
+            <a:schemeClr val="accent1"/>
+          </a:fillRef>
+          <a:effectRef idx="2">
+            <a:schemeClr val="accent1"/>
+          </a:effectRef>
+          <a:fontRef idx="minor">
+            <a:schemeClr val="lt1"/>
+          </a:fontRef>
+        </p:style>
+        <p:txBody>
+          <a:bodyPr rtlCol="0" anchor="ctr"/>
+          <a:lstStyle/>
+          <a:p>
+            <a:pPr algn="ctr"/>
+          </a:p>
+        </p:txBody>
+      </p:sp>
+      <p:sp>
+        <p:nvSpPr>
+          <p:cNvPr id="9" name="TextBox 8"/>
+          <p:cNvSpPr txBox="1"/>
+          <p:nvPr/>
+        </p:nvSpPr>
+        <p:spPr>
+          <a:xfrm>
+            <a:off x="548640" y="1828800"/>
+            <a:ext cx="10972800" cy="274320"/>
+          </a:xfrm>
+          <a:prstGeom prst="rect">
+            <a:avLst/>
+          </a:prstGeom>
+          <a:noFill/>
+        </p:spPr>
+        <p:txBody>
+          <a:bodyPr wrap="none">
+            <a:spAutoFit/>
+          </a:bodyPr>
+          <a:lstStyle/>
+          <a:p>
+            <a:pPr>
+              <a:defRPr sz="2000" b="1">
+                <a:solidFill>
+                  <a:srgbClr val="FFFFFF"/>
+                </a:solidFill>
+              </a:defRPr>
+            </a:pPr>
+            <a:r>
+              <a:t>Escape Sequences:</a:t>
+            </a:r>
+          </a:p>
+        </p:txBody>
+      </p:sp>
+      <p:sp>
+        <p:nvSpPr>
+          <p:cNvPr id="10" name="Rectangle 9"/>
+          <p:cNvSpPr/>
+          <p:nvPr/>
+        </p:nvSpPr>
+        <p:spPr>
+          <a:xfrm>
+            <a:off x="640080" y="2240280"/>
+            <a:ext cx="10789920" cy="411480"/>
+          </a:xfrm>
+          <a:prstGeom prst="rect">
+            <a:avLst/>
+          </a:prstGeom>
+          <a:solidFill>
+            <a:srgbClr val="282C34"/>
+          </a:solidFill>
+          <a:ln>
+            <a:noFill/>
+          </a:ln>
+        </p:spPr>
+        <p:style>
+          <a:lnRef idx="1">
+            <a:schemeClr val="accent1"/>
+          </a:lnRef>
+          <a:fillRef idx="3">
+            <a:schemeClr val="accent1"/>
+          </a:fillRef>
+          <a:effectRef idx="2">
+            <a:schemeClr val="accent1"/>
+          </a:effectRef>
+          <a:fontRef idx="minor">
+            <a:schemeClr val="lt1"/>
+          </a:fontRef>
+        </p:style>
+        <p:txBody>
+          <a:bodyPr rtlCol="0" anchor="ctr"/>
+          <a:lstStyle/>
+          <a:p>
+            <a:pPr algn="ctr"/>
+          </a:p>
+        </p:txBody>
+      </p:sp>
+      <p:sp>
+        <p:nvSpPr>
+          <p:cNvPr id="11" name="Rectangle 10"/>
+          <p:cNvSpPr/>
+          <p:nvPr/>
+        </p:nvSpPr>
+        <p:spPr>
+          <a:xfrm>
+            <a:off x="640080" y="2240280"/>
+            <a:ext cx="73152" cy="411480"/>
+          </a:xfrm>
+          <a:prstGeom prst="rect">
+            <a:avLst/>
+          </a:prstGeom>
+          <a:solidFill>
+            <a:srgbClr val="61AFEF"/>
+          </a:solidFill>
+          <a:ln>
+            <a:noFill/>
+          </a:ln>
+        </p:spPr>
+        <p:style>
+          <a:lnRef idx="1">
+            <a:schemeClr val="accent1"/>
+          </a:lnRef>
+          <a:fillRef idx="3">
+            <a:schemeClr val="accent1"/>
+          </a:fillRef>
+          <a:effectRef idx="2">
+            <a:schemeClr val="accent1"/>
+          </a:effectRef>
+          <a:fontRef idx="minor">
+            <a:schemeClr val="lt1"/>
+          </a:fontRef>
+        </p:style>
+        <p:txBody>
+          <a:bodyPr rtlCol="0" anchor="ctr"/>
+          <a:lstStyle/>
+          <a:p>
+            <a:pPr algn="ctr"/>
+          </a:p>
+        </p:txBody>
+      </p:sp>
+      <p:sp>
+        <p:nvSpPr>
+          <p:cNvPr id="12" name="TextBox 11"/>
+          <p:cNvSpPr txBox="1"/>
+          <p:nvPr/>
+        </p:nvSpPr>
+        <p:spPr>
+          <a:xfrm>
+            <a:off x="914400" y="2286000"/>
+            <a:ext cx="10241280" cy="320040"/>
+          </a:xfrm>
+          <a:prstGeom prst="rect">
+            <a:avLst/>
+          </a:prstGeom>
+          <a:noFill/>
+        </p:spPr>
+        <p:txBody>
+          <a:bodyPr wrap="none">
+            <a:spAutoFit/>
+          </a:bodyPr>
+          <a:lstStyle/>
+          <a:p>
+            <a:pPr>
+              <a:spcAft>
+                <a:spcPts val="200"/>
+              </a:spcAft>
+              <a:defRPr sz="1400">
+                <a:solidFill>
+                  <a:srgbClr val="ABB2BF"/>
+                </a:solidFill>
+                <a:latin typeface="Consolas"/>
+              </a:defRPr>
+            </a:pPr>
+            <a:r>
+              <a:t>\n = newline, \t = tab, \\ = backslash</a:t>
             </a:r>
           </a:p>
         </p:txBody>
@@ -5619,41 +5952,6 @@
           </a:p>
         </p:txBody>
       </p:sp>
-      <p:sp>
-        <p:nvSpPr>
-          <p:cNvPr id="27" name="TextBox 26"/>
-          <p:cNvSpPr txBox="1"/>
-          <p:nvPr/>
-        </p:nvSpPr>
-        <p:spPr>
-          <a:xfrm>
-            <a:off x="457200" y="6035040"/>
-            <a:ext cx="11247120" cy="320040"/>
-          </a:xfrm>
-          <a:prstGeom prst="rect">
-            <a:avLst/>
-          </a:prstGeom>
-          <a:noFill/>
-        </p:spPr>
-        <p:txBody>
-          <a:bodyPr wrap="none">
-            <a:spAutoFit/>
-          </a:bodyPr>
-          <a:lstStyle/>
-          <a:p>
-            <a:pPr lvl="1">
-              <a:defRPr sz="1600">
-                <a:solidFill>
-                  <a:srgbClr val="333333"/>
-                </a:solidFill>
-              </a:defRPr>
-            </a:pPr>
-            <a:r>
-              <a:t>• Add TODO notes</a:t>
-            </a:r>
-          </a:p>
-        </p:txBody>
-      </p:sp>
     </p:spTree>
   </p:cSld>
   <p:clrMapOvr>
@@ -5831,20 +6129,90 @@
               </a:defRPr>
             </a:pPr>
             <a:r>
-              <a:t>Real-World Applications</a:t>
-            </a:r>
-          </a:p>
-        </p:txBody>
-      </p:sp>
-      <p:sp>
-        <p:nvSpPr>
-          <p:cNvPr id="6" name="Rectangle 5"/>
+              <a:t>Comments and Code Documentation (continued)</a:t>
+            </a:r>
+          </a:p>
+        </p:txBody>
+      </p:sp>
+      <p:sp>
+        <p:nvSpPr>
+          <p:cNvPr id="6" name="TextBox 5"/>
+          <p:cNvSpPr txBox="1"/>
+          <p:nvPr/>
+        </p:nvSpPr>
+        <p:spPr>
+          <a:xfrm>
+            <a:off x="457200" y="1371600"/>
+            <a:ext cx="11247120" cy="320040"/>
+          </a:xfrm>
+          <a:prstGeom prst="rect">
+            <a:avLst/>
+          </a:prstGeom>
+          <a:noFill/>
+        </p:spPr>
+        <p:txBody>
+          <a:bodyPr wrap="none">
+            <a:spAutoFit/>
+          </a:bodyPr>
+          <a:lstStyle/>
+          <a:p>
+            <a:pPr lvl="1">
+              <a:defRPr sz="1600">
+                <a:solidFill>
+                  <a:srgbClr val="333333"/>
+                </a:solidFill>
+              </a:defRPr>
+            </a:pPr>
+            <a:r>
+              <a:t>• Add TODO notes</a:t>
+            </a:r>
+          </a:p>
+        </p:txBody>
+      </p:sp>
+      <p:sp>
+        <p:nvSpPr>
+          <p:cNvPr id="7" name="TextBox 6"/>
+          <p:cNvSpPr txBox="1"/>
+          <p:nvPr/>
+        </p:nvSpPr>
+        <p:spPr>
+          <a:xfrm>
+            <a:off x="457200" y="1645920"/>
+            <a:ext cx="11247120" cy="320040"/>
+          </a:xfrm>
+          <a:prstGeom prst="rect">
+            <a:avLst/>
+          </a:prstGeom>
+          <a:noFill/>
+        </p:spPr>
+        <p:txBody>
+          <a:bodyPr wrap="none">
+            <a:spAutoFit/>
+          </a:bodyPr>
+          <a:lstStyle/>
+          <a:p>
+            <a:pPr lvl="1">
+              <a:defRPr sz="1600">
+                <a:solidFill>
+                  <a:srgbClr val="333333"/>
+                </a:solidFill>
+              </a:defRPr>
+            </a:pPr>
+            <a:r>
+              <a:t>• Clarify tricky code</a:t>
+            </a:r>
+          </a:p>
+        </p:txBody>
+      </p:sp>
+      <p:sp>
+        <p:nvSpPr>
+          <p:cNvPr id="8" name="Rectangle 7"/>
           <p:cNvSpPr/>
           <p:nvPr/>
         </p:nvSpPr>
         <p:spPr>
           <a:xfrm>
-            <a:off x="365760" y="1325880"/>
+            <a:off x="365760" y="1874520"/>
             <a:ext cx="11430000" cy="365760"/>
           </a:xfrm>
           <a:prstGeom prst="rect">
@@ -5881,13 +6249,13 @@
       </p:sp>
       <p:sp>
         <p:nvSpPr>
-          <p:cNvPr id="7" name="TextBox 6"/>
-          <p:cNvSpPr txBox="1"/>
-          <p:nvPr/>
-        </p:nvSpPr>
-        <p:spPr>
-          <a:xfrm>
-            <a:off x="548640" y="1371600"/>
+          <p:cNvPr id="9" name="TextBox 8"/>
+          <p:cNvSpPr txBox="1"/>
+          <p:nvPr/>
+        </p:nvSpPr>
+        <p:spPr>
+          <a:xfrm>
+            <a:off x="548640" y="1920240"/>
             <a:ext cx="10972800" cy="274320"/>
           </a:xfrm>
           <a:prstGeom prst="rect">
@@ -5909,27 +6277,27 @@
               </a:defRPr>
             </a:pPr>
             <a:r>
-              <a:t>Temperature Converter:</a:t>
-            </a:r>
-          </a:p>
-        </p:txBody>
-      </p:sp>
-      <p:sp>
-        <p:nvSpPr>
-          <p:cNvPr id="8" name="Rectangle 7"/>
+              <a:t>Good Comment: # Calculate tax as 15% of price</a:t>
+            </a:r>
+          </a:p>
+        </p:txBody>
+      </p:sp>
+      <p:sp>
+        <p:nvSpPr>
+          <p:cNvPr id="10" name="Rectangle 9"/>
           <p:cNvSpPr/>
           <p:nvPr/>
         </p:nvSpPr>
         <p:spPr>
           <a:xfrm>
-            <a:off x="640080" y="1783080"/>
-            <a:ext cx="10789920" cy="640080"/>
-          </a:xfrm>
-          <a:prstGeom prst="rect">
-            <a:avLst/>
-          </a:prstGeom>
-          <a:solidFill>
-            <a:srgbClr val="282C34"/>
+            <a:off x="365760" y="2331720"/>
+            <a:ext cx="11430000" cy="365760"/>
+          </a:xfrm>
+          <a:prstGeom prst="rect">
+            <a:avLst/>
+          </a:prstGeom>
+          <a:solidFill>
+            <a:srgbClr val="0078D7"/>
           </a:solidFill>
           <a:ln>
             <a:noFill/>
@@ -5959,154 +6327,13 @@
       </p:sp>
       <p:sp>
         <p:nvSpPr>
-          <p:cNvPr id="9" name="Rectangle 8"/>
-          <p:cNvSpPr/>
-          <p:nvPr/>
-        </p:nvSpPr>
-        <p:spPr>
-          <a:xfrm>
-            <a:off x="640080" y="1783080"/>
-            <a:ext cx="73152" cy="640080"/>
-          </a:xfrm>
-          <a:prstGeom prst="rect">
-            <a:avLst/>
-          </a:prstGeom>
-          <a:solidFill>
-            <a:srgbClr val="61AFEF"/>
-          </a:solidFill>
-          <a:ln>
-            <a:noFill/>
-          </a:ln>
-        </p:spPr>
-        <p:style>
-          <a:lnRef idx="1">
-            <a:schemeClr val="accent1"/>
-          </a:lnRef>
-          <a:fillRef idx="3">
-            <a:schemeClr val="accent1"/>
-          </a:fillRef>
-          <a:effectRef idx="2">
-            <a:schemeClr val="accent1"/>
-          </a:effectRef>
-          <a:fontRef idx="minor">
-            <a:schemeClr val="lt1"/>
-          </a:fontRef>
-        </p:style>
-        <p:txBody>
-          <a:bodyPr rtlCol="0" anchor="ctr"/>
-          <a:lstStyle/>
-          <a:p>
-            <a:pPr algn="ctr"/>
-          </a:p>
-        </p:txBody>
-      </p:sp>
-      <p:sp>
-        <p:nvSpPr>
-          <p:cNvPr id="10" name="TextBox 9"/>
-          <p:cNvSpPr txBox="1"/>
-          <p:nvPr/>
-        </p:nvSpPr>
-        <p:spPr>
-          <a:xfrm>
-            <a:off x="914400" y="1828800"/>
-            <a:ext cx="10241280" cy="548640"/>
-          </a:xfrm>
-          <a:prstGeom prst="rect">
-            <a:avLst/>
-          </a:prstGeom>
-          <a:noFill/>
-        </p:spPr>
-        <p:txBody>
-          <a:bodyPr wrap="none">
-            <a:spAutoFit/>
-          </a:bodyPr>
-          <a:lstStyle/>
-          <a:p>
-            <a:pPr>
-              <a:spcAft>
-                <a:spcPts val="200"/>
-              </a:spcAft>
-              <a:defRPr sz="1400">
-                <a:solidFill>
-                  <a:srgbClr val="ABB2BF"/>
-                </a:solidFill>
-                <a:latin typeface="Consolas"/>
-              </a:defRPr>
-            </a:pPr>
-            <a:r>
-              <a:t>celsius = 25</a:t>
-            </a:r>
-          </a:p>
-          <a:p>
-            <a:pPr>
-              <a:spcAft>
-                <a:spcPts val="200"/>
-              </a:spcAft>
-              <a:defRPr sz="1400">
-                <a:solidFill>
-                  <a:srgbClr val="ABB2BF"/>
-                </a:solidFill>
-                <a:latin typeface="Consolas"/>
-              </a:defRPr>
-            </a:pPr>
-            <a:r>
-              <a:t>fahrenheit = (celsius * 9/5) + 32</a:t>
-            </a:r>
-          </a:p>
-        </p:txBody>
-      </p:sp>
-      <p:sp>
-        <p:nvSpPr>
-          <p:cNvPr id="11" name="Rectangle 10"/>
-          <p:cNvSpPr/>
-          <p:nvPr/>
-        </p:nvSpPr>
-        <p:spPr>
-          <a:xfrm>
-            <a:off x="365760" y="2560320"/>
-            <a:ext cx="11430000" cy="365760"/>
-          </a:xfrm>
-          <a:prstGeom prst="rect">
-            <a:avLst/>
-          </a:prstGeom>
-          <a:solidFill>
-            <a:srgbClr val="0078D7"/>
-          </a:solidFill>
-          <a:ln>
-            <a:noFill/>
-          </a:ln>
-        </p:spPr>
-        <p:style>
-          <a:lnRef idx="1">
-            <a:schemeClr val="accent1"/>
-          </a:lnRef>
-          <a:fillRef idx="3">
-            <a:schemeClr val="accent1"/>
-          </a:fillRef>
-          <a:effectRef idx="2">
-            <a:schemeClr val="accent1"/>
-          </a:effectRef>
-          <a:fontRef idx="minor">
-            <a:schemeClr val="lt1"/>
-          </a:fontRef>
-        </p:style>
-        <p:txBody>
-          <a:bodyPr rtlCol="0" anchor="ctr"/>
-          <a:lstStyle/>
-          <a:p>
-            <a:pPr algn="ctr"/>
-          </a:p>
-        </p:txBody>
-      </p:sp>
-      <p:sp>
-        <p:nvSpPr>
-          <p:cNvPr id="12" name="TextBox 11"/>
-          <p:cNvSpPr txBox="1"/>
-          <p:nvPr/>
-        </p:nvSpPr>
-        <p:spPr>
-          <a:xfrm>
-            <a:off x="548640" y="2606040"/>
+          <p:cNvPr id="11" name="TextBox 10"/>
+          <p:cNvSpPr txBox="1"/>
+          <p:nvPr/>
+        </p:nvSpPr>
+        <p:spPr>
+          <a:xfrm>
+            <a:off x="548640" y="2377440"/>
             <a:ext cx="10972800" cy="274320"/>
           </a:xfrm>
           <a:prstGeom prst="rect">
@@ -6128,493 +6355,7 @@
               </a:defRPr>
             </a:pPr>
             <a:r>
-              <a:t>Shopping Calculator:</a:t>
-            </a:r>
-          </a:p>
-        </p:txBody>
-      </p:sp>
-      <p:sp>
-        <p:nvSpPr>
-          <p:cNvPr id="13" name="Rectangle 12"/>
-          <p:cNvSpPr/>
-          <p:nvPr/>
-        </p:nvSpPr>
-        <p:spPr>
-          <a:xfrm>
-            <a:off x="640080" y="3017520"/>
-            <a:ext cx="10789920" cy="1097280"/>
-          </a:xfrm>
-          <a:prstGeom prst="rect">
-            <a:avLst/>
-          </a:prstGeom>
-          <a:solidFill>
-            <a:srgbClr val="282C34"/>
-          </a:solidFill>
-          <a:ln>
-            <a:noFill/>
-          </a:ln>
-        </p:spPr>
-        <p:style>
-          <a:lnRef idx="1">
-            <a:schemeClr val="accent1"/>
-          </a:lnRef>
-          <a:fillRef idx="3">
-            <a:schemeClr val="accent1"/>
-          </a:fillRef>
-          <a:effectRef idx="2">
-            <a:schemeClr val="accent1"/>
-          </a:effectRef>
-          <a:fontRef idx="minor">
-            <a:schemeClr val="lt1"/>
-          </a:fontRef>
-        </p:style>
-        <p:txBody>
-          <a:bodyPr rtlCol="0" anchor="ctr"/>
-          <a:lstStyle/>
-          <a:p>
-            <a:pPr algn="ctr"/>
-          </a:p>
-        </p:txBody>
-      </p:sp>
-      <p:sp>
-        <p:nvSpPr>
-          <p:cNvPr id="14" name="Rectangle 13"/>
-          <p:cNvSpPr/>
-          <p:nvPr/>
-        </p:nvSpPr>
-        <p:spPr>
-          <a:xfrm>
-            <a:off x="640080" y="3017520"/>
-            <a:ext cx="73152" cy="1097280"/>
-          </a:xfrm>
-          <a:prstGeom prst="rect">
-            <a:avLst/>
-          </a:prstGeom>
-          <a:solidFill>
-            <a:srgbClr val="61AFEF"/>
-          </a:solidFill>
-          <a:ln>
-            <a:noFill/>
-          </a:ln>
-        </p:spPr>
-        <p:style>
-          <a:lnRef idx="1">
-            <a:schemeClr val="accent1"/>
-          </a:lnRef>
-          <a:fillRef idx="3">
-            <a:schemeClr val="accent1"/>
-          </a:fillRef>
-          <a:effectRef idx="2">
-            <a:schemeClr val="accent1"/>
-          </a:effectRef>
-          <a:fontRef idx="minor">
-            <a:schemeClr val="lt1"/>
-          </a:fontRef>
-        </p:style>
-        <p:txBody>
-          <a:bodyPr rtlCol="0" anchor="ctr"/>
-          <a:lstStyle/>
-          <a:p>
-            <a:pPr algn="ctr"/>
-          </a:p>
-        </p:txBody>
-      </p:sp>
-      <p:sp>
-        <p:nvSpPr>
-          <p:cNvPr id="15" name="TextBox 14"/>
-          <p:cNvSpPr txBox="1"/>
-          <p:nvPr/>
-        </p:nvSpPr>
-        <p:spPr>
-          <a:xfrm>
-            <a:off x="914400" y="3063240"/>
-            <a:ext cx="10241280" cy="1005839"/>
-          </a:xfrm>
-          <a:prstGeom prst="rect">
-            <a:avLst/>
-          </a:prstGeom>
-          <a:noFill/>
-        </p:spPr>
-        <p:txBody>
-          <a:bodyPr wrap="none">
-            <a:spAutoFit/>
-          </a:bodyPr>
-          <a:lstStyle/>
-          <a:p>
-            <a:pPr>
-              <a:spcAft>
-                <a:spcPts val="200"/>
-              </a:spcAft>
-              <a:defRPr sz="1400">
-                <a:solidFill>
-                  <a:srgbClr val="ABB2BF"/>
-                </a:solidFill>
-                <a:latin typeface="Consolas"/>
-              </a:defRPr>
-            </a:pPr>
-            <a:r>
-              <a:t>price = 50</a:t>
-            </a:r>
-          </a:p>
-          <a:p>
-            <a:pPr>
-              <a:spcAft>
-                <a:spcPts val="200"/>
-              </a:spcAft>
-              <a:defRPr sz="1400">
-                <a:solidFill>
-                  <a:srgbClr val="ABB2BF"/>
-                </a:solidFill>
-                <a:latin typeface="Consolas"/>
-              </a:defRPr>
-            </a:pPr>
-            <a:r>
-              <a:t>quantity = 3</a:t>
-            </a:r>
-          </a:p>
-          <a:p>
-            <a:pPr>
-              <a:spcAft>
-                <a:spcPts val="200"/>
-              </a:spcAft>
-              <a:defRPr sz="1400">
-                <a:solidFill>
-                  <a:srgbClr val="ABB2BF"/>
-                </a:solidFill>
-                <a:latin typeface="Consolas"/>
-              </a:defRPr>
-            </a:pPr>
-            <a:r>
-              <a:t>tax_rate = 0.08</a:t>
-            </a:r>
-          </a:p>
-          <a:p>
-            <a:pPr>
-              <a:spcAft>
-                <a:spcPts val="200"/>
-              </a:spcAft>
-              <a:defRPr sz="1400">
-                <a:solidFill>
-                  <a:srgbClr val="ABB2BF"/>
-                </a:solidFill>
-                <a:latin typeface="Consolas"/>
-              </a:defRPr>
-            </a:pPr>
-            <a:r>
-              <a:t>total = (price * quantity) * (1 + tax_rate)</a:t>
-            </a:r>
-          </a:p>
-        </p:txBody>
-      </p:sp>
-      <p:sp>
-        <p:nvSpPr>
-          <p:cNvPr id="16" name="Rectangle 15"/>
-          <p:cNvSpPr/>
-          <p:nvPr/>
-        </p:nvSpPr>
-        <p:spPr>
-          <a:xfrm>
-            <a:off x="365760" y="4251960"/>
-            <a:ext cx="11430000" cy="365760"/>
-          </a:xfrm>
-          <a:prstGeom prst="rect">
-            <a:avLst/>
-          </a:prstGeom>
-          <a:solidFill>
-            <a:srgbClr val="0078D7"/>
-          </a:solidFill>
-          <a:ln>
-            <a:noFill/>
-          </a:ln>
-        </p:spPr>
-        <p:style>
-          <a:lnRef idx="1">
-            <a:schemeClr val="accent1"/>
-          </a:lnRef>
-          <a:fillRef idx="3">
-            <a:schemeClr val="accent1"/>
-          </a:fillRef>
-          <a:effectRef idx="2">
-            <a:schemeClr val="accent1"/>
-          </a:effectRef>
-          <a:fontRef idx="minor">
-            <a:schemeClr val="lt1"/>
-          </a:fontRef>
-        </p:style>
-        <p:txBody>
-          <a:bodyPr rtlCol="0" anchor="ctr"/>
-          <a:lstStyle/>
-          <a:p>
-            <a:pPr algn="ctr"/>
-          </a:p>
-        </p:txBody>
-      </p:sp>
-      <p:sp>
-        <p:nvSpPr>
-          <p:cNvPr id="17" name="TextBox 16"/>
-          <p:cNvSpPr txBox="1"/>
-          <p:nvPr/>
-        </p:nvSpPr>
-        <p:spPr>
-          <a:xfrm>
-            <a:off x="548640" y="4297680"/>
-            <a:ext cx="10972800" cy="274320"/>
-          </a:xfrm>
-          <a:prstGeom prst="rect">
-            <a:avLst/>
-          </a:prstGeom>
-          <a:noFill/>
-        </p:spPr>
-        <p:txBody>
-          <a:bodyPr wrap="none">
-            <a:spAutoFit/>
-          </a:bodyPr>
-          <a:lstStyle/>
-          <a:p>
-            <a:pPr>
-              <a:defRPr sz="2000" b="1">
-                <a:solidFill>
-                  <a:srgbClr val="FFFFFF"/>
-                </a:solidFill>
-              </a:defRPr>
-            </a:pPr>
-            <a:r>
-              <a:t>Age Calculator:</a:t>
-            </a:r>
-          </a:p>
-        </p:txBody>
-      </p:sp>
-      <p:sp>
-        <p:nvSpPr>
-          <p:cNvPr id="18" name="Rectangle 17"/>
-          <p:cNvSpPr/>
-          <p:nvPr/>
-        </p:nvSpPr>
-        <p:spPr>
-          <a:xfrm>
-            <a:off x="640080" y="4709160"/>
-            <a:ext cx="10789920" cy="868680"/>
-          </a:xfrm>
-          <a:prstGeom prst="rect">
-            <a:avLst/>
-          </a:prstGeom>
-          <a:solidFill>
-            <a:srgbClr val="282C34"/>
-          </a:solidFill>
-          <a:ln>
-            <a:noFill/>
-          </a:ln>
-        </p:spPr>
-        <p:style>
-          <a:lnRef idx="1">
-            <a:schemeClr val="accent1"/>
-          </a:lnRef>
-          <a:fillRef idx="3">
-            <a:schemeClr val="accent1"/>
-          </a:fillRef>
-          <a:effectRef idx="2">
-            <a:schemeClr val="accent1"/>
-          </a:effectRef>
-          <a:fontRef idx="minor">
-            <a:schemeClr val="lt1"/>
-          </a:fontRef>
-        </p:style>
-        <p:txBody>
-          <a:bodyPr rtlCol="0" anchor="ctr"/>
-          <a:lstStyle/>
-          <a:p>
-            <a:pPr algn="ctr"/>
-          </a:p>
-        </p:txBody>
-      </p:sp>
-      <p:sp>
-        <p:nvSpPr>
-          <p:cNvPr id="19" name="Rectangle 18"/>
-          <p:cNvSpPr/>
-          <p:nvPr/>
-        </p:nvSpPr>
-        <p:spPr>
-          <a:xfrm>
-            <a:off x="640080" y="4709160"/>
-            <a:ext cx="73152" cy="868680"/>
-          </a:xfrm>
-          <a:prstGeom prst="rect">
-            <a:avLst/>
-          </a:prstGeom>
-          <a:solidFill>
-            <a:srgbClr val="61AFEF"/>
-          </a:solidFill>
-          <a:ln>
-            <a:noFill/>
-          </a:ln>
-        </p:spPr>
-        <p:style>
-          <a:lnRef idx="1">
-            <a:schemeClr val="accent1"/>
-          </a:lnRef>
-          <a:fillRef idx="3">
-            <a:schemeClr val="accent1"/>
-          </a:fillRef>
-          <a:effectRef idx="2">
-            <a:schemeClr val="accent1"/>
-          </a:effectRef>
-          <a:fontRef idx="minor">
-            <a:schemeClr val="lt1"/>
-          </a:fontRef>
-        </p:style>
-        <p:txBody>
-          <a:bodyPr rtlCol="0" anchor="ctr"/>
-          <a:lstStyle/>
-          <a:p>
-            <a:pPr algn="ctr"/>
-          </a:p>
-        </p:txBody>
-      </p:sp>
-      <p:sp>
-        <p:nvSpPr>
-          <p:cNvPr id="20" name="TextBox 19"/>
-          <p:cNvSpPr txBox="1"/>
-          <p:nvPr/>
-        </p:nvSpPr>
-        <p:spPr>
-          <a:xfrm>
-            <a:off x="914400" y="4754880"/>
-            <a:ext cx="10241280" cy="777240"/>
-          </a:xfrm>
-          <a:prstGeom prst="rect">
-            <a:avLst/>
-          </a:prstGeom>
-          <a:noFill/>
-        </p:spPr>
-        <p:txBody>
-          <a:bodyPr wrap="none">
-            <a:spAutoFit/>
-          </a:bodyPr>
-          <a:lstStyle/>
-          <a:p>
-            <a:pPr>
-              <a:spcAft>
-                <a:spcPts val="200"/>
-              </a:spcAft>
-              <a:defRPr sz="1400">
-                <a:solidFill>
-                  <a:srgbClr val="ABB2BF"/>
-                </a:solidFill>
-                <a:latin typeface="Consolas"/>
-              </a:defRPr>
-            </a:pPr>
-            <a:r>
-              <a:t>birth_year = 2000</a:t>
-            </a:r>
-          </a:p>
-          <a:p>
-            <a:pPr>
-              <a:spcAft>
-                <a:spcPts val="200"/>
-              </a:spcAft>
-              <a:defRPr sz="1400">
-                <a:solidFill>
-                  <a:srgbClr val="ABB2BF"/>
-                </a:solidFill>
-                <a:latin typeface="Consolas"/>
-              </a:defRPr>
-            </a:pPr>
-            <a:r>
-              <a:t>current_year = 2025</a:t>
-            </a:r>
-          </a:p>
-          <a:p>
-            <a:pPr>
-              <a:spcAft>
-                <a:spcPts val="200"/>
-              </a:spcAft>
-              <a:defRPr sz="1400">
-                <a:solidFill>
-                  <a:srgbClr val="ABB2BF"/>
-                </a:solidFill>
-                <a:latin typeface="Consolas"/>
-              </a:defRPr>
-            </a:pPr>
-            <a:r>
-              <a:t>age = current_year - birth_year</a:t>
-            </a:r>
-          </a:p>
-        </p:txBody>
-      </p:sp>
-      <p:sp>
-        <p:nvSpPr>
-          <p:cNvPr id="21" name="Rectangle 20"/>
-          <p:cNvSpPr/>
-          <p:nvPr/>
-        </p:nvSpPr>
-        <p:spPr>
-          <a:xfrm>
-            <a:off x="365760" y="5715000"/>
-            <a:ext cx="11430000" cy="365760"/>
-          </a:xfrm>
-          <a:prstGeom prst="rect">
-            <a:avLst/>
-          </a:prstGeom>
-          <a:solidFill>
-            <a:srgbClr val="0078D7"/>
-          </a:solidFill>
-          <a:ln>
-            <a:noFill/>
-          </a:ln>
-        </p:spPr>
-        <p:style>
-          <a:lnRef idx="1">
-            <a:schemeClr val="accent1"/>
-          </a:lnRef>
-          <a:fillRef idx="3">
-            <a:schemeClr val="accent1"/>
-          </a:fillRef>
-          <a:effectRef idx="2">
-            <a:schemeClr val="accent1"/>
-          </a:effectRef>
-          <a:fontRef idx="minor">
-            <a:schemeClr val="lt1"/>
-          </a:fontRef>
-        </p:style>
-        <p:txBody>
-          <a:bodyPr rtlCol="0" anchor="ctr"/>
-          <a:lstStyle/>
-          <a:p>
-            <a:pPr algn="ctr"/>
-          </a:p>
-        </p:txBody>
-      </p:sp>
-      <p:sp>
-        <p:nvSpPr>
-          <p:cNvPr id="22" name="TextBox 21"/>
-          <p:cNvSpPr txBox="1"/>
-          <p:nvPr/>
-        </p:nvSpPr>
-        <p:spPr>
-          <a:xfrm>
-            <a:off x="548640" y="5760720"/>
-            <a:ext cx="10972800" cy="274320"/>
-          </a:xfrm>
-          <a:prstGeom prst="rect">
-            <a:avLst/>
-          </a:prstGeom>
-          <a:noFill/>
-        </p:spPr>
-        <p:txBody>
-          <a:bodyPr wrap="none">
-            <a:spAutoFit/>
-          </a:bodyPr>
-          <a:lstStyle/>
-          <a:p>
-            <a:pPr>
-              <a:defRPr sz="2000" b="1">
-                <a:solidFill>
-                  <a:srgbClr val="FFFFFF"/>
-                </a:solidFill>
-              </a:defRPr>
-            </a:pPr>
-            <a:r>
-              <a:t>BMI Calculator:</a:t>
+              <a:t>Bad Comment: # Add 5 to x</a:t>
             </a:r>
           </a:p>
         </p:txBody>
@@ -6796,7 +6537,7 @@
               </a:defRPr>
             </a:pPr>
             <a:r>
-              <a:t>Common Mistakes to Avoid</a:t>
+              <a:t>Real-World Applications</a:t>
             </a:r>
           </a:p>
         </p:txBody>
@@ -6874,97 +6615,27 @@
               </a:defRPr>
             </a:pPr>
             <a:r>
-              <a:t>Syntax Errors:</a:t>
-            </a:r>
-          </a:p>
-        </p:txBody>
-      </p:sp>
-      <p:sp>
-        <p:nvSpPr>
-          <p:cNvPr id="8" name="TextBox 7"/>
-          <p:cNvSpPr txBox="1"/>
-          <p:nvPr/>
-        </p:nvSpPr>
-        <p:spPr>
-          <a:xfrm>
-            <a:off x="457200" y="1828800"/>
-            <a:ext cx="11247120" cy="320040"/>
-          </a:xfrm>
-          <a:prstGeom prst="rect">
-            <a:avLst/>
-          </a:prstGeom>
-          <a:noFill/>
-        </p:spPr>
-        <p:txBody>
-          <a:bodyPr wrap="none">
-            <a:spAutoFit/>
-          </a:bodyPr>
-          <a:lstStyle/>
-          <a:p>
-            <a:pPr lvl="1">
-              <a:defRPr sz="1600">
-                <a:solidFill>
-                  <a:srgbClr val="333333"/>
-                </a:solidFill>
-              </a:defRPr>
-            </a:pPr>
-            <a:r>
-              <a:t>• Forgetting quotes: name = Alice (ERROR)</a:t>
-            </a:r>
-          </a:p>
-        </p:txBody>
-      </p:sp>
-      <p:sp>
-        <p:nvSpPr>
-          <p:cNvPr id="9" name="TextBox 8"/>
-          <p:cNvSpPr txBox="1"/>
-          <p:nvPr/>
-        </p:nvSpPr>
-        <p:spPr>
-          <a:xfrm>
-            <a:off x="457200" y="2103120"/>
-            <a:ext cx="11247120" cy="320040"/>
-          </a:xfrm>
-          <a:prstGeom prst="rect">
-            <a:avLst/>
-          </a:prstGeom>
-          <a:noFill/>
-        </p:spPr>
-        <p:txBody>
-          <a:bodyPr wrap="none">
-            <a:spAutoFit/>
-          </a:bodyPr>
-          <a:lstStyle/>
-          <a:p>
-            <a:pPr lvl="1">
-              <a:defRPr sz="1600">
-                <a:solidFill>
-                  <a:srgbClr val="333333"/>
-                </a:solidFill>
-              </a:defRPr>
-            </a:pPr>
-            <a:r>
-              <a:t>• Correct: name = "Alice"</a:t>
-            </a:r>
-          </a:p>
-        </p:txBody>
-      </p:sp>
-      <p:sp>
-        <p:nvSpPr>
-          <p:cNvPr id="10" name="Rectangle 9"/>
+              <a:t>Temperature Converter:</a:t>
+            </a:r>
+          </a:p>
+        </p:txBody>
+      </p:sp>
+      <p:sp>
+        <p:nvSpPr>
+          <p:cNvPr id="8" name="Rectangle 7"/>
           <p:cNvSpPr/>
           <p:nvPr/>
         </p:nvSpPr>
         <p:spPr>
           <a:xfrm>
-            <a:off x="365760" y="2331720"/>
-            <a:ext cx="11430000" cy="365760"/>
-          </a:xfrm>
-          <a:prstGeom prst="rect">
-            <a:avLst/>
-          </a:prstGeom>
-          <a:solidFill>
-            <a:srgbClr val="0078D7"/>
+            <a:off x="640080" y="1783080"/>
+            <a:ext cx="10789920" cy="640080"/>
+          </a:xfrm>
+          <a:prstGeom prst="rect">
+            <a:avLst/>
+          </a:prstGeom>
+          <a:solidFill>
+            <a:srgbClr val="282C34"/>
           </a:solidFill>
           <a:ln>
             <a:noFill/>
@@ -6994,125 +6665,20 @@
       </p:sp>
       <p:sp>
         <p:nvSpPr>
-          <p:cNvPr id="11" name="TextBox 10"/>
-          <p:cNvSpPr txBox="1"/>
-          <p:nvPr/>
-        </p:nvSpPr>
-        <p:spPr>
-          <a:xfrm>
-            <a:off x="548640" y="2377439"/>
-            <a:ext cx="10972800" cy="274320"/>
-          </a:xfrm>
-          <a:prstGeom prst="rect">
-            <a:avLst/>
-          </a:prstGeom>
-          <a:noFill/>
-        </p:spPr>
-        <p:txBody>
-          <a:bodyPr wrap="none">
-            <a:spAutoFit/>
-          </a:bodyPr>
-          <a:lstStyle/>
-          <a:p>
-            <a:pPr>
-              <a:defRPr sz="2000" b="1">
-                <a:solidFill>
-                  <a:srgbClr val="FFFFFF"/>
-                </a:solidFill>
-              </a:defRPr>
-            </a:pPr>
-            <a:r>
-              <a:t>Type Errors:</a:t>
-            </a:r>
-          </a:p>
-        </p:txBody>
-      </p:sp>
-      <p:sp>
-        <p:nvSpPr>
-          <p:cNvPr id="12" name="TextBox 11"/>
-          <p:cNvSpPr txBox="1"/>
-          <p:nvPr/>
-        </p:nvSpPr>
-        <p:spPr>
-          <a:xfrm>
-            <a:off x="457200" y="2834639"/>
-            <a:ext cx="11247120" cy="320040"/>
-          </a:xfrm>
-          <a:prstGeom prst="rect">
-            <a:avLst/>
-          </a:prstGeom>
-          <a:noFill/>
-        </p:spPr>
-        <p:txBody>
-          <a:bodyPr wrap="none">
-            <a:spAutoFit/>
-          </a:bodyPr>
-          <a:lstStyle/>
-          <a:p>
-            <a:pPr lvl="1">
-              <a:defRPr sz="1600">
-                <a:solidFill>
-                  <a:srgbClr val="333333"/>
-                </a:solidFill>
-              </a:defRPr>
-            </a:pPr>
-            <a:r>
-              <a:t>• Mixing types: "5" + 3 (ERROR)</a:t>
-            </a:r>
-          </a:p>
-        </p:txBody>
-      </p:sp>
-      <p:sp>
-        <p:nvSpPr>
-          <p:cNvPr id="13" name="TextBox 12"/>
-          <p:cNvSpPr txBox="1"/>
-          <p:nvPr/>
-        </p:nvSpPr>
-        <p:spPr>
-          <a:xfrm>
-            <a:off x="457200" y="3108959"/>
-            <a:ext cx="11247120" cy="320040"/>
-          </a:xfrm>
-          <a:prstGeom prst="rect">
-            <a:avLst/>
-          </a:prstGeom>
-          <a:noFill/>
-        </p:spPr>
-        <p:txBody>
-          <a:bodyPr wrap="none">
-            <a:spAutoFit/>
-          </a:bodyPr>
-          <a:lstStyle/>
-          <a:p>
-            <a:pPr lvl="1">
-              <a:defRPr sz="1600">
-                <a:solidFill>
-                  <a:srgbClr val="333333"/>
-                </a:solidFill>
-              </a:defRPr>
-            </a:pPr>
-            <a:r>
-              <a:t>• Correct: int("5") + 3 or "5" + str(3)</a:t>
-            </a:r>
-          </a:p>
-        </p:txBody>
-      </p:sp>
-      <p:sp>
-        <p:nvSpPr>
-          <p:cNvPr id="14" name="Rectangle 13"/>
+          <p:cNvPr id="9" name="Rectangle 8"/>
           <p:cNvSpPr/>
           <p:nvPr/>
         </p:nvSpPr>
         <p:spPr>
           <a:xfrm>
-            <a:off x="365760" y="3337559"/>
-            <a:ext cx="11430000" cy="365760"/>
-          </a:xfrm>
-          <a:prstGeom prst="rect">
-            <a:avLst/>
-          </a:prstGeom>
-          <a:solidFill>
-            <a:srgbClr val="0078D7"/>
+            <a:off x="640080" y="1783080"/>
+            <a:ext cx="73152" cy="640080"/>
+          </a:xfrm>
+          <a:prstGeom prst="rect">
+            <a:avLst/>
+          </a:prstGeom>
+          <a:solidFill>
+            <a:srgbClr val="61AFEF"/>
           </a:solidFill>
           <a:ln>
             <a:noFill/>
@@ -7142,14 +6708,14 @@
       </p:sp>
       <p:sp>
         <p:nvSpPr>
-          <p:cNvPr id="15" name="TextBox 14"/>
-          <p:cNvSpPr txBox="1"/>
-          <p:nvPr/>
-        </p:nvSpPr>
-        <p:spPr>
-          <a:xfrm>
-            <a:off x="548640" y="3383279"/>
-            <a:ext cx="10972800" cy="274320"/>
+          <p:cNvPr id="10" name="TextBox 9"/>
+          <p:cNvSpPr txBox="1"/>
+          <p:nvPr/>
+        </p:nvSpPr>
+        <p:spPr>
+          <a:xfrm>
+            <a:off x="914400" y="1828800"/>
+            <a:ext cx="10241280" cy="548640"/>
           </a:xfrm>
           <a:prstGeom prst="rect">
             <a:avLst/>
@@ -7163,34 +6729,54 @@
           <a:lstStyle/>
           <a:p>
             <a:pPr>
-              <a:defRPr sz="2000" b="1">
-                <a:solidFill>
-                  <a:srgbClr val="FFFFFF"/>
-                </a:solidFill>
-              </a:defRPr>
-            </a:pPr>
-            <a:r>
-              <a:t>Variable Name Errors:</a:t>
-            </a:r>
-          </a:p>
-        </p:txBody>
-      </p:sp>
-      <p:sp>
-        <p:nvSpPr>
-          <p:cNvPr id="16" name="Rectangle 15"/>
+              <a:spcAft>
+                <a:spcPts val="200"/>
+              </a:spcAft>
+              <a:defRPr sz="1400">
+                <a:solidFill>
+                  <a:srgbClr val="ABB2BF"/>
+                </a:solidFill>
+                <a:latin typeface="Consolas"/>
+              </a:defRPr>
+            </a:pPr>
+            <a:r>
+              <a:t>celsius = 25</a:t>
+            </a:r>
+          </a:p>
+          <a:p>
+            <a:pPr>
+              <a:spcAft>
+                <a:spcPts val="200"/>
+              </a:spcAft>
+              <a:defRPr sz="1400">
+                <a:solidFill>
+                  <a:srgbClr val="ABB2BF"/>
+                </a:solidFill>
+                <a:latin typeface="Consolas"/>
+              </a:defRPr>
+            </a:pPr>
+            <a:r>
+              <a:t>fahrenheit = (celsius * 9/5) + 32</a:t>
+            </a:r>
+          </a:p>
+        </p:txBody>
+      </p:sp>
+      <p:sp>
+        <p:nvSpPr>
+          <p:cNvPr id="11" name="Rectangle 10"/>
           <p:cNvSpPr/>
           <p:nvPr/>
         </p:nvSpPr>
         <p:spPr>
           <a:xfrm>
-            <a:off x="640080" y="3794759"/>
-            <a:ext cx="10789920" cy="411480"/>
-          </a:xfrm>
-          <a:prstGeom prst="rect">
-            <a:avLst/>
-          </a:prstGeom>
-          <a:solidFill>
-            <a:srgbClr val="282C34"/>
+            <a:off x="365760" y="2560320"/>
+            <a:ext cx="11430000" cy="365760"/>
+          </a:xfrm>
+          <a:prstGeom prst="rect">
+            <a:avLst/>
+          </a:prstGeom>
+          <a:solidFill>
+            <a:srgbClr val="0078D7"/>
           </a:solidFill>
           <a:ln>
             <a:noFill/>
@@ -7220,20 +6806,55 @@
       </p:sp>
       <p:sp>
         <p:nvSpPr>
-          <p:cNvPr id="17" name="Rectangle 16"/>
+          <p:cNvPr id="12" name="TextBox 11"/>
+          <p:cNvSpPr txBox="1"/>
+          <p:nvPr/>
+        </p:nvSpPr>
+        <p:spPr>
+          <a:xfrm>
+            <a:off x="548640" y="2606040"/>
+            <a:ext cx="10972800" cy="274320"/>
+          </a:xfrm>
+          <a:prstGeom prst="rect">
+            <a:avLst/>
+          </a:prstGeom>
+          <a:noFill/>
+        </p:spPr>
+        <p:txBody>
+          <a:bodyPr wrap="none">
+            <a:spAutoFit/>
+          </a:bodyPr>
+          <a:lstStyle/>
+          <a:p>
+            <a:pPr>
+              <a:defRPr sz="2000" b="1">
+                <a:solidFill>
+                  <a:srgbClr val="FFFFFF"/>
+                </a:solidFill>
+              </a:defRPr>
+            </a:pPr>
+            <a:r>
+              <a:t>Shopping Calculator:</a:t>
+            </a:r>
+          </a:p>
+        </p:txBody>
+      </p:sp>
+      <p:sp>
+        <p:nvSpPr>
+          <p:cNvPr id="13" name="Rectangle 12"/>
           <p:cNvSpPr/>
           <p:nvPr/>
         </p:nvSpPr>
         <p:spPr>
           <a:xfrm>
-            <a:off x="640080" y="3794759"/>
-            <a:ext cx="73152" cy="411480"/>
-          </a:xfrm>
-          <a:prstGeom prst="rect">
-            <a:avLst/>
-          </a:prstGeom>
-          <a:solidFill>
-            <a:srgbClr val="61AFEF"/>
+            <a:off x="640080" y="3017520"/>
+            <a:ext cx="10789920" cy="1097280"/>
+          </a:xfrm>
+          <a:prstGeom prst="rect">
+            <a:avLst/>
+          </a:prstGeom>
+          <a:solidFill>
+            <a:srgbClr val="282C34"/>
           </a:solidFill>
           <a:ln>
             <a:noFill/>
@@ -7263,14 +6884,57 @@
       </p:sp>
       <p:sp>
         <p:nvSpPr>
-          <p:cNvPr id="18" name="TextBox 17"/>
-          <p:cNvSpPr txBox="1"/>
-          <p:nvPr/>
-        </p:nvSpPr>
-        <p:spPr>
-          <a:xfrm>
-            <a:off x="914400" y="3840479"/>
-            <a:ext cx="10241280" cy="320040"/>
+          <p:cNvPr id="14" name="Rectangle 13"/>
+          <p:cNvSpPr/>
+          <p:nvPr/>
+        </p:nvSpPr>
+        <p:spPr>
+          <a:xfrm>
+            <a:off x="640080" y="3017520"/>
+            <a:ext cx="73152" cy="1097280"/>
+          </a:xfrm>
+          <a:prstGeom prst="rect">
+            <a:avLst/>
+          </a:prstGeom>
+          <a:solidFill>
+            <a:srgbClr val="61AFEF"/>
+          </a:solidFill>
+          <a:ln>
+            <a:noFill/>
+          </a:ln>
+        </p:spPr>
+        <p:style>
+          <a:lnRef idx="1">
+            <a:schemeClr val="accent1"/>
+          </a:lnRef>
+          <a:fillRef idx="3">
+            <a:schemeClr val="accent1"/>
+          </a:fillRef>
+          <a:effectRef idx="2">
+            <a:schemeClr val="accent1"/>
+          </a:effectRef>
+          <a:fontRef idx="minor">
+            <a:schemeClr val="lt1"/>
+          </a:fontRef>
+        </p:style>
+        <p:txBody>
+          <a:bodyPr rtlCol="0" anchor="ctr"/>
+          <a:lstStyle/>
+          <a:p>
+            <a:pPr algn="ctr"/>
+          </a:p>
+        </p:txBody>
+      </p:sp>
+      <p:sp>
+        <p:nvSpPr>
+          <p:cNvPr id="15" name="TextBox 14"/>
+          <p:cNvSpPr txBox="1"/>
+          <p:nvPr/>
+        </p:nvSpPr>
+        <p:spPr>
+          <a:xfrm>
+            <a:off x="914400" y="3063240"/>
+            <a:ext cx="10241280" cy="1005839"/>
           </a:xfrm>
           <a:prstGeom prst="rect">
             <a:avLst/>
@@ -7295,90 +6959,68 @@
               </a:defRPr>
             </a:pPr>
             <a:r>
-              <a:t>• Using keywords: for = 5 (ERROR)</a:t>
-            </a:r>
-          </a:p>
-        </p:txBody>
-      </p:sp>
-      <p:sp>
-        <p:nvSpPr>
-          <p:cNvPr id="19" name="TextBox 18"/>
-          <p:cNvSpPr txBox="1"/>
-          <p:nvPr/>
-        </p:nvSpPr>
-        <p:spPr>
-          <a:xfrm>
-            <a:off x="457200" y="4389120"/>
-            <a:ext cx="11247120" cy="320040"/>
-          </a:xfrm>
-          <a:prstGeom prst="rect">
-            <a:avLst/>
-          </a:prstGeom>
-          <a:noFill/>
-        </p:spPr>
-        <p:txBody>
-          <a:bodyPr wrap="none">
-            <a:spAutoFit/>
-          </a:bodyPr>
-          <a:lstStyle/>
-          <a:p>
-            <a:pPr lvl="1">
-              <a:defRPr sz="1600">
-                <a:solidFill>
-                  <a:srgbClr val="333333"/>
-                </a:solidFill>
-              </a:defRPr>
-            </a:pPr>
-            <a:r>
-              <a:t>• Starting with number: 2nd_place (ERROR)</a:t>
-            </a:r>
-          </a:p>
-        </p:txBody>
-      </p:sp>
-      <p:sp>
-        <p:nvSpPr>
-          <p:cNvPr id="20" name="TextBox 19"/>
-          <p:cNvSpPr txBox="1"/>
-          <p:nvPr/>
-        </p:nvSpPr>
-        <p:spPr>
-          <a:xfrm>
-            <a:off x="457200" y="4663440"/>
-            <a:ext cx="11247120" cy="320040"/>
-          </a:xfrm>
-          <a:prstGeom prst="rect">
-            <a:avLst/>
-          </a:prstGeom>
-          <a:noFill/>
-        </p:spPr>
-        <p:txBody>
-          <a:bodyPr wrap="none">
-            <a:spAutoFit/>
-          </a:bodyPr>
-          <a:lstStyle/>
-          <a:p>
-            <a:pPr lvl="1">
-              <a:defRPr sz="1600">
-                <a:solidFill>
-                  <a:srgbClr val="333333"/>
-                </a:solidFill>
-              </a:defRPr>
-            </a:pPr>
-            <a:r>
-              <a:t>• Correct: second_place</a:t>
-            </a:r>
-          </a:p>
-        </p:txBody>
-      </p:sp>
-      <p:sp>
-        <p:nvSpPr>
-          <p:cNvPr id="21" name="Rectangle 20"/>
+              <a:t>price = 50</a:t>
+            </a:r>
+          </a:p>
+          <a:p>
+            <a:pPr>
+              <a:spcAft>
+                <a:spcPts val="200"/>
+              </a:spcAft>
+              <a:defRPr sz="1400">
+                <a:solidFill>
+                  <a:srgbClr val="ABB2BF"/>
+                </a:solidFill>
+                <a:latin typeface="Consolas"/>
+              </a:defRPr>
+            </a:pPr>
+            <a:r>
+              <a:t>quantity = 3</a:t>
+            </a:r>
+          </a:p>
+          <a:p>
+            <a:pPr>
+              <a:spcAft>
+                <a:spcPts val="200"/>
+              </a:spcAft>
+              <a:defRPr sz="1400">
+                <a:solidFill>
+                  <a:srgbClr val="ABB2BF"/>
+                </a:solidFill>
+                <a:latin typeface="Consolas"/>
+              </a:defRPr>
+            </a:pPr>
+            <a:r>
+              <a:t>tax_rate = 0.08</a:t>
+            </a:r>
+          </a:p>
+          <a:p>
+            <a:pPr>
+              <a:spcAft>
+                <a:spcPts val="200"/>
+              </a:spcAft>
+              <a:defRPr sz="1400">
+                <a:solidFill>
+                  <a:srgbClr val="ABB2BF"/>
+                </a:solidFill>
+                <a:latin typeface="Consolas"/>
+              </a:defRPr>
+            </a:pPr>
+            <a:r>
+              <a:t>total = (price * quantity) * (1 + tax_rate)</a:t>
+            </a:r>
+          </a:p>
+        </p:txBody>
+      </p:sp>
+      <p:sp>
+        <p:nvSpPr>
+          <p:cNvPr id="16" name="Rectangle 15"/>
           <p:cNvSpPr/>
           <p:nvPr/>
         </p:nvSpPr>
         <p:spPr>
           <a:xfrm>
-            <a:off x="365760" y="4892040"/>
+            <a:off x="365760" y="4251960"/>
             <a:ext cx="11430000" cy="365760"/>
           </a:xfrm>
           <a:prstGeom prst="rect">
@@ -7415,13 +7057,13 @@
       </p:sp>
       <p:sp>
         <p:nvSpPr>
-          <p:cNvPr id="22" name="TextBox 21"/>
-          <p:cNvSpPr txBox="1"/>
-          <p:nvPr/>
-        </p:nvSpPr>
-        <p:spPr>
-          <a:xfrm>
-            <a:off x="548640" y="4937759"/>
+          <p:cNvPr id="17" name="TextBox 16"/>
+          <p:cNvSpPr txBox="1"/>
+          <p:nvPr/>
+        </p:nvSpPr>
+        <p:spPr>
+          <a:xfrm>
+            <a:off x="548640" y="4297680"/>
             <a:ext cx="10972800" cy="274320"/>
           </a:xfrm>
           <a:prstGeom prst="rect">
@@ -7443,62 +7085,27 @@
               </a:defRPr>
             </a:pPr>
             <a:r>
-              <a:t>Case Sensitivity:</a:t>
-            </a:r>
-          </a:p>
-        </p:txBody>
-      </p:sp>
-      <p:sp>
-        <p:nvSpPr>
-          <p:cNvPr id="23" name="TextBox 22"/>
-          <p:cNvSpPr txBox="1"/>
-          <p:nvPr/>
-        </p:nvSpPr>
-        <p:spPr>
-          <a:xfrm>
-            <a:off x="457200" y="5394959"/>
-            <a:ext cx="11247120" cy="320040"/>
-          </a:xfrm>
-          <a:prstGeom prst="rect">
-            <a:avLst/>
-          </a:prstGeom>
-          <a:noFill/>
-        </p:spPr>
-        <p:txBody>
-          <a:bodyPr wrap="none">
-            <a:spAutoFit/>
-          </a:bodyPr>
-          <a:lstStyle/>
-          <a:p>
-            <a:pPr lvl="1">
-              <a:defRPr sz="1600">
-                <a:solidFill>
-                  <a:srgbClr val="333333"/>
-                </a:solidFill>
-              </a:defRPr>
-            </a:pPr>
-            <a:r>
-              <a:t>• Name ≠ name ≠ NAME</a:t>
-            </a:r>
-          </a:p>
-        </p:txBody>
-      </p:sp>
-      <p:sp>
-        <p:nvSpPr>
-          <p:cNvPr id="24" name="Rectangle 23"/>
+              <a:t>Age Calculator:</a:t>
+            </a:r>
+          </a:p>
+        </p:txBody>
+      </p:sp>
+      <p:sp>
+        <p:nvSpPr>
+          <p:cNvPr id="18" name="Rectangle 17"/>
           <p:cNvSpPr/>
           <p:nvPr/>
         </p:nvSpPr>
         <p:spPr>
           <a:xfrm>
-            <a:off x="365760" y="5623559"/>
-            <a:ext cx="11430000" cy="365760"/>
-          </a:xfrm>
-          <a:prstGeom prst="rect">
-            <a:avLst/>
-          </a:prstGeom>
-          <a:solidFill>
-            <a:srgbClr val="0078D7"/>
+            <a:off x="640080" y="4709160"/>
+            <a:ext cx="10789920" cy="868680"/>
+          </a:xfrm>
+          <a:prstGeom prst="rect">
+            <a:avLst/>
+          </a:prstGeom>
+          <a:solidFill>
+            <a:srgbClr val="282C34"/>
           </a:solidFill>
           <a:ln>
             <a:noFill/>
@@ -7528,14 +7135,57 @@
       </p:sp>
       <p:sp>
         <p:nvSpPr>
-          <p:cNvPr id="25" name="TextBox 24"/>
-          <p:cNvSpPr txBox="1"/>
-          <p:nvPr/>
-        </p:nvSpPr>
-        <p:spPr>
-          <a:xfrm>
-            <a:off x="548640" y="5669279"/>
-            <a:ext cx="10972800" cy="274320"/>
+          <p:cNvPr id="19" name="Rectangle 18"/>
+          <p:cNvSpPr/>
+          <p:nvPr/>
+        </p:nvSpPr>
+        <p:spPr>
+          <a:xfrm>
+            <a:off x="640080" y="4709160"/>
+            <a:ext cx="73152" cy="868680"/>
+          </a:xfrm>
+          <a:prstGeom prst="rect">
+            <a:avLst/>
+          </a:prstGeom>
+          <a:solidFill>
+            <a:srgbClr val="61AFEF"/>
+          </a:solidFill>
+          <a:ln>
+            <a:noFill/>
+          </a:ln>
+        </p:spPr>
+        <p:style>
+          <a:lnRef idx="1">
+            <a:schemeClr val="accent1"/>
+          </a:lnRef>
+          <a:fillRef idx="3">
+            <a:schemeClr val="accent1"/>
+          </a:fillRef>
+          <a:effectRef idx="2">
+            <a:schemeClr val="accent1"/>
+          </a:effectRef>
+          <a:fontRef idx="minor">
+            <a:schemeClr val="lt1"/>
+          </a:fontRef>
+        </p:style>
+        <p:txBody>
+          <a:bodyPr rtlCol="0" anchor="ctr"/>
+          <a:lstStyle/>
+          <a:p>
+            <a:pPr algn="ctr"/>
+          </a:p>
+        </p:txBody>
+      </p:sp>
+      <p:sp>
+        <p:nvSpPr>
+          <p:cNvPr id="20" name="TextBox 19"/>
+          <p:cNvSpPr txBox="1"/>
+          <p:nvPr/>
+        </p:nvSpPr>
+        <p:spPr>
+          <a:xfrm>
+            <a:off x="914400" y="4754880"/>
+            <a:ext cx="10241280" cy="777240"/>
           </a:xfrm>
           <a:prstGeom prst="rect">
             <a:avLst/>
@@ -7549,49 +7199,50 @@
           <a:lstStyle/>
           <a:p>
             <a:pPr>
-              <a:defRPr sz="2000" b="1">
-                <a:solidFill>
-                  <a:srgbClr val="FFFFFF"/>
-                </a:solidFill>
-              </a:defRPr>
-            </a:pPr>
-            <a:r>
-              <a:t>Undefined Variables:</a:t>
-            </a:r>
-          </a:p>
-        </p:txBody>
-      </p:sp>
-      <p:sp>
-        <p:nvSpPr>
-          <p:cNvPr id="26" name="TextBox 25"/>
-          <p:cNvSpPr txBox="1"/>
-          <p:nvPr/>
-        </p:nvSpPr>
-        <p:spPr>
-          <a:xfrm>
-            <a:off x="457200" y="6126479"/>
-            <a:ext cx="11247120" cy="320040"/>
-          </a:xfrm>
-          <a:prstGeom prst="rect">
-            <a:avLst/>
-          </a:prstGeom>
-          <a:noFill/>
-        </p:spPr>
-        <p:txBody>
-          <a:bodyPr wrap="none">
-            <a:spAutoFit/>
-          </a:bodyPr>
-          <a:lstStyle/>
-          <a:p>
-            <a:pPr lvl="1">
-              <a:defRPr sz="1600">
-                <a:solidFill>
-                  <a:srgbClr val="333333"/>
-                </a:solidFill>
-              </a:defRPr>
-            </a:pPr>
-            <a:r>
-              <a:t>• print(total) before defining total</a:t>
+              <a:spcAft>
+                <a:spcPts val="200"/>
+              </a:spcAft>
+              <a:defRPr sz="1400">
+                <a:solidFill>
+                  <a:srgbClr val="ABB2BF"/>
+                </a:solidFill>
+                <a:latin typeface="Consolas"/>
+              </a:defRPr>
+            </a:pPr>
+            <a:r>
+              <a:t>birth_year = 2000</a:t>
+            </a:r>
+          </a:p>
+          <a:p>
+            <a:pPr>
+              <a:spcAft>
+                <a:spcPts val="200"/>
+              </a:spcAft>
+              <a:defRPr sz="1400">
+                <a:solidFill>
+                  <a:srgbClr val="ABB2BF"/>
+                </a:solidFill>
+                <a:latin typeface="Consolas"/>
+              </a:defRPr>
+            </a:pPr>
+            <a:r>
+              <a:t>current_year = 2025</a:t>
+            </a:r>
+          </a:p>
+          <a:p>
+            <a:pPr>
+              <a:spcAft>
+                <a:spcPts val="200"/>
+              </a:spcAft>
+              <a:defRPr sz="1400">
+                <a:solidFill>
+                  <a:srgbClr val="ABB2BF"/>
+                </a:solidFill>
+                <a:latin typeface="Consolas"/>
+              </a:defRPr>
+            </a:pPr>
+            <a:r>
+              <a:t>age = current_year - birth_year</a:t>
             </a:r>
           </a:p>
         </p:txBody>
@@ -7773,7 +7424,7 @@
               </a:defRPr>
             </a:pPr>
             <a:r>
-              <a:t>Key Concepts Review</a:t>
+              <a:t>Real-World Applications (continued)</a:t>
             </a:r>
           </a:p>
         </p:txBody>
@@ -7786,14 +7437,14 @@
         </p:nvSpPr>
         <p:spPr>
           <a:xfrm>
-            <a:off x="640080" y="1325880"/>
-            <a:ext cx="10789920" cy="411480"/>
-          </a:xfrm>
-          <a:prstGeom prst="rect">
-            <a:avLst/>
-          </a:prstGeom>
-          <a:solidFill>
-            <a:srgbClr val="282C34"/>
+            <a:off x="365760" y="1325880"/>
+            <a:ext cx="11430000" cy="365760"/>
+          </a:xfrm>
+          <a:prstGeom prst="rect">
+            <a:avLst/>
+          </a:prstGeom>
+          <a:solidFill>
+            <a:srgbClr val="0078D7"/>
           </a:solidFill>
           <a:ln>
             <a:noFill/>
@@ -7823,20 +7474,55 @@
       </p:sp>
       <p:sp>
         <p:nvSpPr>
-          <p:cNvPr id="7" name="Rectangle 6"/>
+          <p:cNvPr id="7" name="TextBox 6"/>
+          <p:cNvSpPr txBox="1"/>
+          <p:nvPr/>
+        </p:nvSpPr>
+        <p:spPr>
+          <a:xfrm>
+            <a:off x="548640" y="1371600"/>
+            <a:ext cx="10972800" cy="274320"/>
+          </a:xfrm>
+          <a:prstGeom prst="rect">
+            <a:avLst/>
+          </a:prstGeom>
+          <a:noFill/>
+        </p:spPr>
+        <p:txBody>
+          <a:bodyPr wrap="none">
+            <a:spAutoFit/>
+          </a:bodyPr>
+          <a:lstStyle/>
+          <a:p>
+            <a:pPr>
+              <a:defRPr sz="2000" b="1">
+                <a:solidFill>
+                  <a:srgbClr val="FFFFFF"/>
+                </a:solidFill>
+              </a:defRPr>
+            </a:pPr>
+            <a:r>
+              <a:t>BMI Calculator:</a:t>
+            </a:r>
+          </a:p>
+        </p:txBody>
+      </p:sp>
+      <p:sp>
+        <p:nvSpPr>
+          <p:cNvPr id="8" name="Rectangle 7"/>
           <p:cNvSpPr/>
           <p:nvPr/>
         </p:nvSpPr>
         <p:spPr>
           <a:xfrm>
-            <a:off x="640080" y="1325880"/>
-            <a:ext cx="73152" cy="411480"/>
-          </a:xfrm>
-          <a:prstGeom prst="rect">
-            <a:avLst/>
-          </a:prstGeom>
-          <a:solidFill>
-            <a:srgbClr val="61AFEF"/>
+            <a:off x="640080" y="1783080"/>
+            <a:ext cx="10789920" cy="868680"/>
+          </a:xfrm>
+          <a:prstGeom prst="rect">
+            <a:avLst/>
+          </a:prstGeom>
+          <a:solidFill>
+            <a:srgbClr val="282C34"/>
           </a:solidFill>
           <a:ln>
             <a:noFill/>
@@ -7866,14 +7552,57 @@
       </p:sp>
       <p:sp>
         <p:nvSpPr>
-          <p:cNvPr id="8" name="TextBox 7"/>
-          <p:cNvSpPr txBox="1"/>
-          <p:nvPr/>
-        </p:nvSpPr>
-        <p:spPr>
-          <a:xfrm>
-            <a:off x="914400" y="1371600"/>
-            <a:ext cx="10241280" cy="320040"/>
+          <p:cNvPr id="9" name="Rectangle 8"/>
+          <p:cNvSpPr/>
+          <p:nvPr/>
+        </p:nvSpPr>
+        <p:spPr>
+          <a:xfrm>
+            <a:off x="640080" y="1783080"/>
+            <a:ext cx="73152" cy="868680"/>
+          </a:xfrm>
+          <a:prstGeom prst="rect">
+            <a:avLst/>
+          </a:prstGeom>
+          <a:solidFill>
+            <a:srgbClr val="61AFEF"/>
+          </a:solidFill>
+          <a:ln>
+            <a:noFill/>
+          </a:ln>
+        </p:spPr>
+        <p:style>
+          <a:lnRef idx="1">
+            <a:schemeClr val="accent1"/>
+          </a:lnRef>
+          <a:fillRef idx="3">
+            <a:schemeClr val="accent1"/>
+          </a:fillRef>
+          <a:effectRef idx="2">
+            <a:schemeClr val="accent1"/>
+          </a:effectRef>
+          <a:fontRef idx="minor">
+            <a:schemeClr val="lt1"/>
+          </a:fontRef>
+        </p:style>
+        <p:txBody>
+          <a:bodyPr rtlCol="0" anchor="ctr"/>
+          <a:lstStyle/>
+          <a:p>
+            <a:pPr algn="ctr"/>
+          </a:p>
+        </p:txBody>
+      </p:sp>
+      <p:sp>
+        <p:nvSpPr>
+          <p:cNvPr id="10" name="TextBox 9"/>
+          <p:cNvSpPr txBox="1"/>
+          <p:nvPr/>
+        </p:nvSpPr>
+        <p:spPr>
+          <a:xfrm>
+            <a:off x="914400" y="1828800"/>
+            <a:ext cx="10241280" cy="777240"/>
           </a:xfrm>
           <a:prstGeom prst="rect">
             <a:avLst/>
@@ -7898,669 +7627,39 @@
               </a:defRPr>
             </a:pPr>
             <a:r>
-              <a:t>Variables: Named storage for data</a:t>
-            </a:r>
-          </a:p>
-        </p:txBody>
-      </p:sp>
-      <p:sp>
-        <p:nvSpPr>
-          <p:cNvPr id="9" name="TextBox 8"/>
-          <p:cNvSpPr txBox="1"/>
-          <p:nvPr/>
-        </p:nvSpPr>
-        <p:spPr>
-          <a:xfrm>
-            <a:off x="457200" y="1920240"/>
-            <a:ext cx="11247120" cy="320040"/>
-          </a:xfrm>
-          <a:prstGeom prst="rect">
-            <a:avLst/>
-          </a:prstGeom>
-          <a:noFill/>
-        </p:spPr>
-        <p:txBody>
-          <a:bodyPr wrap="none">
-            <a:spAutoFit/>
-          </a:bodyPr>
-          <a:lstStyle/>
-          <a:p>
-            <a:pPr lvl="1">
-              <a:defRPr sz="1600">
-                <a:solidFill>
-                  <a:srgbClr val="333333"/>
-                </a:solidFill>
-              </a:defRPr>
-            </a:pPr>
-            <a:r>
-              <a:t>• Assignment: variable_name = value</a:t>
-            </a:r>
-          </a:p>
-        </p:txBody>
-      </p:sp>
-      <p:sp>
-        <p:nvSpPr>
-          <p:cNvPr id="10" name="TextBox 9"/>
-          <p:cNvSpPr txBox="1"/>
-          <p:nvPr/>
-        </p:nvSpPr>
-        <p:spPr>
-          <a:xfrm>
-            <a:off x="457200" y="2194560"/>
-            <a:ext cx="11247120" cy="320040"/>
-          </a:xfrm>
-          <a:prstGeom prst="rect">
-            <a:avLst/>
-          </a:prstGeom>
-          <a:noFill/>
-        </p:spPr>
-        <p:txBody>
-          <a:bodyPr wrap="none">
-            <a:spAutoFit/>
-          </a:bodyPr>
-          <a:lstStyle/>
-          <a:p>
-            <a:pPr lvl="1">
-              <a:defRPr sz="1600">
-                <a:solidFill>
-                  <a:srgbClr val="333333"/>
-                </a:solidFill>
-              </a:defRPr>
-            </a:pPr>
-            <a:r>
-              <a:t>• Can be updated: x = x + 1</a:t>
-            </a:r>
-          </a:p>
-        </p:txBody>
-      </p:sp>
-      <p:sp>
-        <p:nvSpPr>
-          <p:cNvPr id="11" name="Rectangle 10"/>
-          <p:cNvSpPr/>
-          <p:nvPr/>
-        </p:nvSpPr>
-        <p:spPr>
-          <a:xfrm>
-            <a:off x="365760" y="2423160"/>
-            <a:ext cx="11430000" cy="365760"/>
-          </a:xfrm>
-          <a:prstGeom prst="rect">
-            <a:avLst/>
-          </a:prstGeom>
-          <a:solidFill>
-            <a:srgbClr val="0078D7"/>
-          </a:solidFill>
-          <a:ln>
-            <a:noFill/>
-          </a:ln>
-        </p:spPr>
-        <p:style>
-          <a:lnRef idx="1">
-            <a:schemeClr val="accent1"/>
-          </a:lnRef>
-          <a:fillRef idx="3">
-            <a:schemeClr val="accent1"/>
-          </a:fillRef>
-          <a:effectRef idx="2">
-            <a:schemeClr val="accent1"/>
-          </a:effectRef>
-          <a:fontRef idx="minor">
-            <a:schemeClr val="lt1"/>
-          </a:fontRef>
-        </p:style>
-        <p:txBody>
-          <a:bodyPr rtlCol="0" anchor="ctr"/>
-          <a:lstStyle/>
-          <a:p>
-            <a:pPr algn="ctr"/>
-          </a:p>
-        </p:txBody>
-      </p:sp>
-      <p:sp>
-        <p:nvSpPr>
-          <p:cNvPr id="12" name="TextBox 11"/>
-          <p:cNvSpPr txBox="1"/>
-          <p:nvPr/>
-        </p:nvSpPr>
-        <p:spPr>
-          <a:xfrm>
-            <a:off x="548640" y="2468879"/>
-            <a:ext cx="10972800" cy="274320"/>
-          </a:xfrm>
-          <a:prstGeom prst="rect">
-            <a:avLst/>
-          </a:prstGeom>
-          <a:noFill/>
-        </p:spPr>
-        <p:txBody>
-          <a:bodyPr wrap="none">
-            <a:spAutoFit/>
-          </a:bodyPr>
-          <a:lstStyle/>
+              <a:t>weight = 70  # kg</a:t>
+            </a:r>
+          </a:p>
           <a:p>
             <a:pPr>
-              <a:defRPr sz="2000" b="1">
-                <a:solidFill>
-                  <a:srgbClr val="FFFFFF"/>
-                </a:solidFill>
-              </a:defRPr>
-            </a:pPr>
-            <a:r>
-              <a:t>Data Types:</a:t>
-            </a:r>
-          </a:p>
-        </p:txBody>
-      </p:sp>
-      <p:sp>
-        <p:nvSpPr>
-          <p:cNvPr id="13" name="TextBox 12"/>
-          <p:cNvSpPr txBox="1"/>
-          <p:nvPr/>
-        </p:nvSpPr>
-        <p:spPr>
-          <a:xfrm>
-            <a:off x="457200" y="2926079"/>
-            <a:ext cx="11247120" cy="320040"/>
-          </a:xfrm>
-          <a:prstGeom prst="rect">
-            <a:avLst/>
-          </a:prstGeom>
-          <a:noFill/>
-        </p:spPr>
-        <p:txBody>
-          <a:bodyPr wrap="none">
-            <a:spAutoFit/>
-          </a:bodyPr>
-          <a:lstStyle/>
-          <a:p>
-            <a:pPr lvl="1">
-              <a:defRPr sz="1600">
-                <a:solidFill>
-                  <a:srgbClr val="333333"/>
-                </a:solidFill>
-              </a:defRPr>
-            </a:pPr>
-            <a:r>
-              <a:t>• int: Whole numbers (42, -10)</a:t>
-            </a:r>
-          </a:p>
-        </p:txBody>
-      </p:sp>
-      <p:sp>
-        <p:nvSpPr>
-          <p:cNvPr id="14" name="TextBox 13"/>
-          <p:cNvSpPr txBox="1"/>
-          <p:nvPr/>
-        </p:nvSpPr>
-        <p:spPr>
-          <a:xfrm>
-            <a:off x="457200" y="3200399"/>
-            <a:ext cx="11247120" cy="320040"/>
-          </a:xfrm>
-          <a:prstGeom prst="rect">
-            <a:avLst/>
-          </a:prstGeom>
-          <a:noFill/>
-        </p:spPr>
-        <p:txBody>
-          <a:bodyPr wrap="none">
-            <a:spAutoFit/>
-          </a:bodyPr>
-          <a:lstStyle/>
-          <a:p>
-            <a:pPr lvl="1">
-              <a:defRPr sz="1600">
-                <a:solidFill>
-                  <a:srgbClr val="333333"/>
-                </a:solidFill>
-              </a:defRPr>
-            </a:pPr>
-            <a:r>
-              <a:t>• float: Decimals (3.14, -0.5)</a:t>
-            </a:r>
-          </a:p>
-        </p:txBody>
-      </p:sp>
-      <p:sp>
-        <p:nvSpPr>
-          <p:cNvPr id="15" name="TextBox 14"/>
-          <p:cNvSpPr txBox="1"/>
-          <p:nvPr/>
-        </p:nvSpPr>
-        <p:spPr>
-          <a:xfrm>
-            <a:off x="457200" y="3474719"/>
-            <a:ext cx="11247120" cy="320040"/>
-          </a:xfrm>
-          <a:prstGeom prst="rect">
-            <a:avLst/>
-          </a:prstGeom>
-          <a:noFill/>
-        </p:spPr>
-        <p:txBody>
-          <a:bodyPr wrap="none">
-            <a:spAutoFit/>
-          </a:bodyPr>
-          <a:lstStyle/>
-          <a:p>
-            <a:pPr lvl="1">
-              <a:defRPr sz="1600">
-                <a:solidFill>
-                  <a:srgbClr val="333333"/>
-                </a:solidFill>
-              </a:defRPr>
-            </a:pPr>
-            <a:r>
-              <a:t>• str: Text ("Hello", 'Python')</a:t>
-            </a:r>
-          </a:p>
-        </p:txBody>
-      </p:sp>
-      <p:sp>
-        <p:nvSpPr>
-          <p:cNvPr id="16" name="Rectangle 15"/>
-          <p:cNvSpPr/>
-          <p:nvPr/>
-        </p:nvSpPr>
-        <p:spPr>
-          <a:xfrm>
-            <a:off x="365760" y="3703320"/>
-            <a:ext cx="11430000" cy="365760"/>
-          </a:xfrm>
-          <a:prstGeom prst="rect">
-            <a:avLst/>
-          </a:prstGeom>
-          <a:solidFill>
-            <a:srgbClr val="0078D7"/>
-          </a:solidFill>
-          <a:ln>
-            <a:noFill/>
-          </a:ln>
-        </p:spPr>
-        <p:style>
-          <a:lnRef idx="1">
-            <a:schemeClr val="accent1"/>
-          </a:lnRef>
-          <a:fillRef idx="3">
-            <a:schemeClr val="accent1"/>
-          </a:fillRef>
-          <a:effectRef idx="2">
-            <a:schemeClr val="accent1"/>
-          </a:effectRef>
-          <a:fontRef idx="minor">
-            <a:schemeClr val="lt1"/>
-          </a:fontRef>
-        </p:style>
-        <p:txBody>
-          <a:bodyPr rtlCol="0" anchor="ctr"/>
-          <a:lstStyle/>
-          <a:p>
-            <a:pPr algn="ctr"/>
-          </a:p>
-        </p:txBody>
-      </p:sp>
-      <p:sp>
-        <p:nvSpPr>
-          <p:cNvPr id="17" name="TextBox 16"/>
-          <p:cNvSpPr txBox="1"/>
-          <p:nvPr/>
-        </p:nvSpPr>
-        <p:spPr>
-          <a:xfrm>
-            <a:off x="548640" y="3749039"/>
-            <a:ext cx="10972800" cy="274320"/>
-          </a:xfrm>
-          <a:prstGeom prst="rect">
-            <a:avLst/>
-          </a:prstGeom>
-          <a:noFill/>
-        </p:spPr>
-        <p:txBody>
-          <a:bodyPr wrap="none">
-            <a:spAutoFit/>
-          </a:bodyPr>
-          <a:lstStyle/>
+              <a:spcAft>
+                <a:spcPts val="200"/>
+              </a:spcAft>
+              <a:defRPr sz="1400">
+                <a:solidFill>
+                  <a:srgbClr val="ABB2BF"/>
+                </a:solidFill>
+                <a:latin typeface="Consolas"/>
+              </a:defRPr>
+            </a:pPr>
+            <a:r>
+              <a:t>height = 1.75  # meters</a:t>
+            </a:r>
+          </a:p>
           <a:p>
             <a:pPr>
-              <a:defRPr sz="2000" b="1">
-                <a:solidFill>
-                  <a:srgbClr val="FFFFFF"/>
-                </a:solidFill>
-              </a:defRPr>
-            </a:pPr>
-            <a:r>
-              <a:t>Operations:</a:t>
-            </a:r>
-          </a:p>
-        </p:txBody>
-      </p:sp>
-      <p:sp>
-        <p:nvSpPr>
-          <p:cNvPr id="18" name="TextBox 17"/>
-          <p:cNvSpPr txBox="1"/>
-          <p:nvPr/>
-        </p:nvSpPr>
-        <p:spPr>
-          <a:xfrm>
-            <a:off x="457200" y="4206240"/>
-            <a:ext cx="11247120" cy="320040"/>
-          </a:xfrm>
-          <a:prstGeom prst="rect">
-            <a:avLst/>
-          </a:prstGeom>
-          <a:noFill/>
-        </p:spPr>
-        <p:txBody>
-          <a:bodyPr wrap="none">
-            <a:spAutoFit/>
-          </a:bodyPr>
-          <a:lstStyle/>
-          <a:p>
-            <a:pPr lvl="1">
-              <a:defRPr sz="1600">
-                <a:solidFill>
-                  <a:srgbClr val="333333"/>
-                </a:solidFill>
-              </a:defRPr>
-            </a:pPr>
-            <a:r>
-              <a:t>• Arithmetic: +, -, *, /, //, %, **</a:t>
-            </a:r>
-          </a:p>
-        </p:txBody>
-      </p:sp>
-      <p:sp>
-        <p:nvSpPr>
-          <p:cNvPr id="19" name="TextBox 18"/>
-          <p:cNvSpPr txBox="1"/>
-          <p:nvPr/>
-        </p:nvSpPr>
-        <p:spPr>
-          <a:xfrm>
-            <a:off x="457200" y="4480559"/>
-            <a:ext cx="11247120" cy="320040"/>
-          </a:xfrm>
-          <a:prstGeom prst="rect">
-            <a:avLst/>
-          </a:prstGeom>
-          <a:noFill/>
-        </p:spPr>
-        <p:txBody>
-          <a:bodyPr wrap="none">
-            <a:spAutoFit/>
-          </a:bodyPr>
-          <a:lstStyle/>
-          <a:p>
-            <a:pPr lvl="1">
-              <a:defRPr sz="1600">
-                <a:solidFill>
-                  <a:srgbClr val="333333"/>
-                </a:solidFill>
-              </a:defRPr>
-            </a:pPr>
-            <a:r>
-              <a:t>• Assignment: =, +=, -=, *=, /=</a:t>
-            </a:r>
-          </a:p>
-        </p:txBody>
-      </p:sp>
-      <p:sp>
-        <p:nvSpPr>
-          <p:cNvPr id="20" name="Rectangle 19"/>
-          <p:cNvSpPr/>
-          <p:nvPr/>
-        </p:nvSpPr>
-        <p:spPr>
-          <a:xfrm>
-            <a:off x="365760" y="4709159"/>
-            <a:ext cx="11430000" cy="365760"/>
-          </a:xfrm>
-          <a:prstGeom prst="rect">
-            <a:avLst/>
-          </a:prstGeom>
-          <a:solidFill>
-            <a:srgbClr val="0078D7"/>
-          </a:solidFill>
-          <a:ln>
-            <a:noFill/>
-          </a:ln>
-        </p:spPr>
-        <p:style>
-          <a:lnRef idx="1">
-            <a:schemeClr val="accent1"/>
-          </a:lnRef>
-          <a:fillRef idx="3">
-            <a:schemeClr val="accent1"/>
-          </a:fillRef>
-          <a:effectRef idx="2">
-            <a:schemeClr val="accent1"/>
-          </a:effectRef>
-          <a:fontRef idx="minor">
-            <a:schemeClr val="lt1"/>
-          </a:fontRef>
-        </p:style>
-        <p:txBody>
-          <a:bodyPr rtlCol="0" anchor="ctr"/>
-          <a:lstStyle/>
-          <a:p>
-            <a:pPr algn="ctr"/>
-          </a:p>
-        </p:txBody>
-      </p:sp>
-      <p:sp>
-        <p:nvSpPr>
-          <p:cNvPr id="21" name="TextBox 20"/>
-          <p:cNvSpPr txBox="1"/>
-          <p:nvPr/>
-        </p:nvSpPr>
-        <p:spPr>
-          <a:xfrm>
-            <a:off x="548640" y="4754879"/>
-            <a:ext cx="10972800" cy="274320"/>
-          </a:xfrm>
-          <a:prstGeom prst="rect">
-            <a:avLst/>
-          </a:prstGeom>
-          <a:noFill/>
-        </p:spPr>
-        <p:txBody>
-          <a:bodyPr wrap="none">
-            <a:spAutoFit/>
-          </a:bodyPr>
-          <a:lstStyle/>
-          <a:p>
-            <a:pPr>
-              <a:defRPr sz="2000" b="1">
-                <a:solidFill>
-                  <a:srgbClr val="FFFFFF"/>
-                </a:solidFill>
-              </a:defRPr>
-            </a:pPr>
-            <a:r>
-              <a:t>Functions:</a:t>
-            </a:r>
-          </a:p>
-        </p:txBody>
-      </p:sp>
-      <p:sp>
-        <p:nvSpPr>
-          <p:cNvPr id="22" name="TextBox 21"/>
-          <p:cNvSpPr txBox="1"/>
-          <p:nvPr/>
-        </p:nvSpPr>
-        <p:spPr>
-          <a:xfrm>
-            <a:off x="457200" y="5212079"/>
-            <a:ext cx="11247120" cy="320040"/>
-          </a:xfrm>
-          <a:prstGeom prst="rect">
-            <a:avLst/>
-          </a:prstGeom>
-          <a:noFill/>
-        </p:spPr>
-        <p:txBody>
-          <a:bodyPr wrap="none">
-            <a:spAutoFit/>
-          </a:bodyPr>
-          <a:lstStyle/>
-          <a:p>
-            <a:pPr lvl="1">
-              <a:defRPr sz="1600">
-                <a:solidFill>
-                  <a:srgbClr val="333333"/>
-                </a:solidFill>
-              </a:defRPr>
-            </a:pPr>
-            <a:r>
-              <a:t>• print(): Display output</a:t>
-            </a:r>
-          </a:p>
-        </p:txBody>
-      </p:sp>
-      <p:sp>
-        <p:nvSpPr>
-          <p:cNvPr id="23" name="TextBox 22"/>
-          <p:cNvSpPr txBox="1"/>
-          <p:nvPr/>
-        </p:nvSpPr>
-        <p:spPr>
-          <a:xfrm>
-            <a:off x="457200" y="5486399"/>
-            <a:ext cx="11247120" cy="320040"/>
-          </a:xfrm>
-          <a:prstGeom prst="rect">
-            <a:avLst/>
-          </a:prstGeom>
-          <a:noFill/>
-        </p:spPr>
-        <p:txBody>
-          <a:bodyPr wrap="none">
-            <a:spAutoFit/>
-          </a:bodyPr>
-          <a:lstStyle/>
-          <a:p>
-            <a:pPr lvl="1">
-              <a:defRPr sz="1600">
-                <a:solidFill>
-                  <a:srgbClr val="333333"/>
-                </a:solidFill>
-              </a:defRPr>
-            </a:pPr>
-            <a:r>
-              <a:t>• type(): Check data type</a:t>
-            </a:r>
-          </a:p>
-        </p:txBody>
-      </p:sp>
-      <p:sp>
-        <p:nvSpPr>
-          <p:cNvPr id="24" name="TextBox 23"/>
-          <p:cNvSpPr txBox="1"/>
-          <p:nvPr/>
-        </p:nvSpPr>
-        <p:spPr>
-          <a:xfrm>
-            <a:off x="457200" y="5760719"/>
-            <a:ext cx="11247120" cy="320040"/>
-          </a:xfrm>
-          <a:prstGeom prst="rect">
-            <a:avLst/>
-          </a:prstGeom>
-          <a:noFill/>
-        </p:spPr>
-        <p:txBody>
-          <a:bodyPr wrap="none">
-            <a:spAutoFit/>
-          </a:bodyPr>
-          <a:lstStyle/>
-          <a:p>
-            <a:pPr lvl="1">
-              <a:defRPr sz="1600">
-                <a:solidFill>
-                  <a:srgbClr val="333333"/>
-                </a:solidFill>
-              </a:defRPr>
-            </a:pPr>
-            <a:r>
-              <a:t>• int(), float(), str(): Convert types</a:t>
-            </a:r>
-          </a:p>
-        </p:txBody>
-      </p:sp>
-      <p:sp>
-        <p:nvSpPr>
-          <p:cNvPr id="25" name="Rectangle 24"/>
-          <p:cNvSpPr/>
-          <p:nvPr/>
-        </p:nvSpPr>
-        <p:spPr>
-          <a:xfrm>
-            <a:off x="365760" y="5989319"/>
-            <a:ext cx="11430000" cy="365760"/>
-          </a:xfrm>
-          <a:prstGeom prst="rect">
-            <a:avLst/>
-          </a:prstGeom>
-          <a:solidFill>
-            <a:srgbClr val="0078D7"/>
-          </a:solidFill>
-          <a:ln>
-            <a:noFill/>
-          </a:ln>
-        </p:spPr>
-        <p:style>
-          <a:lnRef idx="1">
-            <a:schemeClr val="accent1"/>
-          </a:lnRef>
-          <a:fillRef idx="3">
-            <a:schemeClr val="accent1"/>
-          </a:fillRef>
-          <a:effectRef idx="2">
-            <a:schemeClr val="accent1"/>
-          </a:effectRef>
-          <a:fontRef idx="minor">
-            <a:schemeClr val="lt1"/>
-          </a:fontRef>
-        </p:style>
-        <p:txBody>
-          <a:bodyPr rtlCol="0" anchor="ctr"/>
-          <a:lstStyle/>
-          <a:p>
-            <a:pPr algn="ctr"/>
-          </a:p>
-        </p:txBody>
-      </p:sp>
-      <p:sp>
-        <p:nvSpPr>
-          <p:cNvPr id="26" name="TextBox 25"/>
-          <p:cNvSpPr txBox="1"/>
-          <p:nvPr/>
-        </p:nvSpPr>
-        <p:spPr>
-          <a:xfrm>
-            <a:off x="548640" y="6035039"/>
-            <a:ext cx="10972800" cy="274320"/>
-          </a:xfrm>
-          <a:prstGeom prst="rect">
-            <a:avLst/>
-          </a:prstGeom>
-          <a:noFill/>
-        </p:spPr>
-        <p:txBody>
-          <a:bodyPr wrap="none">
-            <a:spAutoFit/>
-          </a:bodyPr>
-          <a:lstStyle/>
-          <a:p>
-            <a:pPr>
-              <a:defRPr sz="2000" b="1">
-                <a:solidFill>
-                  <a:srgbClr val="FFFFFF"/>
-                </a:solidFill>
-              </a:defRPr>
-            </a:pPr>
-            <a:r>
-              <a:t>Best Practices:</a:t>
+              <a:spcAft>
+                <a:spcPts val="200"/>
+              </a:spcAft>
+              <a:defRPr sz="1400">
+                <a:solidFill>
+                  <a:srgbClr val="ABB2BF"/>
+                </a:solidFill>
+                <a:latin typeface="Consolas"/>
+              </a:defRPr>
+            </a:pPr>
+            <a:r>
+              <a:t>bmi = weight / (height ** 2)</a:t>
             </a:r>
           </a:p>
         </p:txBody>
@@ -8742,7 +7841,1131 @@
               </a:defRPr>
             </a:pPr>
             <a:r>
-              <a:t>Time to Practice!</a:t>
+              <a:t>Common Mistakes to Avoid</a:t>
+            </a:r>
+          </a:p>
+        </p:txBody>
+      </p:sp>
+    </p:spTree>
+  </p:cSld>
+  <p:clrMapOvr>
+    <a:masterClrMapping/>
+  </p:clrMapOvr>
+</p:sld>
+</file>
+
+<file path=ppt/slides/slide17.xml><?xml version="1.0" encoding="utf-8"?>
+<p:sld xmlns:a="http://schemas.openxmlformats.org/drawingml/2006/main" xmlns:p="http://schemas.openxmlformats.org/presentationml/2006/main" xmlns:r="http://schemas.openxmlformats.org/officeDocument/2006/relationships">
+  <p:cSld>
+    <p:spTree>
+      <p:nvGrpSpPr>
+        <p:cNvPr id="1" name=""/>
+        <p:cNvGrpSpPr/>
+        <p:nvPr/>
+      </p:nvGrpSpPr>
+      <p:grpSpPr/>
+      <p:sp>
+        <p:nvSpPr>
+          <p:cNvPr id="2" name="Rectangle 1"/>
+          <p:cNvSpPr/>
+          <p:nvPr/>
+        </p:nvSpPr>
+        <p:spPr>
+          <a:xfrm>
+            <a:off x="0" y="0"/>
+            <a:ext cx="12191695" cy="6858000"/>
+          </a:xfrm>
+          <a:prstGeom prst="rect">
+            <a:avLst/>
+          </a:prstGeom>
+          <a:solidFill>
+            <a:srgbClr val="FAFAFA"/>
+          </a:solidFill>
+          <a:ln>
+            <a:noFill/>
+          </a:ln>
+        </p:spPr>
+        <p:style>
+          <a:lnRef idx="1">
+            <a:schemeClr val="accent1"/>
+          </a:lnRef>
+          <a:fillRef idx="3">
+            <a:schemeClr val="accent1"/>
+          </a:fillRef>
+          <a:effectRef idx="2">
+            <a:schemeClr val="accent1"/>
+          </a:effectRef>
+          <a:fontRef idx="minor">
+            <a:schemeClr val="lt1"/>
+          </a:fontRef>
+        </p:style>
+        <p:txBody>
+          <a:bodyPr rtlCol="0" anchor="ctr"/>
+          <a:lstStyle/>
+          <a:p>
+            <a:pPr algn="ctr"/>
+          </a:p>
+        </p:txBody>
+      </p:sp>
+      <p:sp>
+        <p:nvSpPr>
+          <p:cNvPr id="3" name="Rectangle 2"/>
+          <p:cNvSpPr/>
+          <p:nvPr/>
+        </p:nvSpPr>
+        <p:spPr>
+          <a:xfrm>
+            <a:off x="0" y="0"/>
+            <a:ext cx="12191695" cy="1097280"/>
+          </a:xfrm>
+          <a:prstGeom prst="rect">
+            <a:avLst/>
+          </a:prstGeom>
+          <a:solidFill>
+            <a:srgbClr val="0066CC"/>
+          </a:solidFill>
+          <a:ln>
+            <a:noFill/>
+          </a:ln>
+        </p:spPr>
+        <p:style>
+          <a:lnRef idx="1">
+            <a:schemeClr val="accent1"/>
+          </a:lnRef>
+          <a:fillRef idx="3">
+            <a:schemeClr val="accent1"/>
+          </a:fillRef>
+          <a:effectRef idx="2">
+            <a:schemeClr val="accent1"/>
+          </a:effectRef>
+          <a:fontRef idx="minor">
+            <a:schemeClr val="lt1"/>
+          </a:fontRef>
+        </p:style>
+        <p:txBody>
+          <a:bodyPr rtlCol="0" anchor="ctr"/>
+          <a:lstStyle/>
+          <a:p>
+            <a:pPr algn="ctr"/>
+          </a:p>
+        </p:txBody>
+      </p:sp>
+      <p:sp>
+        <p:nvSpPr>
+          <p:cNvPr id="4" name="Rectangle 3"/>
+          <p:cNvSpPr/>
+          <p:nvPr/>
+        </p:nvSpPr>
+        <p:spPr>
+          <a:xfrm>
+            <a:off x="0" y="1097280"/>
+            <a:ext cx="137160" cy="5760720"/>
+          </a:xfrm>
+          <a:prstGeom prst="rect">
+            <a:avLst/>
+          </a:prstGeom>
+          <a:solidFill>
+            <a:srgbClr val="FFBB33"/>
+          </a:solidFill>
+          <a:ln>
+            <a:noFill/>
+          </a:ln>
+        </p:spPr>
+        <p:style>
+          <a:lnRef idx="1">
+            <a:schemeClr val="accent1"/>
+          </a:lnRef>
+          <a:fillRef idx="3">
+            <a:schemeClr val="accent1"/>
+          </a:fillRef>
+          <a:effectRef idx="2">
+            <a:schemeClr val="accent1"/>
+          </a:effectRef>
+          <a:fontRef idx="minor">
+            <a:schemeClr val="lt1"/>
+          </a:fontRef>
+        </p:style>
+        <p:txBody>
+          <a:bodyPr rtlCol="0" anchor="ctr"/>
+          <a:lstStyle/>
+          <a:p>
+            <a:pPr algn="ctr"/>
+          </a:p>
+        </p:txBody>
+      </p:sp>
+      <p:sp>
+        <p:nvSpPr>
+          <p:cNvPr id="5" name="TextBox 4"/>
+          <p:cNvSpPr txBox="1"/>
+          <p:nvPr/>
+        </p:nvSpPr>
+        <p:spPr>
+          <a:xfrm>
+            <a:off x="365760" y="274320"/>
+            <a:ext cx="10972800" cy="640080"/>
+          </a:xfrm>
+          <a:prstGeom prst="rect">
+            <a:avLst/>
+          </a:prstGeom>
+          <a:noFill/>
+        </p:spPr>
+        <p:txBody>
+          <a:bodyPr wrap="none">
+            <a:spAutoFit/>
+          </a:bodyPr>
+          <a:lstStyle/>
+          <a:p>
+            <a:pPr>
+              <a:defRPr sz="3600" b="1">
+                <a:solidFill>
+                  <a:srgbClr val="FFFFFF"/>
+                </a:solidFill>
+              </a:defRPr>
+            </a:pPr>
+            <a:r>
+              <a:t>Common Mistakes to Avoid</a:t>
+            </a:r>
+          </a:p>
+        </p:txBody>
+      </p:sp>
+      <p:sp>
+        <p:nvSpPr>
+          <p:cNvPr id="6" name="Rectangle 5"/>
+          <p:cNvSpPr/>
+          <p:nvPr/>
+        </p:nvSpPr>
+        <p:spPr>
+          <a:xfrm>
+            <a:off x="365760" y="1325880"/>
+            <a:ext cx="11430000" cy="365760"/>
+          </a:xfrm>
+          <a:prstGeom prst="rect">
+            <a:avLst/>
+          </a:prstGeom>
+          <a:solidFill>
+            <a:srgbClr val="0078D7"/>
+          </a:solidFill>
+          <a:ln>
+            <a:noFill/>
+          </a:ln>
+        </p:spPr>
+        <p:style>
+          <a:lnRef idx="1">
+            <a:schemeClr val="accent1"/>
+          </a:lnRef>
+          <a:fillRef idx="3">
+            <a:schemeClr val="accent1"/>
+          </a:fillRef>
+          <a:effectRef idx="2">
+            <a:schemeClr val="accent1"/>
+          </a:effectRef>
+          <a:fontRef idx="minor">
+            <a:schemeClr val="lt1"/>
+          </a:fontRef>
+        </p:style>
+        <p:txBody>
+          <a:bodyPr rtlCol="0" anchor="ctr"/>
+          <a:lstStyle/>
+          <a:p>
+            <a:pPr algn="ctr"/>
+          </a:p>
+        </p:txBody>
+      </p:sp>
+      <p:sp>
+        <p:nvSpPr>
+          <p:cNvPr id="7" name="TextBox 6"/>
+          <p:cNvSpPr txBox="1"/>
+          <p:nvPr/>
+        </p:nvSpPr>
+        <p:spPr>
+          <a:xfrm>
+            <a:off x="548640" y="1371600"/>
+            <a:ext cx="10972800" cy="274320"/>
+          </a:xfrm>
+          <a:prstGeom prst="rect">
+            <a:avLst/>
+          </a:prstGeom>
+          <a:noFill/>
+        </p:spPr>
+        <p:txBody>
+          <a:bodyPr wrap="none">
+            <a:spAutoFit/>
+          </a:bodyPr>
+          <a:lstStyle/>
+          <a:p>
+            <a:pPr>
+              <a:defRPr sz="2000" b="1">
+                <a:solidFill>
+                  <a:srgbClr val="FFFFFF"/>
+                </a:solidFill>
+              </a:defRPr>
+            </a:pPr>
+            <a:r>
+              <a:t>Syntax Errors:</a:t>
+            </a:r>
+          </a:p>
+        </p:txBody>
+      </p:sp>
+      <p:sp>
+        <p:nvSpPr>
+          <p:cNvPr id="8" name="TextBox 7"/>
+          <p:cNvSpPr txBox="1"/>
+          <p:nvPr/>
+        </p:nvSpPr>
+        <p:spPr>
+          <a:xfrm>
+            <a:off x="457200" y="1828800"/>
+            <a:ext cx="11247120" cy="320040"/>
+          </a:xfrm>
+          <a:prstGeom prst="rect">
+            <a:avLst/>
+          </a:prstGeom>
+          <a:noFill/>
+        </p:spPr>
+        <p:txBody>
+          <a:bodyPr wrap="none">
+            <a:spAutoFit/>
+          </a:bodyPr>
+          <a:lstStyle/>
+          <a:p>
+            <a:pPr lvl="1">
+              <a:defRPr sz="1600">
+                <a:solidFill>
+                  <a:srgbClr val="333333"/>
+                </a:solidFill>
+              </a:defRPr>
+            </a:pPr>
+            <a:r>
+              <a:t>• Forgetting quotes: name = Alice (ERROR)</a:t>
+            </a:r>
+          </a:p>
+        </p:txBody>
+      </p:sp>
+      <p:sp>
+        <p:nvSpPr>
+          <p:cNvPr id="9" name="TextBox 8"/>
+          <p:cNvSpPr txBox="1"/>
+          <p:nvPr/>
+        </p:nvSpPr>
+        <p:spPr>
+          <a:xfrm>
+            <a:off x="457200" y="2103120"/>
+            <a:ext cx="11247120" cy="320040"/>
+          </a:xfrm>
+          <a:prstGeom prst="rect">
+            <a:avLst/>
+          </a:prstGeom>
+          <a:noFill/>
+        </p:spPr>
+        <p:txBody>
+          <a:bodyPr wrap="none">
+            <a:spAutoFit/>
+          </a:bodyPr>
+          <a:lstStyle/>
+          <a:p>
+            <a:pPr lvl="1">
+              <a:defRPr sz="1600">
+                <a:solidFill>
+                  <a:srgbClr val="333333"/>
+                </a:solidFill>
+              </a:defRPr>
+            </a:pPr>
+            <a:r>
+              <a:t>• Correct: name = "Alice"</a:t>
+            </a:r>
+          </a:p>
+        </p:txBody>
+      </p:sp>
+      <p:sp>
+        <p:nvSpPr>
+          <p:cNvPr id="10" name="Rectangle 9"/>
+          <p:cNvSpPr/>
+          <p:nvPr/>
+        </p:nvSpPr>
+        <p:spPr>
+          <a:xfrm>
+            <a:off x="365760" y="2331720"/>
+            <a:ext cx="11430000" cy="365760"/>
+          </a:xfrm>
+          <a:prstGeom prst="rect">
+            <a:avLst/>
+          </a:prstGeom>
+          <a:solidFill>
+            <a:srgbClr val="0078D7"/>
+          </a:solidFill>
+          <a:ln>
+            <a:noFill/>
+          </a:ln>
+        </p:spPr>
+        <p:style>
+          <a:lnRef idx="1">
+            <a:schemeClr val="accent1"/>
+          </a:lnRef>
+          <a:fillRef idx="3">
+            <a:schemeClr val="accent1"/>
+          </a:fillRef>
+          <a:effectRef idx="2">
+            <a:schemeClr val="accent1"/>
+          </a:effectRef>
+          <a:fontRef idx="minor">
+            <a:schemeClr val="lt1"/>
+          </a:fontRef>
+        </p:style>
+        <p:txBody>
+          <a:bodyPr rtlCol="0" anchor="ctr"/>
+          <a:lstStyle/>
+          <a:p>
+            <a:pPr algn="ctr"/>
+          </a:p>
+        </p:txBody>
+      </p:sp>
+      <p:sp>
+        <p:nvSpPr>
+          <p:cNvPr id="11" name="TextBox 10"/>
+          <p:cNvSpPr txBox="1"/>
+          <p:nvPr/>
+        </p:nvSpPr>
+        <p:spPr>
+          <a:xfrm>
+            <a:off x="548640" y="2377439"/>
+            <a:ext cx="10972800" cy="274320"/>
+          </a:xfrm>
+          <a:prstGeom prst="rect">
+            <a:avLst/>
+          </a:prstGeom>
+          <a:noFill/>
+        </p:spPr>
+        <p:txBody>
+          <a:bodyPr wrap="none">
+            <a:spAutoFit/>
+          </a:bodyPr>
+          <a:lstStyle/>
+          <a:p>
+            <a:pPr>
+              <a:defRPr sz="2000" b="1">
+                <a:solidFill>
+                  <a:srgbClr val="FFFFFF"/>
+                </a:solidFill>
+              </a:defRPr>
+            </a:pPr>
+            <a:r>
+              <a:t>Type Errors:</a:t>
+            </a:r>
+          </a:p>
+        </p:txBody>
+      </p:sp>
+      <p:sp>
+        <p:nvSpPr>
+          <p:cNvPr id="12" name="TextBox 11"/>
+          <p:cNvSpPr txBox="1"/>
+          <p:nvPr/>
+        </p:nvSpPr>
+        <p:spPr>
+          <a:xfrm>
+            <a:off x="457200" y="2834639"/>
+            <a:ext cx="11247120" cy="320040"/>
+          </a:xfrm>
+          <a:prstGeom prst="rect">
+            <a:avLst/>
+          </a:prstGeom>
+          <a:noFill/>
+        </p:spPr>
+        <p:txBody>
+          <a:bodyPr wrap="none">
+            <a:spAutoFit/>
+          </a:bodyPr>
+          <a:lstStyle/>
+          <a:p>
+            <a:pPr lvl="1">
+              <a:defRPr sz="1600">
+                <a:solidFill>
+                  <a:srgbClr val="333333"/>
+                </a:solidFill>
+              </a:defRPr>
+            </a:pPr>
+            <a:r>
+              <a:t>• Mixing types: "5" + 3 (ERROR)</a:t>
+            </a:r>
+          </a:p>
+        </p:txBody>
+      </p:sp>
+      <p:sp>
+        <p:nvSpPr>
+          <p:cNvPr id="13" name="TextBox 12"/>
+          <p:cNvSpPr txBox="1"/>
+          <p:nvPr/>
+        </p:nvSpPr>
+        <p:spPr>
+          <a:xfrm>
+            <a:off x="457200" y="3108959"/>
+            <a:ext cx="11247120" cy="320040"/>
+          </a:xfrm>
+          <a:prstGeom prst="rect">
+            <a:avLst/>
+          </a:prstGeom>
+          <a:noFill/>
+        </p:spPr>
+        <p:txBody>
+          <a:bodyPr wrap="none">
+            <a:spAutoFit/>
+          </a:bodyPr>
+          <a:lstStyle/>
+          <a:p>
+            <a:pPr lvl="1">
+              <a:defRPr sz="1600">
+                <a:solidFill>
+                  <a:srgbClr val="333333"/>
+                </a:solidFill>
+              </a:defRPr>
+            </a:pPr>
+            <a:r>
+              <a:t>• Correct: int("5") + 3 or "5" + str(3)</a:t>
+            </a:r>
+          </a:p>
+        </p:txBody>
+      </p:sp>
+      <p:sp>
+        <p:nvSpPr>
+          <p:cNvPr id="14" name="Rectangle 13"/>
+          <p:cNvSpPr/>
+          <p:nvPr/>
+        </p:nvSpPr>
+        <p:spPr>
+          <a:xfrm>
+            <a:off x="365760" y="3337559"/>
+            <a:ext cx="11430000" cy="365760"/>
+          </a:xfrm>
+          <a:prstGeom prst="rect">
+            <a:avLst/>
+          </a:prstGeom>
+          <a:solidFill>
+            <a:srgbClr val="0078D7"/>
+          </a:solidFill>
+          <a:ln>
+            <a:noFill/>
+          </a:ln>
+        </p:spPr>
+        <p:style>
+          <a:lnRef idx="1">
+            <a:schemeClr val="accent1"/>
+          </a:lnRef>
+          <a:fillRef idx="3">
+            <a:schemeClr val="accent1"/>
+          </a:fillRef>
+          <a:effectRef idx="2">
+            <a:schemeClr val="accent1"/>
+          </a:effectRef>
+          <a:fontRef idx="minor">
+            <a:schemeClr val="lt1"/>
+          </a:fontRef>
+        </p:style>
+        <p:txBody>
+          <a:bodyPr rtlCol="0" anchor="ctr"/>
+          <a:lstStyle/>
+          <a:p>
+            <a:pPr algn="ctr"/>
+          </a:p>
+        </p:txBody>
+      </p:sp>
+      <p:sp>
+        <p:nvSpPr>
+          <p:cNvPr id="15" name="TextBox 14"/>
+          <p:cNvSpPr txBox="1"/>
+          <p:nvPr/>
+        </p:nvSpPr>
+        <p:spPr>
+          <a:xfrm>
+            <a:off x="548640" y="3383279"/>
+            <a:ext cx="10972800" cy="274320"/>
+          </a:xfrm>
+          <a:prstGeom prst="rect">
+            <a:avLst/>
+          </a:prstGeom>
+          <a:noFill/>
+        </p:spPr>
+        <p:txBody>
+          <a:bodyPr wrap="none">
+            <a:spAutoFit/>
+          </a:bodyPr>
+          <a:lstStyle/>
+          <a:p>
+            <a:pPr>
+              <a:defRPr sz="2000" b="1">
+                <a:solidFill>
+                  <a:srgbClr val="FFFFFF"/>
+                </a:solidFill>
+              </a:defRPr>
+            </a:pPr>
+            <a:r>
+              <a:t>Variable Name Errors:</a:t>
+            </a:r>
+          </a:p>
+        </p:txBody>
+      </p:sp>
+      <p:sp>
+        <p:nvSpPr>
+          <p:cNvPr id="16" name="Rectangle 15"/>
+          <p:cNvSpPr/>
+          <p:nvPr/>
+        </p:nvSpPr>
+        <p:spPr>
+          <a:xfrm>
+            <a:off x="640080" y="3794759"/>
+            <a:ext cx="10789920" cy="411480"/>
+          </a:xfrm>
+          <a:prstGeom prst="rect">
+            <a:avLst/>
+          </a:prstGeom>
+          <a:solidFill>
+            <a:srgbClr val="282C34"/>
+          </a:solidFill>
+          <a:ln>
+            <a:noFill/>
+          </a:ln>
+        </p:spPr>
+        <p:style>
+          <a:lnRef idx="1">
+            <a:schemeClr val="accent1"/>
+          </a:lnRef>
+          <a:fillRef idx="3">
+            <a:schemeClr val="accent1"/>
+          </a:fillRef>
+          <a:effectRef idx="2">
+            <a:schemeClr val="accent1"/>
+          </a:effectRef>
+          <a:fontRef idx="minor">
+            <a:schemeClr val="lt1"/>
+          </a:fontRef>
+        </p:style>
+        <p:txBody>
+          <a:bodyPr rtlCol="0" anchor="ctr"/>
+          <a:lstStyle/>
+          <a:p>
+            <a:pPr algn="ctr"/>
+          </a:p>
+        </p:txBody>
+      </p:sp>
+      <p:sp>
+        <p:nvSpPr>
+          <p:cNvPr id="17" name="Rectangle 16"/>
+          <p:cNvSpPr/>
+          <p:nvPr/>
+        </p:nvSpPr>
+        <p:spPr>
+          <a:xfrm>
+            <a:off x="640080" y="3794759"/>
+            <a:ext cx="73152" cy="411480"/>
+          </a:xfrm>
+          <a:prstGeom prst="rect">
+            <a:avLst/>
+          </a:prstGeom>
+          <a:solidFill>
+            <a:srgbClr val="61AFEF"/>
+          </a:solidFill>
+          <a:ln>
+            <a:noFill/>
+          </a:ln>
+        </p:spPr>
+        <p:style>
+          <a:lnRef idx="1">
+            <a:schemeClr val="accent1"/>
+          </a:lnRef>
+          <a:fillRef idx="3">
+            <a:schemeClr val="accent1"/>
+          </a:fillRef>
+          <a:effectRef idx="2">
+            <a:schemeClr val="accent1"/>
+          </a:effectRef>
+          <a:fontRef idx="minor">
+            <a:schemeClr val="lt1"/>
+          </a:fontRef>
+        </p:style>
+        <p:txBody>
+          <a:bodyPr rtlCol="0" anchor="ctr"/>
+          <a:lstStyle/>
+          <a:p>
+            <a:pPr algn="ctr"/>
+          </a:p>
+        </p:txBody>
+      </p:sp>
+      <p:sp>
+        <p:nvSpPr>
+          <p:cNvPr id="18" name="TextBox 17"/>
+          <p:cNvSpPr txBox="1"/>
+          <p:nvPr/>
+        </p:nvSpPr>
+        <p:spPr>
+          <a:xfrm>
+            <a:off x="914400" y="3840479"/>
+            <a:ext cx="10241280" cy="320040"/>
+          </a:xfrm>
+          <a:prstGeom prst="rect">
+            <a:avLst/>
+          </a:prstGeom>
+          <a:noFill/>
+        </p:spPr>
+        <p:txBody>
+          <a:bodyPr wrap="none">
+            <a:spAutoFit/>
+          </a:bodyPr>
+          <a:lstStyle/>
+          <a:p>
+            <a:pPr>
+              <a:spcAft>
+                <a:spcPts val="200"/>
+              </a:spcAft>
+              <a:defRPr sz="1400">
+                <a:solidFill>
+                  <a:srgbClr val="ABB2BF"/>
+                </a:solidFill>
+                <a:latin typeface="Consolas"/>
+              </a:defRPr>
+            </a:pPr>
+            <a:r>
+              <a:t>• Using keywords: for = 5 (ERROR)</a:t>
+            </a:r>
+          </a:p>
+        </p:txBody>
+      </p:sp>
+      <p:sp>
+        <p:nvSpPr>
+          <p:cNvPr id="19" name="TextBox 18"/>
+          <p:cNvSpPr txBox="1"/>
+          <p:nvPr/>
+        </p:nvSpPr>
+        <p:spPr>
+          <a:xfrm>
+            <a:off x="457200" y="4389120"/>
+            <a:ext cx="11247120" cy="320040"/>
+          </a:xfrm>
+          <a:prstGeom prst="rect">
+            <a:avLst/>
+          </a:prstGeom>
+          <a:noFill/>
+        </p:spPr>
+        <p:txBody>
+          <a:bodyPr wrap="none">
+            <a:spAutoFit/>
+          </a:bodyPr>
+          <a:lstStyle/>
+          <a:p>
+            <a:pPr lvl="1">
+              <a:defRPr sz="1600">
+                <a:solidFill>
+                  <a:srgbClr val="333333"/>
+                </a:solidFill>
+              </a:defRPr>
+            </a:pPr>
+            <a:r>
+              <a:t>• Starting with number: 2nd_place (ERROR)</a:t>
+            </a:r>
+          </a:p>
+        </p:txBody>
+      </p:sp>
+      <p:sp>
+        <p:nvSpPr>
+          <p:cNvPr id="20" name="TextBox 19"/>
+          <p:cNvSpPr txBox="1"/>
+          <p:nvPr/>
+        </p:nvSpPr>
+        <p:spPr>
+          <a:xfrm>
+            <a:off x="457200" y="4663440"/>
+            <a:ext cx="11247120" cy="320040"/>
+          </a:xfrm>
+          <a:prstGeom prst="rect">
+            <a:avLst/>
+          </a:prstGeom>
+          <a:noFill/>
+        </p:spPr>
+        <p:txBody>
+          <a:bodyPr wrap="none">
+            <a:spAutoFit/>
+          </a:bodyPr>
+          <a:lstStyle/>
+          <a:p>
+            <a:pPr lvl="1">
+              <a:defRPr sz="1600">
+                <a:solidFill>
+                  <a:srgbClr val="333333"/>
+                </a:solidFill>
+              </a:defRPr>
+            </a:pPr>
+            <a:r>
+              <a:t>• Correct: second_place</a:t>
+            </a:r>
+          </a:p>
+        </p:txBody>
+      </p:sp>
+      <p:sp>
+        <p:nvSpPr>
+          <p:cNvPr id="21" name="Rectangle 20"/>
+          <p:cNvSpPr/>
+          <p:nvPr/>
+        </p:nvSpPr>
+        <p:spPr>
+          <a:xfrm>
+            <a:off x="365760" y="4892040"/>
+            <a:ext cx="11430000" cy="365760"/>
+          </a:xfrm>
+          <a:prstGeom prst="rect">
+            <a:avLst/>
+          </a:prstGeom>
+          <a:solidFill>
+            <a:srgbClr val="0078D7"/>
+          </a:solidFill>
+          <a:ln>
+            <a:noFill/>
+          </a:ln>
+        </p:spPr>
+        <p:style>
+          <a:lnRef idx="1">
+            <a:schemeClr val="accent1"/>
+          </a:lnRef>
+          <a:fillRef idx="3">
+            <a:schemeClr val="accent1"/>
+          </a:fillRef>
+          <a:effectRef idx="2">
+            <a:schemeClr val="accent1"/>
+          </a:effectRef>
+          <a:fontRef idx="minor">
+            <a:schemeClr val="lt1"/>
+          </a:fontRef>
+        </p:style>
+        <p:txBody>
+          <a:bodyPr rtlCol="0" anchor="ctr"/>
+          <a:lstStyle/>
+          <a:p>
+            <a:pPr algn="ctr"/>
+          </a:p>
+        </p:txBody>
+      </p:sp>
+      <p:sp>
+        <p:nvSpPr>
+          <p:cNvPr id="22" name="TextBox 21"/>
+          <p:cNvSpPr txBox="1"/>
+          <p:nvPr/>
+        </p:nvSpPr>
+        <p:spPr>
+          <a:xfrm>
+            <a:off x="548640" y="4937759"/>
+            <a:ext cx="10972800" cy="274320"/>
+          </a:xfrm>
+          <a:prstGeom prst="rect">
+            <a:avLst/>
+          </a:prstGeom>
+          <a:noFill/>
+        </p:spPr>
+        <p:txBody>
+          <a:bodyPr wrap="none">
+            <a:spAutoFit/>
+          </a:bodyPr>
+          <a:lstStyle/>
+          <a:p>
+            <a:pPr>
+              <a:defRPr sz="2000" b="1">
+                <a:solidFill>
+                  <a:srgbClr val="FFFFFF"/>
+                </a:solidFill>
+              </a:defRPr>
+            </a:pPr>
+            <a:r>
+              <a:t>Case Sensitivity:</a:t>
+            </a:r>
+          </a:p>
+        </p:txBody>
+      </p:sp>
+      <p:sp>
+        <p:nvSpPr>
+          <p:cNvPr id="23" name="TextBox 22"/>
+          <p:cNvSpPr txBox="1"/>
+          <p:nvPr/>
+        </p:nvSpPr>
+        <p:spPr>
+          <a:xfrm>
+            <a:off x="457200" y="5394959"/>
+            <a:ext cx="11247120" cy="320040"/>
+          </a:xfrm>
+          <a:prstGeom prst="rect">
+            <a:avLst/>
+          </a:prstGeom>
+          <a:noFill/>
+        </p:spPr>
+        <p:txBody>
+          <a:bodyPr wrap="none">
+            <a:spAutoFit/>
+          </a:bodyPr>
+          <a:lstStyle/>
+          <a:p>
+            <a:pPr lvl="1">
+              <a:defRPr sz="1600">
+                <a:solidFill>
+                  <a:srgbClr val="333333"/>
+                </a:solidFill>
+              </a:defRPr>
+            </a:pPr>
+            <a:r>
+              <a:t>• Name ≠ name ≠ NAME</a:t>
+            </a:r>
+          </a:p>
+        </p:txBody>
+      </p:sp>
+      <p:sp>
+        <p:nvSpPr>
+          <p:cNvPr id="24" name="Rectangle 23"/>
+          <p:cNvSpPr/>
+          <p:nvPr/>
+        </p:nvSpPr>
+        <p:spPr>
+          <a:xfrm>
+            <a:off x="365760" y="5623559"/>
+            <a:ext cx="11430000" cy="365760"/>
+          </a:xfrm>
+          <a:prstGeom prst="rect">
+            <a:avLst/>
+          </a:prstGeom>
+          <a:solidFill>
+            <a:srgbClr val="0078D7"/>
+          </a:solidFill>
+          <a:ln>
+            <a:noFill/>
+          </a:ln>
+        </p:spPr>
+        <p:style>
+          <a:lnRef idx="1">
+            <a:schemeClr val="accent1"/>
+          </a:lnRef>
+          <a:fillRef idx="3">
+            <a:schemeClr val="accent1"/>
+          </a:fillRef>
+          <a:effectRef idx="2">
+            <a:schemeClr val="accent1"/>
+          </a:effectRef>
+          <a:fontRef idx="minor">
+            <a:schemeClr val="lt1"/>
+          </a:fontRef>
+        </p:style>
+        <p:txBody>
+          <a:bodyPr rtlCol="0" anchor="ctr"/>
+          <a:lstStyle/>
+          <a:p>
+            <a:pPr algn="ctr"/>
+          </a:p>
+        </p:txBody>
+      </p:sp>
+      <p:sp>
+        <p:nvSpPr>
+          <p:cNvPr id="25" name="TextBox 24"/>
+          <p:cNvSpPr txBox="1"/>
+          <p:nvPr/>
+        </p:nvSpPr>
+        <p:spPr>
+          <a:xfrm>
+            <a:off x="548640" y="5669279"/>
+            <a:ext cx="10972800" cy="274320"/>
+          </a:xfrm>
+          <a:prstGeom prst="rect">
+            <a:avLst/>
+          </a:prstGeom>
+          <a:noFill/>
+        </p:spPr>
+        <p:txBody>
+          <a:bodyPr wrap="none">
+            <a:spAutoFit/>
+          </a:bodyPr>
+          <a:lstStyle/>
+          <a:p>
+            <a:pPr>
+              <a:defRPr sz="2000" b="1">
+                <a:solidFill>
+                  <a:srgbClr val="FFFFFF"/>
+                </a:solidFill>
+              </a:defRPr>
+            </a:pPr>
+            <a:r>
+              <a:t>Undefined Variables:</a:t>
+            </a:r>
+          </a:p>
+        </p:txBody>
+      </p:sp>
+    </p:spTree>
+  </p:cSld>
+  <p:clrMapOvr>
+    <a:masterClrMapping/>
+  </p:clrMapOvr>
+</p:sld>
+</file>
+
+<file path=ppt/slides/slide18.xml><?xml version="1.0" encoding="utf-8"?>
+<p:sld xmlns:a="http://schemas.openxmlformats.org/drawingml/2006/main" xmlns:p="http://schemas.openxmlformats.org/presentationml/2006/main" xmlns:r="http://schemas.openxmlformats.org/officeDocument/2006/relationships">
+  <p:cSld>
+    <p:spTree>
+      <p:nvGrpSpPr>
+        <p:cNvPr id="1" name=""/>
+        <p:cNvGrpSpPr/>
+        <p:nvPr/>
+      </p:nvGrpSpPr>
+      <p:grpSpPr/>
+      <p:sp>
+        <p:nvSpPr>
+          <p:cNvPr id="2" name="Rectangle 1"/>
+          <p:cNvSpPr/>
+          <p:nvPr/>
+        </p:nvSpPr>
+        <p:spPr>
+          <a:xfrm>
+            <a:off x="0" y="0"/>
+            <a:ext cx="12191695" cy="6858000"/>
+          </a:xfrm>
+          <a:prstGeom prst="rect">
+            <a:avLst/>
+          </a:prstGeom>
+          <a:solidFill>
+            <a:srgbClr val="FAFAFA"/>
+          </a:solidFill>
+          <a:ln>
+            <a:noFill/>
+          </a:ln>
+        </p:spPr>
+        <p:style>
+          <a:lnRef idx="1">
+            <a:schemeClr val="accent1"/>
+          </a:lnRef>
+          <a:fillRef idx="3">
+            <a:schemeClr val="accent1"/>
+          </a:fillRef>
+          <a:effectRef idx="2">
+            <a:schemeClr val="accent1"/>
+          </a:effectRef>
+          <a:fontRef idx="minor">
+            <a:schemeClr val="lt1"/>
+          </a:fontRef>
+        </p:style>
+        <p:txBody>
+          <a:bodyPr rtlCol="0" anchor="ctr"/>
+          <a:lstStyle/>
+          <a:p>
+            <a:pPr algn="ctr"/>
+          </a:p>
+        </p:txBody>
+      </p:sp>
+      <p:sp>
+        <p:nvSpPr>
+          <p:cNvPr id="3" name="Rectangle 2"/>
+          <p:cNvSpPr/>
+          <p:nvPr/>
+        </p:nvSpPr>
+        <p:spPr>
+          <a:xfrm>
+            <a:off x="0" y="0"/>
+            <a:ext cx="12191695" cy="1097280"/>
+          </a:xfrm>
+          <a:prstGeom prst="rect">
+            <a:avLst/>
+          </a:prstGeom>
+          <a:solidFill>
+            <a:srgbClr val="0066CC"/>
+          </a:solidFill>
+          <a:ln>
+            <a:noFill/>
+          </a:ln>
+        </p:spPr>
+        <p:style>
+          <a:lnRef idx="1">
+            <a:schemeClr val="accent1"/>
+          </a:lnRef>
+          <a:fillRef idx="3">
+            <a:schemeClr val="accent1"/>
+          </a:fillRef>
+          <a:effectRef idx="2">
+            <a:schemeClr val="accent1"/>
+          </a:effectRef>
+          <a:fontRef idx="minor">
+            <a:schemeClr val="lt1"/>
+          </a:fontRef>
+        </p:style>
+        <p:txBody>
+          <a:bodyPr rtlCol="0" anchor="ctr"/>
+          <a:lstStyle/>
+          <a:p>
+            <a:pPr algn="ctr"/>
+          </a:p>
+        </p:txBody>
+      </p:sp>
+      <p:sp>
+        <p:nvSpPr>
+          <p:cNvPr id="4" name="Rectangle 3"/>
+          <p:cNvSpPr/>
+          <p:nvPr/>
+        </p:nvSpPr>
+        <p:spPr>
+          <a:xfrm>
+            <a:off x="0" y="1097280"/>
+            <a:ext cx="137160" cy="5760720"/>
+          </a:xfrm>
+          <a:prstGeom prst="rect">
+            <a:avLst/>
+          </a:prstGeom>
+          <a:solidFill>
+            <a:srgbClr val="FFBB33"/>
+          </a:solidFill>
+          <a:ln>
+            <a:noFill/>
+          </a:ln>
+        </p:spPr>
+        <p:style>
+          <a:lnRef idx="1">
+            <a:schemeClr val="accent1"/>
+          </a:lnRef>
+          <a:fillRef idx="3">
+            <a:schemeClr val="accent1"/>
+          </a:fillRef>
+          <a:effectRef idx="2">
+            <a:schemeClr val="accent1"/>
+          </a:effectRef>
+          <a:fontRef idx="minor">
+            <a:schemeClr val="lt1"/>
+          </a:fontRef>
+        </p:style>
+        <p:txBody>
+          <a:bodyPr rtlCol="0" anchor="ctr"/>
+          <a:lstStyle/>
+          <a:p>
+            <a:pPr algn="ctr"/>
+          </a:p>
+        </p:txBody>
+      </p:sp>
+      <p:sp>
+        <p:nvSpPr>
+          <p:cNvPr id="5" name="TextBox 4"/>
+          <p:cNvSpPr txBox="1"/>
+          <p:nvPr/>
+        </p:nvSpPr>
+        <p:spPr>
+          <a:xfrm>
+            <a:off x="365760" y="274320"/>
+            <a:ext cx="10972800" cy="640080"/>
+          </a:xfrm>
+          <a:prstGeom prst="rect">
+            <a:avLst/>
+          </a:prstGeom>
+          <a:noFill/>
+        </p:spPr>
+        <p:txBody>
+          <a:bodyPr wrap="none">
+            <a:spAutoFit/>
+          </a:bodyPr>
+          <a:lstStyle/>
+          <a:p>
+            <a:pPr>
+              <a:defRPr sz="3600" b="1">
+                <a:solidFill>
+                  <a:srgbClr val="FFFFFF"/>
+                </a:solidFill>
+              </a:defRPr>
+            </a:pPr>
+            <a:r>
+              <a:t>Common Mistakes to Avoid (continued)</a:t>
             </a:r>
           </a:p>
         </p:txBody>
@@ -8755,29 +8978,920 @@
         </p:nvSpPr>
         <p:spPr>
           <a:xfrm>
-            <a:off x="1828800" y="4389120"/>
-            <a:ext cx="8531352" cy="914400"/>
-          </a:xfrm>
-          <a:prstGeom prst="rect">
-            <a:avLst/>
-          </a:prstGeom>
-          <a:noFill/>
-        </p:spPr>
-        <p:txBody>
-          <a:bodyPr wrap="none">
-            <a:spAutoFit/>
-          </a:bodyPr>
-          <a:lstStyle/>
-          <a:p>
-            <a:pPr algn="ctr">
-              <a:defRPr sz="2400">
+            <a:off x="457200" y="1371600"/>
+            <a:ext cx="11247120" cy="320040"/>
+          </a:xfrm>
+          <a:prstGeom prst="rect">
+            <a:avLst/>
+          </a:prstGeom>
+          <a:noFill/>
+        </p:spPr>
+        <p:txBody>
+          <a:bodyPr wrap="none">
+            <a:spAutoFit/>
+          </a:bodyPr>
+          <a:lstStyle/>
+          <a:p>
+            <a:pPr lvl="1">
+              <a:defRPr sz="1600">
+                <a:solidFill>
+                  <a:srgbClr val="333333"/>
+                </a:solidFill>
+              </a:defRPr>
+            </a:pPr>
+            <a:r>
+              <a:t>• print(total) before defining total</a:t>
+            </a:r>
+          </a:p>
+        </p:txBody>
+      </p:sp>
+    </p:spTree>
+  </p:cSld>
+  <p:clrMapOvr>
+    <a:masterClrMapping/>
+  </p:clrMapOvr>
+</p:sld>
+</file>
+
+<file path=ppt/slides/slide19.xml><?xml version="1.0" encoding="utf-8"?>
+<p:sld xmlns:a="http://schemas.openxmlformats.org/drawingml/2006/main" xmlns:p="http://schemas.openxmlformats.org/presentationml/2006/main" xmlns:r="http://schemas.openxmlformats.org/officeDocument/2006/relationships">
+  <p:cSld>
+    <p:spTree>
+      <p:nvGrpSpPr>
+        <p:cNvPr id="1" name=""/>
+        <p:cNvGrpSpPr/>
+        <p:nvPr/>
+      </p:nvGrpSpPr>
+      <p:grpSpPr/>
+      <p:sp>
+        <p:nvSpPr>
+          <p:cNvPr id="2" name="Rectangle 1"/>
+          <p:cNvSpPr/>
+          <p:nvPr/>
+        </p:nvSpPr>
+        <p:spPr>
+          <a:xfrm>
+            <a:off x="0" y="0"/>
+            <a:ext cx="12191695" cy="6858000"/>
+          </a:xfrm>
+          <a:prstGeom prst="rect">
+            <a:avLst/>
+          </a:prstGeom>
+          <a:solidFill>
+            <a:srgbClr val="FAFAFA"/>
+          </a:solidFill>
+          <a:ln>
+            <a:noFill/>
+          </a:ln>
+        </p:spPr>
+        <p:style>
+          <a:lnRef idx="1">
+            <a:schemeClr val="accent1"/>
+          </a:lnRef>
+          <a:fillRef idx="3">
+            <a:schemeClr val="accent1"/>
+          </a:fillRef>
+          <a:effectRef idx="2">
+            <a:schemeClr val="accent1"/>
+          </a:effectRef>
+          <a:fontRef idx="minor">
+            <a:schemeClr val="lt1"/>
+          </a:fontRef>
+        </p:style>
+        <p:txBody>
+          <a:bodyPr rtlCol="0" anchor="ctr"/>
+          <a:lstStyle/>
+          <a:p>
+            <a:pPr algn="ctr"/>
+          </a:p>
+        </p:txBody>
+      </p:sp>
+      <p:sp>
+        <p:nvSpPr>
+          <p:cNvPr id="3" name="Rectangle 2"/>
+          <p:cNvSpPr/>
+          <p:nvPr/>
+        </p:nvSpPr>
+        <p:spPr>
+          <a:xfrm>
+            <a:off x="0" y="0"/>
+            <a:ext cx="12191695" cy="1097280"/>
+          </a:xfrm>
+          <a:prstGeom prst="rect">
+            <a:avLst/>
+          </a:prstGeom>
+          <a:solidFill>
+            <a:srgbClr val="0066CC"/>
+          </a:solidFill>
+          <a:ln>
+            <a:noFill/>
+          </a:ln>
+        </p:spPr>
+        <p:style>
+          <a:lnRef idx="1">
+            <a:schemeClr val="accent1"/>
+          </a:lnRef>
+          <a:fillRef idx="3">
+            <a:schemeClr val="accent1"/>
+          </a:fillRef>
+          <a:effectRef idx="2">
+            <a:schemeClr val="accent1"/>
+          </a:effectRef>
+          <a:fontRef idx="minor">
+            <a:schemeClr val="lt1"/>
+          </a:fontRef>
+        </p:style>
+        <p:txBody>
+          <a:bodyPr rtlCol="0" anchor="ctr"/>
+          <a:lstStyle/>
+          <a:p>
+            <a:pPr algn="ctr"/>
+          </a:p>
+        </p:txBody>
+      </p:sp>
+      <p:sp>
+        <p:nvSpPr>
+          <p:cNvPr id="4" name="Rectangle 3"/>
+          <p:cNvSpPr/>
+          <p:nvPr/>
+        </p:nvSpPr>
+        <p:spPr>
+          <a:xfrm>
+            <a:off x="0" y="1097280"/>
+            <a:ext cx="137160" cy="5760720"/>
+          </a:xfrm>
+          <a:prstGeom prst="rect">
+            <a:avLst/>
+          </a:prstGeom>
+          <a:solidFill>
+            <a:srgbClr val="FFBB33"/>
+          </a:solidFill>
+          <a:ln>
+            <a:noFill/>
+          </a:ln>
+        </p:spPr>
+        <p:style>
+          <a:lnRef idx="1">
+            <a:schemeClr val="accent1"/>
+          </a:lnRef>
+          <a:fillRef idx="3">
+            <a:schemeClr val="accent1"/>
+          </a:fillRef>
+          <a:effectRef idx="2">
+            <a:schemeClr val="accent1"/>
+          </a:effectRef>
+          <a:fontRef idx="minor">
+            <a:schemeClr val="lt1"/>
+          </a:fontRef>
+        </p:style>
+        <p:txBody>
+          <a:bodyPr rtlCol="0" anchor="ctr"/>
+          <a:lstStyle/>
+          <a:p>
+            <a:pPr algn="ctr"/>
+          </a:p>
+        </p:txBody>
+      </p:sp>
+      <p:sp>
+        <p:nvSpPr>
+          <p:cNvPr id="5" name="TextBox 4"/>
+          <p:cNvSpPr txBox="1"/>
+          <p:nvPr/>
+        </p:nvSpPr>
+        <p:spPr>
+          <a:xfrm>
+            <a:off x="365760" y="274320"/>
+            <a:ext cx="10972800" cy="640080"/>
+          </a:xfrm>
+          <a:prstGeom prst="rect">
+            <a:avLst/>
+          </a:prstGeom>
+          <a:noFill/>
+        </p:spPr>
+        <p:txBody>
+          <a:bodyPr wrap="none">
+            <a:spAutoFit/>
+          </a:bodyPr>
+          <a:lstStyle/>
+          <a:p>
+            <a:pPr>
+              <a:defRPr sz="3600" b="1">
                 <a:solidFill>
                   <a:srgbClr val="FFFFFF"/>
                 </a:solidFill>
               </a:defRPr>
             </a:pPr>
             <a:r>
-              <a:t>Chapter 1 Exercises</a:t>
+              <a:t>Key Concepts Review</a:t>
+            </a:r>
+          </a:p>
+        </p:txBody>
+      </p:sp>
+      <p:sp>
+        <p:nvSpPr>
+          <p:cNvPr id="6" name="Rectangle 5"/>
+          <p:cNvSpPr/>
+          <p:nvPr/>
+        </p:nvSpPr>
+        <p:spPr>
+          <a:xfrm>
+            <a:off x="640080" y="1325880"/>
+            <a:ext cx="10789920" cy="411480"/>
+          </a:xfrm>
+          <a:prstGeom prst="rect">
+            <a:avLst/>
+          </a:prstGeom>
+          <a:solidFill>
+            <a:srgbClr val="282C34"/>
+          </a:solidFill>
+          <a:ln>
+            <a:noFill/>
+          </a:ln>
+        </p:spPr>
+        <p:style>
+          <a:lnRef idx="1">
+            <a:schemeClr val="accent1"/>
+          </a:lnRef>
+          <a:fillRef idx="3">
+            <a:schemeClr val="accent1"/>
+          </a:fillRef>
+          <a:effectRef idx="2">
+            <a:schemeClr val="accent1"/>
+          </a:effectRef>
+          <a:fontRef idx="minor">
+            <a:schemeClr val="lt1"/>
+          </a:fontRef>
+        </p:style>
+        <p:txBody>
+          <a:bodyPr rtlCol="0" anchor="ctr"/>
+          <a:lstStyle/>
+          <a:p>
+            <a:pPr algn="ctr"/>
+          </a:p>
+        </p:txBody>
+      </p:sp>
+      <p:sp>
+        <p:nvSpPr>
+          <p:cNvPr id="7" name="Rectangle 6"/>
+          <p:cNvSpPr/>
+          <p:nvPr/>
+        </p:nvSpPr>
+        <p:spPr>
+          <a:xfrm>
+            <a:off x="640080" y="1325880"/>
+            <a:ext cx="73152" cy="411480"/>
+          </a:xfrm>
+          <a:prstGeom prst="rect">
+            <a:avLst/>
+          </a:prstGeom>
+          <a:solidFill>
+            <a:srgbClr val="61AFEF"/>
+          </a:solidFill>
+          <a:ln>
+            <a:noFill/>
+          </a:ln>
+        </p:spPr>
+        <p:style>
+          <a:lnRef idx="1">
+            <a:schemeClr val="accent1"/>
+          </a:lnRef>
+          <a:fillRef idx="3">
+            <a:schemeClr val="accent1"/>
+          </a:fillRef>
+          <a:effectRef idx="2">
+            <a:schemeClr val="accent1"/>
+          </a:effectRef>
+          <a:fontRef idx="minor">
+            <a:schemeClr val="lt1"/>
+          </a:fontRef>
+        </p:style>
+        <p:txBody>
+          <a:bodyPr rtlCol="0" anchor="ctr"/>
+          <a:lstStyle/>
+          <a:p>
+            <a:pPr algn="ctr"/>
+          </a:p>
+        </p:txBody>
+      </p:sp>
+      <p:sp>
+        <p:nvSpPr>
+          <p:cNvPr id="8" name="TextBox 7"/>
+          <p:cNvSpPr txBox="1"/>
+          <p:nvPr/>
+        </p:nvSpPr>
+        <p:spPr>
+          <a:xfrm>
+            <a:off x="914400" y="1371600"/>
+            <a:ext cx="10241280" cy="320040"/>
+          </a:xfrm>
+          <a:prstGeom prst="rect">
+            <a:avLst/>
+          </a:prstGeom>
+          <a:noFill/>
+        </p:spPr>
+        <p:txBody>
+          <a:bodyPr wrap="none">
+            <a:spAutoFit/>
+          </a:bodyPr>
+          <a:lstStyle/>
+          <a:p>
+            <a:pPr>
+              <a:spcAft>
+                <a:spcPts val="200"/>
+              </a:spcAft>
+              <a:defRPr sz="1400">
+                <a:solidFill>
+                  <a:srgbClr val="ABB2BF"/>
+                </a:solidFill>
+                <a:latin typeface="Consolas"/>
+              </a:defRPr>
+            </a:pPr>
+            <a:r>
+              <a:t>Variables: Named storage for data</a:t>
+            </a:r>
+          </a:p>
+        </p:txBody>
+      </p:sp>
+      <p:sp>
+        <p:nvSpPr>
+          <p:cNvPr id="9" name="TextBox 8"/>
+          <p:cNvSpPr txBox="1"/>
+          <p:nvPr/>
+        </p:nvSpPr>
+        <p:spPr>
+          <a:xfrm>
+            <a:off x="457200" y="1920240"/>
+            <a:ext cx="11247120" cy="320040"/>
+          </a:xfrm>
+          <a:prstGeom prst="rect">
+            <a:avLst/>
+          </a:prstGeom>
+          <a:noFill/>
+        </p:spPr>
+        <p:txBody>
+          <a:bodyPr wrap="none">
+            <a:spAutoFit/>
+          </a:bodyPr>
+          <a:lstStyle/>
+          <a:p>
+            <a:pPr lvl="1">
+              <a:defRPr sz="1600">
+                <a:solidFill>
+                  <a:srgbClr val="333333"/>
+                </a:solidFill>
+              </a:defRPr>
+            </a:pPr>
+            <a:r>
+              <a:t>• Assignment: variable_name = value</a:t>
+            </a:r>
+          </a:p>
+        </p:txBody>
+      </p:sp>
+      <p:sp>
+        <p:nvSpPr>
+          <p:cNvPr id="10" name="TextBox 9"/>
+          <p:cNvSpPr txBox="1"/>
+          <p:nvPr/>
+        </p:nvSpPr>
+        <p:spPr>
+          <a:xfrm>
+            <a:off x="457200" y="2194560"/>
+            <a:ext cx="11247120" cy="320040"/>
+          </a:xfrm>
+          <a:prstGeom prst="rect">
+            <a:avLst/>
+          </a:prstGeom>
+          <a:noFill/>
+        </p:spPr>
+        <p:txBody>
+          <a:bodyPr wrap="none">
+            <a:spAutoFit/>
+          </a:bodyPr>
+          <a:lstStyle/>
+          <a:p>
+            <a:pPr lvl="1">
+              <a:defRPr sz="1600">
+                <a:solidFill>
+                  <a:srgbClr val="333333"/>
+                </a:solidFill>
+              </a:defRPr>
+            </a:pPr>
+            <a:r>
+              <a:t>• Can be updated: x = x + 1</a:t>
+            </a:r>
+          </a:p>
+        </p:txBody>
+      </p:sp>
+      <p:sp>
+        <p:nvSpPr>
+          <p:cNvPr id="11" name="Rectangle 10"/>
+          <p:cNvSpPr/>
+          <p:nvPr/>
+        </p:nvSpPr>
+        <p:spPr>
+          <a:xfrm>
+            <a:off x="365760" y="2423160"/>
+            <a:ext cx="11430000" cy="365760"/>
+          </a:xfrm>
+          <a:prstGeom prst="rect">
+            <a:avLst/>
+          </a:prstGeom>
+          <a:solidFill>
+            <a:srgbClr val="0078D7"/>
+          </a:solidFill>
+          <a:ln>
+            <a:noFill/>
+          </a:ln>
+        </p:spPr>
+        <p:style>
+          <a:lnRef idx="1">
+            <a:schemeClr val="accent1"/>
+          </a:lnRef>
+          <a:fillRef idx="3">
+            <a:schemeClr val="accent1"/>
+          </a:fillRef>
+          <a:effectRef idx="2">
+            <a:schemeClr val="accent1"/>
+          </a:effectRef>
+          <a:fontRef idx="minor">
+            <a:schemeClr val="lt1"/>
+          </a:fontRef>
+        </p:style>
+        <p:txBody>
+          <a:bodyPr rtlCol="0" anchor="ctr"/>
+          <a:lstStyle/>
+          <a:p>
+            <a:pPr algn="ctr"/>
+          </a:p>
+        </p:txBody>
+      </p:sp>
+      <p:sp>
+        <p:nvSpPr>
+          <p:cNvPr id="12" name="TextBox 11"/>
+          <p:cNvSpPr txBox="1"/>
+          <p:nvPr/>
+        </p:nvSpPr>
+        <p:spPr>
+          <a:xfrm>
+            <a:off x="548640" y="2468879"/>
+            <a:ext cx="10972800" cy="274320"/>
+          </a:xfrm>
+          <a:prstGeom prst="rect">
+            <a:avLst/>
+          </a:prstGeom>
+          <a:noFill/>
+        </p:spPr>
+        <p:txBody>
+          <a:bodyPr wrap="none">
+            <a:spAutoFit/>
+          </a:bodyPr>
+          <a:lstStyle/>
+          <a:p>
+            <a:pPr>
+              <a:defRPr sz="2000" b="1">
+                <a:solidFill>
+                  <a:srgbClr val="FFFFFF"/>
+                </a:solidFill>
+              </a:defRPr>
+            </a:pPr>
+            <a:r>
+              <a:t>Data Types:</a:t>
+            </a:r>
+          </a:p>
+        </p:txBody>
+      </p:sp>
+      <p:sp>
+        <p:nvSpPr>
+          <p:cNvPr id="13" name="TextBox 12"/>
+          <p:cNvSpPr txBox="1"/>
+          <p:nvPr/>
+        </p:nvSpPr>
+        <p:spPr>
+          <a:xfrm>
+            <a:off x="457200" y="2926079"/>
+            <a:ext cx="11247120" cy="320040"/>
+          </a:xfrm>
+          <a:prstGeom prst="rect">
+            <a:avLst/>
+          </a:prstGeom>
+          <a:noFill/>
+        </p:spPr>
+        <p:txBody>
+          <a:bodyPr wrap="none">
+            <a:spAutoFit/>
+          </a:bodyPr>
+          <a:lstStyle/>
+          <a:p>
+            <a:pPr lvl="1">
+              <a:defRPr sz="1600">
+                <a:solidFill>
+                  <a:srgbClr val="333333"/>
+                </a:solidFill>
+              </a:defRPr>
+            </a:pPr>
+            <a:r>
+              <a:t>• int: Whole numbers (42, -10)</a:t>
+            </a:r>
+          </a:p>
+        </p:txBody>
+      </p:sp>
+      <p:sp>
+        <p:nvSpPr>
+          <p:cNvPr id="14" name="TextBox 13"/>
+          <p:cNvSpPr txBox="1"/>
+          <p:nvPr/>
+        </p:nvSpPr>
+        <p:spPr>
+          <a:xfrm>
+            <a:off x="457200" y="3200399"/>
+            <a:ext cx="11247120" cy="320040"/>
+          </a:xfrm>
+          <a:prstGeom prst="rect">
+            <a:avLst/>
+          </a:prstGeom>
+          <a:noFill/>
+        </p:spPr>
+        <p:txBody>
+          <a:bodyPr wrap="none">
+            <a:spAutoFit/>
+          </a:bodyPr>
+          <a:lstStyle/>
+          <a:p>
+            <a:pPr lvl="1">
+              <a:defRPr sz="1600">
+                <a:solidFill>
+                  <a:srgbClr val="333333"/>
+                </a:solidFill>
+              </a:defRPr>
+            </a:pPr>
+            <a:r>
+              <a:t>• float: Decimals (3.14, -0.5)</a:t>
+            </a:r>
+          </a:p>
+        </p:txBody>
+      </p:sp>
+      <p:sp>
+        <p:nvSpPr>
+          <p:cNvPr id="15" name="TextBox 14"/>
+          <p:cNvSpPr txBox="1"/>
+          <p:nvPr/>
+        </p:nvSpPr>
+        <p:spPr>
+          <a:xfrm>
+            <a:off x="457200" y="3474719"/>
+            <a:ext cx="11247120" cy="320040"/>
+          </a:xfrm>
+          <a:prstGeom prst="rect">
+            <a:avLst/>
+          </a:prstGeom>
+          <a:noFill/>
+        </p:spPr>
+        <p:txBody>
+          <a:bodyPr wrap="none">
+            <a:spAutoFit/>
+          </a:bodyPr>
+          <a:lstStyle/>
+          <a:p>
+            <a:pPr lvl="1">
+              <a:defRPr sz="1600">
+                <a:solidFill>
+                  <a:srgbClr val="333333"/>
+                </a:solidFill>
+              </a:defRPr>
+            </a:pPr>
+            <a:r>
+              <a:t>• str: Text ("Hello", 'Python')</a:t>
+            </a:r>
+          </a:p>
+        </p:txBody>
+      </p:sp>
+      <p:sp>
+        <p:nvSpPr>
+          <p:cNvPr id="16" name="Rectangle 15"/>
+          <p:cNvSpPr/>
+          <p:nvPr/>
+        </p:nvSpPr>
+        <p:spPr>
+          <a:xfrm>
+            <a:off x="365760" y="3703320"/>
+            <a:ext cx="11430000" cy="365760"/>
+          </a:xfrm>
+          <a:prstGeom prst="rect">
+            <a:avLst/>
+          </a:prstGeom>
+          <a:solidFill>
+            <a:srgbClr val="0078D7"/>
+          </a:solidFill>
+          <a:ln>
+            <a:noFill/>
+          </a:ln>
+        </p:spPr>
+        <p:style>
+          <a:lnRef idx="1">
+            <a:schemeClr val="accent1"/>
+          </a:lnRef>
+          <a:fillRef idx="3">
+            <a:schemeClr val="accent1"/>
+          </a:fillRef>
+          <a:effectRef idx="2">
+            <a:schemeClr val="accent1"/>
+          </a:effectRef>
+          <a:fontRef idx="minor">
+            <a:schemeClr val="lt1"/>
+          </a:fontRef>
+        </p:style>
+        <p:txBody>
+          <a:bodyPr rtlCol="0" anchor="ctr"/>
+          <a:lstStyle/>
+          <a:p>
+            <a:pPr algn="ctr"/>
+          </a:p>
+        </p:txBody>
+      </p:sp>
+      <p:sp>
+        <p:nvSpPr>
+          <p:cNvPr id="17" name="TextBox 16"/>
+          <p:cNvSpPr txBox="1"/>
+          <p:nvPr/>
+        </p:nvSpPr>
+        <p:spPr>
+          <a:xfrm>
+            <a:off x="548640" y="3749039"/>
+            <a:ext cx="10972800" cy="274320"/>
+          </a:xfrm>
+          <a:prstGeom prst="rect">
+            <a:avLst/>
+          </a:prstGeom>
+          <a:noFill/>
+        </p:spPr>
+        <p:txBody>
+          <a:bodyPr wrap="none">
+            <a:spAutoFit/>
+          </a:bodyPr>
+          <a:lstStyle/>
+          <a:p>
+            <a:pPr>
+              <a:defRPr sz="2000" b="1">
+                <a:solidFill>
+                  <a:srgbClr val="FFFFFF"/>
+                </a:solidFill>
+              </a:defRPr>
+            </a:pPr>
+            <a:r>
+              <a:t>Operations:</a:t>
+            </a:r>
+          </a:p>
+        </p:txBody>
+      </p:sp>
+      <p:sp>
+        <p:nvSpPr>
+          <p:cNvPr id="18" name="TextBox 17"/>
+          <p:cNvSpPr txBox="1"/>
+          <p:nvPr/>
+        </p:nvSpPr>
+        <p:spPr>
+          <a:xfrm>
+            <a:off x="457200" y="4206240"/>
+            <a:ext cx="11247120" cy="320040"/>
+          </a:xfrm>
+          <a:prstGeom prst="rect">
+            <a:avLst/>
+          </a:prstGeom>
+          <a:noFill/>
+        </p:spPr>
+        <p:txBody>
+          <a:bodyPr wrap="none">
+            <a:spAutoFit/>
+          </a:bodyPr>
+          <a:lstStyle/>
+          <a:p>
+            <a:pPr lvl="1">
+              <a:defRPr sz="1600">
+                <a:solidFill>
+                  <a:srgbClr val="333333"/>
+                </a:solidFill>
+              </a:defRPr>
+            </a:pPr>
+            <a:r>
+              <a:t>• Arithmetic: +, -, *, /, //, %, **</a:t>
+            </a:r>
+          </a:p>
+        </p:txBody>
+      </p:sp>
+      <p:sp>
+        <p:nvSpPr>
+          <p:cNvPr id="19" name="TextBox 18"/>
+          <p:cNvSpPr txBox="1"/>
+          <p:nvPr/>
+        </p:nvSpPr>
+        <p:spPr>
+          <a:xfrm>
+            <a:off x="457200" y="4480559"/>
+            <a:ext cx="11247120" cy="320040"/>
+          </a:xfrm>
+          <a:prstGeom prst="rect">
+            <a:avLst/>
+          </a:prstGeom>
+          <a:noFill/>
+        </p:spPr>
+        <p:txBody>
+          <a:bodyPr wrap="none">
+            <a:spAutoFit/>
+          </a:bodyPr>
+          <a:lstStyle/>
+          <a:p>
+            <a:pPr lvl="1">
+              <a:defRPr sz="1600">
+                <a:solidFill>
+                  <a:srgbClr val="333333"/>
+                </a:solidFill>
+              </a:defRPr>
+            </a:pPr>
+            <a:r>
+              <a:t>• Assignment: =, +=, -=, *=, /=</a:t>
+            </a:r>
+          </a:p>
+        </p:txBody>
+      </p:sp>
+      <p:sp>
+        <p:nvSpPr>
+          <p:cNvPr id="20" name="Rectangle 19"/>
+          <p:cNvSpPr/>
+          <p:nvPr/>
+        </p:nvSpPr>
+        <p:spPr>
+          <a:xfrm>
+            <a:off x="365760" y="4709159"/>
+            <a:ext cx="11430000" cy="365760"/>
+          </a:xfrm>
+          <a:prstGeom prst="rect">
+            <a:avLst/>
+          </a:prstGeom>
+          <a:solidFill>
+            <a:srgbClr val="0078D7"/>
+          </a:solidFill>
+          <a:ln>
+            <a:noFill/>
+          </a:ln>
+        </p:spPr>
+        <p:style>
+          <a:lnRef idx="1">
+            <a:schemeClr val="accent1"/>
+          </a:lnRef>
+          <a:fillRef idx="3">
+            <a:schemeClr val="accent1"/>
+          </a:fillRef>
+          <a:effectRef idx="2">
+            <a:schemeClr val="accent1"/>
+          </a:effectRef>
+          <a:fontRef idx="minor">
+            <a:schemeClr val="lt1"/>
+          </a:fontRef>
+        </p:style>
+        <p:txBody>
+          <a:bodyPr rtlCol="0" anchor="ctr"/>
+          <a:lstStyle/>
+          <a:p>
+            <a:pPr algn="ctr"/>
+          </a:p>
+        </p:txBody>
+      </p:sp>
+      <p:sp>
+        <p:nvSpPr>
+          <p:cNvPr id="21" name="TextBox 20"/>
+          <p:cNvSpPr txBox="1"/>
+          <p:nvPr/>
+        </p:nvSpPr>
+        <p:spPr>
+          <a:xfrm>
+            <a:off x="548640" y="4754879"/>
+            <a:ext cx="10972800" cy="274320"/>
+          </a:xfrm>
+          <a:prstGeom prst="rect">
+            <a:avLst/>
+          </a:prstGeom>
+          <a:noFill/>
+        </p:spPr>
+        <p:txBody>
+          <a:bodyPr wrap="none">
+            <a:spAutoFit/>
+          </a:bodyPr>
+          <a:lstStyle/>
+          <a:p>
+            <a:pPr>
+              <a:defRPr sz="2000" b="1">
+                <a:solidFill>
+                  <a:srgbClr val="FFFFFF"/>
+                </a:solidFill>
+              </a:defRPr>
+            </a:pPr>
+            <a:r>
+              <a:t>Functions:</a:t>
+            </a:r>
+          </a:p>
+        </p:txBody>
+      </p:sp>
+      <p:sp>
+        <p:nvSpPr>
+          <p:cNvPr id="22" name="TextBox 21"/>
+          <p:cNvSpPr txBox="1"/>
+          <p:nvPr/>
+        </p:nvSpPr>
+        <p:spPr>
+          <a:xfrm>
+            <a:off x="457200" y="5212079"/>
+            <a:ext cx="11247120" cy="320040"/>
+          </a:xfrm>
+          <a:prstGeom prst="rect">
+            <a:avLst/>
+          </a:prstGeom>
+          <a:noFill/>
+        </p:spPr>
+        <p:txBody>
+          <a:bodyPr wrap="none">
+            <a:spAutoFit/>
+          </a:bodyPr>
+          <a:lstStyle/>
+          <a:p>
+            <a:pPr lvl="1">
+              <a:defRPr sz="1600">
+                <a:solidFill>
+                  <a:srgbClr val="333333"/>
+                </a:solidFill>
+              </a:defRPr>
+            </a:pPr>
+            <a:r>
+              <a:t>• print(): Display output</a:t>
+            </a:r>
+          </a:p>
+        </p:txBody>
+      </p:sp>
+      <p:sp>
+        <p:nvSpPr>
+          <p:cNvPr id="23" name="TextBox 22"/>
+          <p:cNvSpPr txBox="1"/>
+          <p:nvPr/>
+        </p:nvSpPr>
+        <p:spPr>
+          <a:xfrm>
+            <a:off x="457200" y="5486399"/>
+            <a:ext cx="11247120" cy="320040"/>
+          </a:xfrm>
+          <a:prstGeom prst="rect">
+            <a:avLst/>
+          </a:prstGeom>
+          <a:noFill/>
+        </p:spPr>
+        <p:txBody>
+          <a:bodyPr wrap="none">
+            <a:spAutoFit/>
+          </a:bodyPr>
+          <a:lstStyle/>
+          <a:p>
+            <a:pPr lvl="1">
+              <a:defRPr sz="1600">
+                <a:solidFill>
+                  <a:srgbClr val="333333"/>
+                </a:solidFill>
+              </a:defRPr>
+            </a:pPr>
+            <a:r>
+              <a:t>• type(): Check data type</a:t>
+            </a:r>
+          </a:p>
+        </p:txBody>
+      </p:sp>
+      <p:sp>
+        <p:nvSpPr>
+          <p:cNvPr id="24" name="TextBox 23"/>
+          <p:cNvSpPr txBox="1"/>
+          <p:nvPr/>
+        </p:nvSpPr>
+        <p:spPr>
+          <a:xfrm>
+            <a:off x="457200" y="5760719"/>
+            <a:ext cx="11247120" cy="320040"/>
+          </a:xfrm>
+          <a:prstGeom prst="rect">
+            <a:avLst/>
+          </a:prstGeom>
+          <a:noFill/>
+        </p:spPr>
+        <p:txBody>
+          <a:bodyPr wrap="none">
+            <a:spAutoFit/>
+          </a:bodyPr>
+          <a:lstStyle/>
+          <a:p>
+            <a:pPr lvl="1">
+              <a:defRPr sz="1600">
+                <a:solidFill>
+                  <a:srgbClr val="333333"/>
+                </a:solidFill>
+              </a:defRPr>
+            </a:pPr>
+            <a:r>
+              <a:t>• int(), float(), str(): Convert types</a:t>
             </a:r>
           </a:p>
         </p:txBody>
@@ -9420,6 +10534,678 @@
 </p:sld>
 </file>
 
+<file path=ppt/slides/slide20.xml><?xml version="1.0" encoding="utf-8"?>
+<p:sld xmlns:a="http://schemas.openxmlformats.org/drawingml/2006/main" xmlns:p="http://schemas.openxmlformats.org/presentationml/2006/main" xmlns:r="http://schemas.openxmlformats.org/officeDocument/2006/relationships">
+  <p:cSld>
+    <p:spTree>
+      <p:nvGrpSpPr>
+        <p:cNvPr id="1" name=""/>
+        <p:cNvGrpSpPr/>
+        <p:nvPr/>
+      </p:nvGrpSpPr>
+      <p:grpSpPr/>
+      <p:sp>
+        <p:nvSpPr>
+          <p:cNvPr id="2" name="Rectangle 1"/>
+          <p:cNvSpPr/>
+          <p:nvPr/>
+        </p:nvSpPr>
+        <p:spPr>
+          <a:xfrm>
+            <a:off x="0" y="0"/>
+            <a:ext cx="12191695" cy="6858000"/>
+          </a:xfrm>
+          <a:prstGeom prst="rect">
+            <a:avLst/>
+          </a:prstGeom>
+          <a:solidFill>
+            <a:srgbClr val="FAFAFA"/>
+          </a:solidFill>
+          <a:ln>
+            <a:noFill/>
+          </a:ln>
+        </p:spPr>
+        <p:style>
+          <a:lnRef idx="1">
+            <a:schemeClr val="accent1"/>
+          </a:lnRef>
+          <a:fillRef idx="3">
+            <a:schemeClr val="accent1"/>
+          </a:fillRef>
+          <a:effectRef idx="2">
+            <a:schemeClr val="accent1"/>
+          </a:effectRef>
+          <a:fontRef idx="minor">
+            <a:schemeClr val="lt1"/>
+          </a:fontRef>
+        </p:style>
+        <p:txBody>
+          <a:bodyPr rtlCol="0" anchor="ctr"/>
+          <a:lstStyle/>
+          <a:p>
+            <a:pPr algn="ctr"/>
+          </a:p>
+        </p:txBody>
+      </p:sp>
+      <p:sp>
+        <p:nvSpPr>
+          <p:cNvPr id="3" name="Rectangle 2"/>
+          <p:cNvSpPr/>
+          <p:nvPr/>
+        </p:nvSpPr>
+        <p:spPr>
+          <a:xfrm>
+            <a:off x="0" y="0"/>
+            <a:ext cx="12191695" cy="1097280"/>
+          </a:xfrm>
+          <a:prstGeom prst="rect">
+            <a:avLst/>
+          </a:prstGeom>
+          <a:solidFill>
+            <a:srgbClr val="0066CC"/>
+          </a:solidFill>
+          <a:ln>
+            <a:noFill/>
+          </a:ln>
+        </p:spPr>
+        <p:style>
+          <a:lnRef idx="1">
+            <a:schemeClr val="accent1"/>
+          </a:lnRef>
+          <a:fillRef idx="3">
+            <a:schemeClr val="accent1"/>
+          </a:fillRef>
+          <a:effectRef idx="2">
+            <a:schemeClr val="accent1"/>
+          </a:effectRef>
+          <a:fontRef idx="minor">
+            <a:schemeClr val="lt1"/>
+          </a:fontRef>
+        </p:style>
+        <p:txBody>
+          <a:bodyPr rtlCol="0" anchor="ctr"/>
+          <a:lstStyle/>
+          <a:p>
+            <a:pPr algn="ctr"/>
+          </a:p>
+        </p:txBody>
+      </p:sp>
+      <p:sp>
+        <p:nvSpPr>
+          <p:cNvPr id="4" name="Rectangle 3"/>
+          <p:cNvSpPr/>
+          <p:nvPr/>
+        </p:nvSpPr>
+        <p:spPr>
+          <a:xfrm>
+            <a:off x="0" y="1097280"/>
+            <a:ext cx="137160" cy="5760720"/>
+          </a:xfrm>
+          <a:prstGeom prst="rect">
+            <a:avLst/>
+          </a:prstGeom>
+          <a:solidFill>
+            <a:srgbClr val="FFBB33"/>
+          </a:solidFill>
+          <a:ln>
+            <a:noFill/>
+          </a:ln>
+        </p:spPr>
+        <p:style>
+          <a:lnRef idx="1">
+            <a:schemeClr val="accent1"/>
+          </a:lnRef>
+          <a:fillRef idx="3">
+            <a:schemeClr val="accent1"/>
+          </a:fillRef>
+          <a:effectRef idx="2">
+            <a:schemeClr val="accent1"/>
+          </a:effectRef>
+          <a:fontRef idx="minor">
+            <a:schemeClr val="lt1"/>
+          </a:fontRef>
+        </p:style>
+        <p:txBody>
+          <a:bodyPr rtlCol="0" anchor="ctr"/>
+          <a:lstStyle/>
+          <a:p>
+            <a:pPr algn="ctr"/>
+          </a:p>
+        </p:txBody>
+      </p:sp>
+      <p:sp>
+        <p:nvSpPr>
+          <p:cNvPr id="5" name="TextBox 4"/>
+          <p:cNvSpPr txBox="1"/>
+          <p:nvPr/>
+        </p:nvSpPr>
+        <p:spPr>
+          <a:xfrm>
+            <a:off x="365760" y="274320"/>
+            <a:ext cx="10972800" cy="640080"/>
+          </a:xfrm>
+          <a:prstGeom prst="rect">
+            <a:avLst/>
+          </a:prstGeom>
+          <a:noFill/>
+        </p:spPr>
+        <p:txBody>
+          <a:bodyPr wrap="none">
+            <a:spAutoFit/>
+          </a:bodyPr>
+          <a:lstStyle/>
+          <a:p>
+            <a:pPr>
+              <a:defRPr sz="3600" b="1">
+                <a:solidFill>
+                  <a:srgbClr val="FFFFFF"/>
+                </a:solidFill>
+              </a:defRPr>
+            </a:pPr>
+            <a:r>
+              <a:t>Key Concepts Review (continued)</a:t>
+            </a:r>
+          </a:p>
+        </p:txBody>
+      </p:sp>
+      <p:sp>
+        <p:nvSpPr>
+          <p:cNvPr id="6" name="Rectangle 5"/>
+          <p:cNvSpPr/>
+          <p:nvPr/>
+        </p:nvSpPr>
+        <p:spPr>
+          <a:xfrm>
+            <a:off x="365760" y="1325880"/>
+            <a:ext cx="11430000" cy="365760"/>
+          </a:xfrm>
+          <a:prstGeom prst="rect">
+            <a:avLst/>
+          </a:prstGeom>
+          <a:solidFill>
+            <a:srgbClr val="0078D7"/>
+          </a:solidFill>
+          <a:ln>
+            <a:noFill/>
+          </a:ln>
+        </p:spPr>
+        <p:style>
+          <a:lnRef idx="1">
+            <a:schemeClr val="accent1"/>
+          </a:lnRef>
+          <a:fillRef idx="3">
+            <a:schemeClr val="accent1"/>
+          </a:fillRef>
+          <a:effectRef idx="2">
+            <a:schemeClr val="accent1"/>
+          </a:effectRef>
+          <a:fontRef idx="minor">
+            <a:schemeClr val="lt1"/>
+          </a:fontRef>
+        </p:style>
+        <p:txBody>
+          <a:bodyPr rtlCol="0" anchor="ctr"/>
+          <a:lstStyle/>
+          <a:p>
+            <a:pPr algn="ctr"/>
+          </a:p>
+        </p:txBody>
+      </p:sp>
+      <p:sp>
+        <p:nvSpPr>
+          <p:cNvPr id="7" name="TextBox 6"/>
+          <p:cNvSpPr txBox="1"/>
+          <p:nvPr/>
+        </p:nvSpPr>
+        <p:spPr>
+          <a:xfrm>
+            <a:off x="548640" y="1371600"/>
+            <a:ext cx="10972800" cy="274320"/>
+          </a:xfrm>
+          <a:prstGeom prst="rect">
+            <a:avLst/>
+          </a:prstGeom>
+          <a:noFill/>
+        </p:spPr>
+        <p:txBody>
+          <a:bodyPr wrap="none">
+            <a:spAutoFit/>
+          </a:bodyPr>
+          <a:lstStyle/>
+          <a:p>
+            <a:pPr>
+              <a:defRPr sz="2000" b="1">
+                <a:solidFill>
+                  <a:srgbClr val="FFFFFF"/>
+                </a:solidFill>
+              </a:defRPr>
+            </a:pPr>
+            <a:r>
+              <a:t>Best Practices:</a:t>
+            </a:r>
+          </a:p>
+        </p:txBody>
+      </p:sp>
+      <p:sp>
+        <p:nvSpPr>
+          <p:cNvPr id="8" name="TextBox 7"/>
+          <p:cNvSpPr txBox="1"/>
+          <p:nvPr/>
+        </p:nvSpPr>
+        <p:spPr>
+          <a:xfrm>
+            <a:off x="457200" y="1828800"/>
+            <a:ext cx="11247120" cy="320040"/>
+          </a:xfrm>
+          <a:prstGeom prst="rect">
+            <a:avLst/>
+          </a:prstGeom>
+          <a:noFill/>
+        </p:spPr>
+        <p:txBody>
+          <a:bodyPr wrap="none">
+            <a:spAutoFit/>
+          </a:bodyPr>
+          <a:lstStyle/>
+          <a:p>
+            <a:pPr lvl="1">
+              <a:defRPr sz="1600">
+                <a:solidFill>
+                  <a:srgbClr val="333333"/>
+                </a:solidFill>
+              </a:defRPr>
+            </a:pPr>
+            <a:r>
+              <a:t>• Use descriptive variable names</a:t>
+            </a:r>
+          </a:p>
+        </p:txBody>
+      </p:sp>
+      <p:sp>
+        <p:nvSpPr>
+          <p:cNvPr id="9" name="Rectangle 8"/>
+          <p:cNvSpPr/>
+          <p:nvPr/>
+        </p:nvSpPr>
+        <p:spPr>
+          <a:xfrm>
+            <a:off x="640080" y="2057400"/>
+            <a:ext cx="10789920" cy="411480"/>
+          </a:xfrm>
+          <a:prstGeom prst="rect">
+            <a:avLst/>
+          </a:prstGeom>
+          <a:solidFill>
+            <a:srgbClr val="282C34"/>
+          </a:solidFill>
+          <a:ln>
+            <a:noFill/>
+          </a:ln>
+        </p:spPr>
+        <p:style>
+          <a:lnRef idx="1">
+            <a:schemeClr val="accent1"/>
+          </a:lnRef>
+          <a:fillRef idx="3">
+            <a:schemeClr val="accent1"/>
+          </a:fillRef>
+          <a:effectRef idx="2">
+            <a:schemeClr val="accent1"/>
+          </a:effectRef>
+          <a:fontRef idx="minor">
+            <a:schemeClr val="lt1"/>
+          </a:fontRef>
+        </p:style>
+        <p:txBody>
+          <a:bodyPr rtlCol="0" anchor="ctr"/>
+          <a:lstStyle/>
+          <a:p>
+            <a:pPr algn="ctr"/>
+          </a:p>
+        </p:txBody>
+      </p:sp>
+      <p:sp>
+        <p:nvSpPr>
+          <p:cNvPr id="10" name="Rectangle 9"/>
+          <p:cNvSpPr/>
+          <p:nvPr/>
+        </p:nvSpPr>
+        <p:spPr>
+          <a:xfrm>
+            <a:off x="640080" y="2057400"/>
+            <a:ext cx="73152" cy="411480"/>
+          </a:xfrm>
+          <a:prstGeom prst="rect">
+            <a:avLst/>
+          </a:prstGeom>
+          <a:solidFill>
+            <a:srgbClr val="61AFEF"/>
+          </a:solidFill>
+          <a:ln>
+            <a:noFill/>
+          </a:ln>
+        </p:spPr>
+        <p:style>
+          <a:lnRef idx="1">
+            <a:schemeClr val="accent1"/>
+          </a:lnRef>
+          <a:fillRef idx="3">
+            <a:schemeClr val="accent1"/>
+          </a:fillRef>
+          <a:effectRef idx="2">
+            <a:schemeClr val="accent1"/>
+          </a:effectRef>
+          <a:fontRef idx="minor">
+            <a:schemeClr val="lt1"/>
+          </a:fontRef>
+        </p:style>
+        <p:txBody>
+          <a:bodyPr rtlCol="0" anchor="ctr"/>
+          <a:lstStyle/>
+          <a:p>
+            <a:pPr algn="ctr"/>
+          </a:p>
+        </p:txBody>
+      </p:sp>
+      <p:sp>
+        <p:nvSpPr>
+          <p:cNvPr id="11" name="TextBox 10"/>
+          <p:cNvSpPr txBox="1"/>
+          <p:nvPr/>
+        </p:nvSpPr>
+        <p:spPr>
+          <a:xfrm>
+            <a:off x="914400" y="2103120"/>
+            <a:ext cx="10241280" cy="320040"/>
+          </a:xfrm>
+          <a:prstGeom prst="rect">
+            <a:avLst/>
+          </a:prstGeom>
+          <a:noFill/>
+        </p:spPr>
+        <p:txBody>
+          <a:bodyPr wrap="none">
+            <a:spAutoFit/>
+          </a:bodyPr>
+          <a:lstStyle/>
+          <a:p>
+            <a:pPr>
+              <a:spcAft>
+                <a:spcPts val="200"/>
+              </a:spcAft>
+              <a:defRPr sz="1400">
+                <a:solidFill>
+                  <a:srgbClr val="ABB2BF"/>
+                </a:solidFill>
+                <a:latin typeface="Consolas"/>
+              </a:defRPr>
+            </a:pPr>
+            <a:r>
+              <a:t>• Add comments for clarity</a:t>
+            </a:r>
+          </a:p>
+        </p:txBody>
+      </p:sp>
+      <p:sp>
+        <p:nvSpPr>
+          <p:cNvPr id="12" name="TextBox 11"/>
+          <p:cNvSpPr txBox="1"/>
+          <p:nvPr/>
+        </p:nvSpPr>
+        <p:spPr>
+          <a:xfrm>
+            <a:off x="457200" y="2651760"/>
+            <a:ext cx="11247120" cy="320040"/>
+          </a:xfrm>
+          <a:prstGeom prst="rect">
+            <a:avLst/>
+          </a:prstGeom>
+          <a:noFill/>
+        </p:spPr>
+        <p:txBody>
+          <a:bodyPr wrap="none">
+            <a:spAutoFit/>
+          </a:bodyPr>
+          <a:lstStyle/>
+          <a:p>
+            <a:pPr lvl="1">
+              <a:defRPr sz="1600">
+                <a:solidFill>
+                  <a:srgbClr val="333333"/>
+                </a:solidFill>
+              </a:defRPr>
+            </a:pPr>
+            <a:r>
+              <a:t>• Test code frequently</a:t>
+            </a:r>
+          </a:p>
+        </p:txBody>
+      </p:sp>
+    </p:spTree>
+  </p:cSld>
+  <p:clrMapOvr>
+    <a:masterClrMapping/>
+  </p:clrMapOvr>
+</p:sld>
+</file>
+
+<file path=ppt/slides/slide21.xml><?xml version="1.0" encoding="utf-8"?>
+<p:sld xmlns:a="http://schemas.openxmlformats.org/drawingml/2006/main" xmlns:p="http://schemas.openxmlformats.org/presentationml/2006/main" xmlns:r="http://schemas.openxmlformats.org/officeDocument/2006/relationships">
+  <p:cSld>
+    <p:spTree>
+      <p:nvGrpSpPr>
+        <p:cNvPr id="1" name=""/>
+        <p:cNvGrpSpPr/>
+        <p:nvPr/>
+      </p:nvGrpSpPr>
+      <p:grpSpPr/>
+      <p:sp>
+        <p:nvSpPr>
+          <p:cNvPr id="2" name="Rectangle 1"/>
+          <p:cNvSpPr/>
+          <p:nvPr/>
+        </p:nvSpPr>
+        <p:spPr>
+          <a:xfrm>
+            <a:off x="0" y="0"/>
+            <a:ext cx="12191695" cy="6858000"/>
+          </a:xfrm>
+          <a:prstGeom prst="rect">
+            <a:avLst/>
+          </a:prstGeom>
+          <a:solidFill>
+            <a:srgbClr val="0066CC"/>
+          </a:solidFill>
+          <a:ln>
+            <a:noFill/>
+          </a:ln>
+        </p:spPr>
+        <p:style>
+          <a:lnRef idx="1">
+            <a:schemeClr val="accent1"/>
+          </a:lnRef>
+          <a:fillRef idx="3">
+            <a:schemeClr val="accent1"/>
+          </a:fillRef>
+          <a:effectRef idx="2">
+            <a:schemeClr val="accent1"/>
+          </a:effectRef>
+          <a:fontRef idx="minor">
+            <a:schemeClr val="lt1"/>
+          </a:fontRef>
+        </p:style>
+        <p:txBody>
+          <a:bodyPr rtlCol="0" anchor="ctr"/>
+          <a:lstStyle/>
+          <a:p>
+            <a:pPr algn="ctr"/>
+          </a:p>
+        </p:txBody>
+      </p:sp>
+      <p:sp>
+        <p:nvSpPr>
+          <p:cNvPr id="3" name="Rectangle 2"/>
+          <p:cNvSpPr/>
+          <p:nvPr/>
+        </p:nvSpPr>
+        <p:spPr>
+          <a:xfrm>
+            <a:off x="0" y="2743200"/>
+            <a:ext cx="3657600" cy="137160"/>
+          </a:xfrm>
+          <a:prstGeom prst="rect">
+            <a:avLst/>
+          </a:prstGeom>
+          <a:solidFill>
+            <a:srgbClr val="FFBB33"/>
+          </a:solidFill>
+          <a:ln>
+            <a:noFill/>
+          </a:ln>
+        </p:spPr>
+        <p:style>
+          <a:lnRef idx="1">
+            <a:schemeClr val="accent1"/>
+          </a:lnRef>
+          <a:fillRef idx="3">
+            <a:schemeClr val="accent1"/>
+          </a:fillRef>
+          <a:effectRef idx="2">
+            <a:schemeClr val="accent1"/>
+          </a:effectRef>
+          <a:fontRef idx="minor">
+            <a:schemeClr val="lt1"/>
+          </a:fontRef>
+        </p:style>
+        <p:txBody>
+          <a:bodyPr rtlCol="0" anchor="ctr"/>
+          <a:lstStyle/>
+          <a:p>
+            <a:pPr algn="ctr"/>
+          </a:p>
+        </p:txBody>
+      </p:sp>
+      <p:sp>
+        <p:nvSpPr>
+          <p:cNvPr id="4" name="Rectangle 3"/>
+          <p:cNvSpPr/>
+          <p:nvPr/>
+        </p:nvSpPr>
+        <p:spPr>
+          <a:xfrm>
+            <a:off x="8531352" y="4114800"/>
+            <a:ext cx="3657600" cy="137160"/>
+          </a:xfrm>
+          <a:prstGeom prst="rect">
+            <a:avLst/>
+          </a:prstGeom>
+          <a:solidFill>
+            <a:srgbClr val="FFBB33"/>
+          </a:solidFill>
+          <a:ln>
+            <a:noFill/>
+          </a:ln>
+        </p:spPr>
+        <p:style>
+          <a:lnRef idx="1">
+            <a:schemeClr val="accent1"/>
+          </a:lnRef>
+          <a:fillRef idx="3">
+            <a:schemeClr val="accent1"/>
+          </a:fillRef>
+          <a:effectRef idx="2">
+            <a:schemeClr val="accent1"/>
+          </a:effectRef>
+          <a:fontRef idx="minor">
+            <a:schemeClr val="lt1"/>
+          </a:fontRef>
+        </p:style>
+        <p:txBody>
+          <a:bodyPr rtlCol="0" anchor="ctr"/>
+          <a:lstStyle/>
+          <a:p>
+            <a:pPr algn="ctr"/>
+          </a:p>
+        </p:txBody>
+      </p:sp>
+      <p:sp>
+        <p:nvSpPr>
+          <p:cNvPr id="5" name="TextBox 4"/>
+          <p:cNvSpPr txBox="1"/>
+          <p:nvPr/>
+        </p:nvSpPr>
+        <p:spPr>
+          <a:xfrm>
+            <a:off x="914400" y="2560320"/>
+            <a:ext cx="10360152" cy="1371600"/>
+          </a:xfrm>
+          <a:prstGeom prst="rect">
+            <a:avLst/>
+          </a:prstGeom>
+          <a:noFill/>
+        </p:spPr>
+        <p:txBody>
+          <a:bodyPr wrap="none">
+            <a:spAutoFit/>
+          </a:bodyPr>
+          <a:lstStyle/>
+          <a:p>
+            <a:pPr algn="ctr">
+              <a:defRPr sz="4800" b="1">
+                <a:solidFill>
+                  <a:srgbClr val="FFFFFF"/>
+                </a:solidFill>
+              </a:defRPr>
+            </a:pPr>
+            <a:r>
+              <a:t>Time to Practice!</a:t>
+            </a:r>
+          </a:p>
+        </p:txBody>
+      </p:sp>
+      <p:sp>
+        <p:nvSpPr>
+          <p:cNvPr id="6" name="TextBox 5"/>
+          <p:cNvSpPr txBox="1"/>
+          <p:nvPr/>
+        </p:nvSpPr>
+        <p:spPr>
+          <a:xfrm>
+            <a:off x="1828800" y="4389120"/>
+            <a:ext cx="8531352" cy="914400"/>
+          </a:xfrm>
+          <a:prstGeom prst="rect">
+            <a:avLst/>
+          </a:prstGeom>
+          <a:noFill/>
+        </p:spPr>
+        <p:txBody>
+          <a:bodyPr wrap="none">
+            <a:spAutoFit/>
+          </a:bodyPr>
+          <a:lstStyle/>
+          <a:p>
+            <a:pPr algn="ctr">
+              <a:defRPr sz="2400">
+                <a:solidFill>
+                  <a:srgbClr val="FFFFFF"/>
+                </a:solidFill>
+              </a:defRPr>
+            </a:pPr>
+            <a:r>
+              <a:t>Chapter 1 Exercises</a:t>
+            </a:r>
+          </a:p>
+        </p:txBody>
+      </p:sp>
+    </p:spTree>
+  </p:cSld>
+  <p:clrMapOvr>
+    <a:masterClrMapping/>
+  </p:clrMapOvr>
+</p:sld>
+</file>
+
 <file path=ppt/slides/slide3.xml><?xml version="1.0" encoding="utf-8"?>
 <p:sld xmlns:a="http://schemas.openxmlformats.org/drawingml/2006/main" xmlns:p="http://schemas.openxmlformats.org/presentationml/2006/main" xmlns:r="http://schemas.openxmlformats.org/officeDocument/2006/relationships">
   <p:cSld>
@@ -12023,7 +13809,7 @@
             <a:avLst/>
           </a:prstGeom>
           <a:solidFill>
-            <a:srgbClr val="0066CC"/>
+            <a:srgbClr val="FAFAFA"/>
           </a:solidFill>
           <a:ln>
             <a:noFill/>
@@ -12059,14 +13845,14 @@
         </p:nvSpPr>
         <p:spPr>
           <a:xfrm>
-            <a:off x="0" y="2743200"/>
-            <a:ext cx="3657600" cy="137160"/>
-          </a:xfrm>
-          <a:prstGeom prst="rect">
-            <a:avLst/>
-          </a:prstGeom>
-          <a:solidFill>
-            <a:srgbClr val="FFBB33"/>
+            <a:off x="0" y="0"/>
+            <a:ext cx="12191695" cy="1097280"/>
+          </a:xfrm>
+          <a:prstGeom prst="rect">
+            <a:avLst/>
+          </a:prstGeom>
+          <a:solidFill>
+            <a:srgbClr val="0066CC"/>
           </a:solidFill>
           <a:ln>
             <a:noFill/>
@@ -12102,8 +13888,8 @@
         </p:nvSpPr>
         <p:spPr>
           <a:xfrm>
-            <a:off x="8531352" y="4114800"/>
-            <a:ext cx="3657600" cy="137160"/>
+            <a:off x="0" y="1097280"/>
+            <a:ext cx="137160" cy="5760720"/>
           </a:xfrm>
           <a:prstGeom prst="rect">
             <a:avLst/>
@@ -12145,29 +13931,778 @@
         </p:nvSpPr>
         <p:spPr>
           <a:xfrm>
-            <a:off x="914400" y="2560320"/>
-            <a:ext cx="10360152" cy="1371600"/>
-          </a:xfrm>
-          <a:prstGeom prst="rect">
-            <a:avLst/>
-          </a:prstGeom>
-          <a:noFill/>
-        </p:spPr>
-        <p:txBody>
-          <a:bodyPr wrap="none">
-            <a:spAutoFit/>
-          </a:bodyPr>
-          <a:lstStyle/>
-          <a:p>
-            <a:pPr algn="ctr">
-              <a:defRPr sz="4800" b="1">
+            <a:off x="365760" y="274320"/>
+            <a:ext cx="10972800" cy="640080"/>
+          </a:xfrm>
+          <a:prstGeom prst="rect">
+            <a:avLst/>
+          </a:prstGeom>
+          <a:noFill/>
+        </p:spPr>
+        <p:txBody>
+          <a:bodyPr wrap="none">
+            <a:spAutoFit/>
+          </a:bodyPr>
+          <a:lstStyle/>
+          <a:p>
+            <a:pPr>
+              <a:defRPr sz="3600" b="1">
                 <a:solidFill>
                   <a:srgbClr val="FFFFFF"/>
                 </a:solidFill>
               </a:defRPr>
             </a:pPr>
             <a:r>
-              <a:t>Data Types</a:t>
+              <a:t>Data Types: Strings</a:t>
+            </a:r>
+          </a:p>
+        </p:txBody>
+      </p:sp>
+      <p:sp>
+        <p:nvSpPr>
+          <p:cNvPr id="6" name="Rectangle 5"/>
+          <p:cNvSpPr/>
+          <p:nvPr/>
+        </p:nvSpPr>
+        <p:spPr>
+          <a:xfrm>
+            <a:off x="365760" y="1325880"/>
+            <a:ext cx="11430000" cy="365760"/>
+          </a:xfrm>
+          <a:prstGeom prst="rect">
+            <a:avLst/>
+          </a:prstGeom>
+          <a:solidFill>
+            <a:srgbClr val="0078D7"/>
+          </a:solidFill>
+          <a:ln>
+            <a:noFill/>
+          </a:ln>
+        </p:spPr>
+        <p:style>
+          <a:lnRef idx="1">
+            <a:schemeClr val="accent1"/>
+          </a:lnRef>
+          <a:fillRef idx="3">
+            <a:schemeClr val="accent1"/>
+          </a:fillRef>
+          <a:effectRef idx="2">
+            <a:schemeClr val="accent1"/>
+          </a:effectRef>
+          <a:fontRef idx="minor">
+            <a:schemeClr val="lt1"/>
+          </a:fontRef>
+        </p:style>
+        <p:txBody>
+          <a:bodyPr rtlCol="0" anchor="ctr"/>
+          <a:lstStyle/>
+          <a:p>
+            <a:pPr algn="ctr"/>
+          </a:p>
+        </p:txBody>
+      </p:sp>
+      <p:sp>
+        <p:nvSpPr>
+          <p:cNvPr id="7" name="TextBox 6"/>
+          <p:cNvSpPr txBox="1"/>
+          <p:nvPr/>
+        </p:nvSpPr>
+        <p:spPr>
+          <a:xfrm>
+            <a:off x="548640" y="1371600"/>
+            <a:ext cx="10972800" cy="274320"/>
+          </a:xfrm>
+          <a:prstGeom prst="rect">
+            <a:avLst/>
+          </a:prstGeom>
+          <a:noFill/>
+        </p:spPr>
+        <p:txBody>
+          <a:bodyPr wrap="none">
+            <a:spAutoFit/>
+          </a:bodyPr>
+          <a:lstStyle/>
+          <a:p>
+            <a:pPr>
+              <a:defRPr sz="2000" b="1">
+                <a:solidFill>
+                  <a:srgbClr val="FFFFFF"/>
+                </a:solidFill>
+              </a:defRPr>
+            </a:pPr>
+            <a:r>
+              <a:t>Strings (str): Text data</a:t>
+            </a:r>
+          </a:p>
+        </p:txBody>
+      </p:sp>
+      <p:sp>
+        <p:nvSpPr>
+          <p:cNvPr id="8" name="TextBox 7"/>
+          <p:cNvSpPr txBox="1"/>
+          <p:nvPr/>
+        </p:nvSpPr>
+        <p:spPr>
+          <a:xfrm>
+            <a:off x="457200" y="1828800"/>
+            <a:ext cx="11247120" cy="320040"/>
+          </a:xfrm>
+          <a:prstGeom prst="rect">
+            <a:avLst/>
+          </a:prstGeom>
+          <a:noFill/>
+        </p:spPr>
+        <p:txBody>
+          <a:bodyPr wrap="none">
+            <a:spAutoFit/>
+          </a:bodyPr>
+          <a:lstStyle/>
+          <a:p>
+            <a:pPr lvl="1">
+              <a:defRPr sz="1600">
+                <a:solidFill>
+                  <a:srgbClr val="333333"/>
+                </a:solidFill>
+              </a:defRPr>
+            </a:pPr>
+            <a:r>
+              <a:t>• Enclosed in quotes: "..." or '...'</a:t>
+            </a:r>
+          </a:p>
+        </p:txBody>
+      </p:sp>
+      <p:sp>
+        <p:nvSpPr>
+          <p:cNvPr id="9" name="TextBox 8"/>
+          <p:cNvSpPr txBox="1"/>
+          <p:nvPr/>
+        </p:nvSpPr>
+        <p:spPr>
+          <a:xfrm>
+            <a:off x="457200" y="2103120"/>
+            <a:ext cx="11247120" cy="320040"/>
+          </a:xfrm>
+          <a:prstGeom prst="rect">
+            <a:avLst/>
+          </a:prstGeom>
+          <a:noFill/>
+        </p:spPr>
+        <p:txBody>
+          <a:bodyPr wrap="none">
+            <a:spAutoFit/>
+          </a:bodyPr>
+          <a:lstStyle/>
+          <a:p>
+            <a:pPr lvl="1">
+              <a:defRPr sz="1600">
+                <a:solidFill>
+                  <a:srgbClr val="333333"/>
+                </a:solidFill>
+              </a:defRPr>
+            </a:pPr>
+            <a:r>
+              <a:t>• Examples: "Hello", 'Python', "123"</a:t>
+            </a:r>
+          </a:p>
+        </p:txBody>
+      </p:sp>
+      <p:sp>
+        <p:nvSpPr>
+          <p:cNvPr id="10" name="Rectangle 9"/>
+          <p:cNvSpPr/>
+          <p:nvPr/>
+        </p:nvSpPr>
+        <p:spPr>
+          <a:xfrm>
+            <a:off x="365760" y="2331720"/>
+            <a:ext cx="11430000" cy="365760"/>
+          </a:xfrm>
+          <a:prstGeom prst="rect">
+            <a:avLst/>
+          </a:prstGeom>
+          <a:solidFill>
+            <a:srgbClr val="0078D7"/>
+          </a:solidFill>
+          <a:ln>
+            <a:noFill/>
+          </a:ln>
+        </p:spPr>
+        <p:style>
+          <a:lnRef idx="1">
+            <a:schemeClr val="accent1"/>
+          </a:lnRef>
+          <a:fillRef idx="3">
+            <a:schemeClr val="accent1"/>
+          </a:fillRef>
+          <a:effectRef idx="2">
+            <a:schemeClr val="accent1"/>
+          </a:effectRef>
+          <a:fontRef idx="minor">
+            <a:schemeClr val="lt1"/>
+          </a:fontRef>
+        </p:style>
+        <p:txBody>
+          <a:bodyPr rtlCol="0" anchor="ctr"/>
+          <a:lstStyle/>
+          <a:p>
+            <a:pPr algn="ctr"/>
+          </a:p>
+        </p:txBody>
+      </p:sp>
+      <p:sp>
+        <p:nvSpPr>
+          <p:cNvPr id="11" name="TextBox 10"/>
+          <p:cNvSpPr txBox="1"/>
+          <p:nvPr/>
+        </p:nvSpPr>
+        <p:spPr>
+          <a:xfrm>
+            <a:off x="548640" y="2377439"/>
+            <a:ext cx="10972800" cy="274320"/>
+          </a:xfrm>
+          <a:prstGeom prst="rect">
+            <a:avLst/>
+          </a:prstGeom>
+          <a:noFill/>
+        </p:spPr>
+        <p:txBody>
+          <a:bodyPr wrap="none">
+            <a:spAutoFit/>
+          </a:bodyPr>
+          <a:lstStyle/>
+          <a:p>
+            <a:pPr>
+              <a:defRPr sz="2000" b="1">
+                <a:solidFill>
+                  <a:srgbClr val="FFFFFF"/>
+                </a:solidFill>
+              </a:defRPr>
+            </a:pPr>
+            <a:r>
+              <a:t>String Operations:</a:t>
+            </a:r>
+          </a:p>
+        </p:txBody>
+      </p:sp>
+      <p:sp>
+        <p:nvSpPr>
+          <p:cNvPr id="12" name="Rectangle 11"/>
+          <p:cNvSpPr/>
+          <p:nvPr/>
+        </p:nvSpPr>
+        <p:spPr>
+          <a:xfrm>
+            <a:off x="365760" y="2788920"/>
+            <a:ext cx="11430000" cy="365760"/>
+          </a:xfrm>
+          <a:prstGeom prst="rect">
+            <a:avLst/>
+          </a:prstGeom>
+          <a:solidFill>
+            <a:srgbClr val="0078D7"/>
+          </a:solidFill>
+          <a:ln>
+            <a:noFill/>
+          </a:ln>
+        </p:spPr>
+        <p:style>
+          <a:lnRef idx="1">
+            <a:schemeClr val="accent1"/>
+          </a:lnRef>
+          <a:fillRef idx="3">
+            <a:schemeClr val="accent1"/>
+          </a:fillRef>
+          <a:effectRef idx="2">
+            <a:schemeClr val="accent1"/>
+          </a:effectRef>
+          <a:fontRef idx="minor">
+            <a:schemeClr val="lt1"/>
+          </a:fontRef>
+        </p:style>
+        <p:txBody>
+          <a:bodyPr rtlCol="0" anchor="ctr"/>
+          <a:lstStyle/>
+          <a:p>
+            <a:pPr algn="ctr"/>
+          </a:p>
+        </p:txBody>
+      </p:sp>
+      <p:sp>
+        <p:nvSpPr>
+          <p:cNvPr id="13" name="TextBox 12"/>
+          <p:cNvSpPr txBox="1"/>
+          <p:nvPr/>
+        </p:nvSpPr>
+        <p:spPr>
+          <a:xfrm>
+            <a:off x="548640" y="2834639"/>
+            <a:ext cx="10972800" cy="274320"/>
+          </a:xfrm>
+          <a:prstGeom prst="rect">
+            <a:avLst/>
+          </a:prstGeom>
+          <a:noFill/>
+        </p:spPr>
+        <p:txBody>
+          <a:bodyPr wrap="none">
+            <a:spAutoFit/>
+          </a:bodyPr>
+          <a:lstStyle/>
+          <a:p>
+            <a:pPr>
+              <a:defRPr sz="2000" b="1">
+                <a:solidFill>
+                  <a:srgbClr val="FFFFFF"/>
+                </a:solidFill>
+              </a:defRPr>
+            </a:pPr>
+            <a:r>
+              <a:t>Concatenation: "Hello" + " " + "World"</a:t>
+            </a:r>
+          </a:p>
+        </p:txBody>
+      </p:sp>
+      <p:sp>
+        <p:nvSpPr>
+          <p:cNvPr id="14" name="Rectangle 13"/>
+          <p:cNvSpPr/>
+          <p:nvPr/>
+        </p:nvSpPr>
+        <p:spPr>
+          <a:xfrm>
+            <a:off x="365760" y="3246120"/>
+            <a:ext cx="11430000" cy="365760"/>
+          </a:xfrm>
+          <a:prstGeom prst="rect">
+            <a:avLst/>
+          </a:prstGeom>
+          <a:solidFill>
+            <a:srgbClr val="0078D7"/>
+          </a:solidFill>
+          <a:ln>
+            <a:noFill/>
+          </a:ln>
+        </p:spPr>
+        <p:style>
+          <a:lnRef idx="1">
+            <a:schemeClr val="accent1"/>
+          </a:lnRef>
+          <a:fillRef idx="3">
+            <a:schemeClr val="accent1"/>
+          </a:fillRef>
+          <a:effectRef idx="2">
+            <a:schemeClr val="accent1"/>
+          </a:effectRef>
+          <a:fontRef idx="minor">
+            <a:schemeClr val="lt1"/>
+          </a:fontRef>
+        </p:style>
+        <p:txBody>
+          <a:bodyPr rtlCol="0" anchor="ctr"/>
+          <a:lstStyle/>
+          <a:p>
+            <a:pPr algn="ctr"/>
+          </a:p>
+        </p:txBody>
+      </p:sp>
+      <p:sp>
+        <p:nvSpPr>
+          <p:cNvPr id="15" name="TextBox 14"/>
+          <p:cNvSpPr txBox="1"/>
+          <p:nvPr/>
+        </p:nvSpPr>
+        <p:spPr>
+          <a:xfrm>
+            <a:off x="548640" y="3291839"/>
+            <a:ext cx="10972800" cy="274320"/>
+          </a:xfrm>
+          <a:prstGeom prst="rect">
+            <a:avLst/>
+          </a:prstGeom>
+          <a:noFill/>
+        </p:spPr>
+        <p:txBody>
+          <a:bodyPr wrap="none">
+            <a:spAutoFit/>
+          </a:bodyPr>
+          <a:lstStyle/>
+          <a:p>
+            <a:pPr>
+              <a:defRPr sz="2000" b="1">
+                <a:solidFill>
+                  <a:srgbClr val="FFFFFF"/>
+                </a:solidFill>
+              </a:defRPr>
+            </a:pPr>
+            <a:r>
+              <a:t>Repetition: "Ha" * 3  # "HaHaHa"</a:t>
+            </a:r>
+          </a:p>
+        </p:txBody>
+      </p:sp>
+      <p:sp>
+        <p:nvSpPr>
+          <p:cNvPr id="16" name="Rectangle 15"/>
+          <p:cNvSpPr/>
+          <p:nvPr/>
+        </p:nvSpPr>
+        <p:spPr>
+          <a:xfrm>
+            <a:off x="365760" y="3703320"/>
+            <a:ext cx="11430000" cy="365760"/>
+          </a:xfrm>
+          <a:prstGeom prst="rect">
+            <a:avLst/>
+          </a:prstGeom>
+          <a:solidFill>
+            <a:srgbClr val="0078D7"/>
+          </a:solidFill>
+          <a:ln>
+            <a:noFill/>
+          </a:ln>
+        </p:spPr>
+        <p:style>
+          <a:lnRef idx="1">
+            <a:schemeClr val="accent1"/>
+          </a:lnRef>
+          <a:fillRef idx="3">
+            <a:schemeClr val="accent1"/>
+          </a:fillRef>
+          <a:effectRef idx="2">
+            <a:schemeClr val="accent1"/>
+          </a:effectRef>
+          <a:fontRef idx="minor">
+            <a:schemeClr val="lt1"/>
+          </a:fontRef>
+        </p:style>
+        <p:txBody>
+          <a:bodyPr rtlCol="0" anchor="ctr"/>
+          <a:lstStyle/>
+          <a:p>
+            <a:pPr algn="ctr"/>
+          </a:p>
+        </p:txBody>
+      </p:sp>
+      <p:sp>
+        <p:nvSpPr>
+          <p:cNvPr id="17" name="TextBox 16"/>
+          <p:cNvSpPr txBox="1"/>
+          <p:nvPr/>
+        </p:nvSpPr>
+        <p:spPr>
+          <a:xfrm>
+            <a:off x="548640" y="3749039"/>
+            <a:ext cx="10972800" cy="274320"/>
+          </a:xfrm>
+          <a:prstGeom prst="rect">
+            <a:avLst/>
+          </a:prstGeom>
+          <a:noFill/>
+        </p:spPr>
+        <p:txBody>
+          <a:bodyPr wrap="none">
+            <a:spAutoFit/>
+          </a:bodyPr>
+          <a:lstStyle/>
+          <a:p>
+            <a:pPr>
+              <a:defRPr sz="2000" b="1">
+                <a:solidFill>
+                  <a:srgbClr val="FFFFFF"/>
+                </a:solidFill>
+              </a:defRPr>
+            </a:pPr>
+            <a:r>
+              <a:t>F-Strings (Formatted Strings):</a:t>
+            </a:r>
+          </a:p>
+        </p:txBody>
+      </p:sp>
+      <p:sp>
+        <p:nvSpPr>
+          <p:cNvPr id="18" name="Rectangle 17"/>
+          <p:cNvSpPr/>
+          <p:nvPr/>
+        </p:nvSpPr>
+        <p:spPr>
+          <a:xfrm>
+            <a:off x="640080" y="4160520"/>
+            <a:ext cx="10789920" cy="640080"/>
+          </a:xfrm>
+          <a:prstGeom prst="rect">
+            <a:avLst/>
+          </a:prstGeom>
+          <a:solidFill>
+            <a:srgbClr val="282C34"/>
+          </a:solidFill>
+          <a:ln>
+            <a:noFill/>
+          </a:ln>
+        </p:spPr>
+        <p:style>
+          <a:lnRef idx="1">
+            <a:schemeClr val="accent1"/>
+          </a:lnRef>
+          <a:fillRef idx="3">
+            <a:schemeClr val="accent1"/>
+          </a:fillRef>
+          <a:effectRef idx="2">
+            <a:schemeClr val="accent1"/>
+          </a:effectRef>
+          <a:fontRef idx="minor">
+            <a:schemeClr val="lt1"/>
+          </a:fontRef>
+        </p:style>
+        <p:txBody>
+          <a:bodyPr rtlCol="0" anchor="ctr"/>
+          <a:lstStyle/>
+          <a:p>
+            <a:pPr algn="ctr"/>
+          </a:p>
+        </p:txBody>
+      </p:sp>
+      <p:sp>
+        <p:nvSpPr>
+          <p:cNvPr id="19" name="Rectangle 18"/>
+          <p:cNvSpPr/>
+          <p:nvPr/>
+        </p:nvSpPr>
+        <p:spPr>
+          <a:xfrm>
+            <a:off x="640080" y="4160520"/>
+            <a:ext cx="73152" cy="640080"/>
+          </a:xfrm>
+          <a:prstGeom prst="rect">
+            <a:avLst/>
+          </a:prstGeom>
+          <a:solidFill>
+            <a:srgbClr val="61AFEF"/>
+          </a:solidFill>
+          <a:ln>
+            <a:noFill/>
+          </a:ln>
+        </p:spPr>
+        <p:style>
+          <a:lnRef idx="1">
+            <a:schemeClr val="accent1"/>
+          </a:lnRef>
+          <a:fillRef idx="3">
+            <a:schemeClr val="accent1"/>
+          </a:fillRef>
+          <a:effectRef idx="2">
+            <a:schemeClr val="accent1"/>
+          </a:effectRef>
+          <a:fontRef idx="minor">
+            <a:schemeClr val="lt1"/>
+          </a:fontRef>
+        </p:style>
+        <p:txBody>
+          <a:bodyPr rtlCol="0" anchor="ctr"/>
+          <a:lstStyle/>
+          <a:p>
+            <a:pPr algn="ctr"/>
+          </a:p>
+        </p:txBody>
+      </p:sp>
+      <p:sp>
+        <p:nvSpPr>
+          <p:cNvPr id="20" name="TextBox 19"/>
+          <p:cNvSpPr txBox="1"/>
+          <p:nvPr/>
+        </p:nvSpPr>
+        <p:spPr>
+          <a:xfrm>
+            <a:off x="914400" y="4206240"/>
+            <a:ext cx="10241280" cy="548640"/>
+          </a:xfrm>
+          <a:prstGeom prst="rect">
+            <a:avLst/>
+          </a:prstGeom>
+          <a:noFill/>
+        </p:spPr>
+        <p:txBody>
+          <a:bodyPr wrap="none">
+            <a:spAutoFit/>
+          </a:bodyPr>
+          <a:lstStyle/>
+          <a:p>
+            <a:pPr>
+              <a:spcAft>
+                <a:spcPts val="200"/>
+              </a:spcAft>
+              <a:defRPr sz="1400">
+                <a:solidFill>
+                  <a:srgbClr val="ABB2BF"/>
+                </a:solidFill>
+                <a:latin typeface="Consolas"/>
+              </a:defRPr>
+            </a:pPr>
+            <a:r>
+              <a:t>name = "Alice"</a:t>
+            </a:r>
+          </a:p>
+          <a:p>
+            <a:pPr>
+              <a:spcAft>
+                <a:spcPts val="200"/>
+              </a:spcAft>
+              <a:defRPr sz="1400">
+                <a:solidFill>
+                  <a:srgbClr val="ABB2BF"/>
+                </a:solidFill>
+                <a:latin typeface="Consolas"/>
+              </a:defRPr>
+            </a:pPr>
+            <a:r>
+              <a:t>age = 25</a:t>
+            </a:r>
+          </a:p>
+        </p:txBody>
+      </p:sp>
+      <p:sp>
+        <p:nvSpPr>
+          <p:cNvPr id="21" name="TextBox 20"/>
+          <p:cNvSpPr txBox="1"/>
+          <p:nvPr/>
+        </p:nvSpPr>
+        <p:spPr>
+          <a:xfrm>
+            <a:off x="457200" y="4983480"/>
+            <a:ext cx="11247120" cy="320040"/>
+          </a:xfrm>
+          <a:prstGeom prst="rect">
+            <a:avLst/>
+          </a:prstGeom>
+          <a:noFill/>
+        </p:spPr>
+        <p:txBody>
+          <a:bodyPr wrap="none">
+            <a:spAutoFit/>
+          </a:bodyPr>
+          <a:lstStyle/>
+          <a:p>
+            <a:pPr>
+              <a:defRPr sz="1700">
+                <a:solidFill>
+                  <a:srgbClr val="333333"/>
+                </a:solidFill>
+              </a:defRPr>
+            </a:pPr>
+            <a:r>
+              <a:t>f"My name is {name} and I am {age}"</a:t>
+            </a:r>
+          </a:p>
+        </p:txBody>
+      </p:sp>
+      <p:sp>
+        <p:nvSpPr>
+          <p:cNvPr id="22" name="Rectangle 21"/>
+          <p:cNvSpPr/>
+          <p:nvPr/>
+        </p:nvSpPr>
+        <p:spPr>
+          <a:xfrm>
+            <a:off x="365760" y="5212080"/>
+            <a:ext cx="11430000" cy="365760"/>
+          </a:xfrm>
+          <a:prstGeom prst="rect">
+            <a:avLst/>
+          </a:prstGeom>
+          <a:solidFill>
+            <a:srgbClr val="0078D7"/>
+          </a:solidFill>
+          <a:ln>
+            <a:noFill/>
+          </a:ln>
+        </p:spPr>
+        <p:style>
+          <a:lnRef idx="1">
+            <a:schemeClr val="accent1"/>
+          </a:lnRef>
+          <a:fillRef idx="3">
+            <a:schemeClr val="accent1"/>
+          </a:fillRef>
+          <a:effectRef idx="2">
+            <a:schemeClr val="accent1"/>
+          </a:effectRef>
+          <a:fontRef idx="minor">
+            <a:schemeClr val="lt1"/>
+          </a:fontRef>
+        </p:style>
+        <p:txBody>
+          <a:bodyPr rtlCol="0" anchor="ctr"/>
+          <a:lstStyle/>
+          <a:p>
+            <a:pPr algn="ctr"/>
+          </a:p>
+        </p:txBody>
+      </p:sp>
+      <p:sp>
+        <p:nvSpPr>
+          <p:cNvPr id="23" name="TextBox 22"/>
+          <p:cNvSpPr txBox="1"/>
+          <p:nvPr/>
+        </p:nvSpPr>
+        <p:spPr>
+          <a:xfrm>
+            <a:off x="548640" y="5257800"/>
+            <a:ext cx="10972800" cy="274320"/>
+          </a:xfrm>
+          <a:prstGeom prst="rect">
+            <a:avLst/>
+          </a:prstGeom>
+          <a:noFill/>
+        </p:spPr>
+        <p:txBody>
+          <a:bodyPr wrap="none">
+            <a:spAutoFit/>
+          </a:bodyPr>
+          <a:lstStyle/>
+          <a:p>
+            <a:pPr>
+              <a:defRPr sz="2000" b="1">
+                <a:solidFill>
+                  <a:srgbClr val="FFFFFF"/>
+                </a:solidFill>
+              </a:defRPr>
+            </a:pPr>
+            <a:r>
+              <a:t>Multi-line Strings:</a:t>
+            </a:r>
+          </a:p>
+        </p:txBody>
+      </p:sp>
+      <p:sp>
+        <p:nvSpPr>
+          <p:cNvPr id="24" name="TextBox 23"/>
+          <p:cNvSpPr txBox="1"/>
+          <p:nvPr/>
+        </p:nvSpPr>
+        <p:spPr>
+          <a:xfrm>
+            <a:off x="457200" y="5715000"/>
+            <a:ext cx="11247120" cy="320040"/>
+          </a:xfrm>
+          <a:prstGeom prst="rect">
+            <a:avLst/>
+          </a:prstGeom>
+          <a:noFill/>
+        </p:spPr>
+        <p:txBody>
+          <a:bodyPr wrap="none">
+            <a:spAutoFit/>
+          </a:bodyPr>
+          <a:lstStyle/>
+          <a:p>
+            <a:pPr>
+              <a:defRPr sz="1700">
+                <a:solidFill>
+                  <a:srgbClr val="333333"/>
+                </a:solidFill>
+              </a:defRPr>
+            </a:pPr>
+            <a:r>
+              <a:t>Use triple quotes """..."""</a:t>
             </a:r>
           </a:p>
         </p:txBody>
@@ -12205,7 +14740,7 @@
             <a:avLst/>
           </a:prstGeom>
           <a:solidFill>
-            <a:srgbClr val="FAFAFA"/>
+            <a:srgbClr val="0066CC"/>
           </a:solidFill>
           <a:ln>
             <a:noFill/>
@@ -12241,14 +14776,14 @@
         </p:nvSpPr>
         <p:spPr>
           <a:xfrm>
-            <a:off x="0" y="0"/>
-            <a:ext cx="12191695" cy="1097280"/>
-          </a:xfrm>
-          <a:prstGeom prst="rect">
-            <a:avLst/>
-          </a:prstGeom>
-          <a:solidFill>
-            <a:srgbClr val="0066CC"/>
+            <a:off x="0" y="2743200"/>
+            <a:ext cx="3657600" cy="137160"/>
+          </a:xfrm>
+          <a:prstGeom prst="rect">
+            <a:avLst/>
+          </a:prstGeom>
+          <a:solidFill>
+            <a:srgbClr val="FFBB33"/>
           </a:solidFill>
           <a:ln>
             <a:noFill/>
@@ -12284,8 +14819,8 @@
         </p:nvSpPr>
         <p:spPr>
           <a:xfrm>
-            <a:off x="0" y="1097280"/>
-            <a:ext cx="137160" cy="5760720"/>
+            <a:off x="8531352" y="4114800"/>
+            <a:ext cx="3657600" cy="137160"/>
           </a:xfrm>
           <a:prstGeom prst="rect">
             <a:avLst/>
@@ -12327,778 +14862,29 @@
         </p:nvSpPr>
         <p:spPr>
           <a:xfrm>
-            <a:off x="365760" y="274320"/>
-            <a:ext cx="10972800" cy="640080"/>
-          </a:xfrm>
-          <a:prstGeom prst="rect">
-            <a:avLst/>
-          </a:prstGeom>
-          <a:noFill/>
-        </p:spPr>
-        <p:txBody>
-          <a:bodyPr wrap="none">
-            <a:spAutoFit/>
-          </a:bodyPr>
-          <a:lstStyle/>
-          <a:p>
-            <a:pPr>
-              <a:defRPr sz="3600" b="1">
+            <a:off x="914400" y="2560320"/>
+            <a:ext cx="10360152" cy="1371600"/>
+          </a:xfrm>
+          <a:prstGeom prst="rect">
+            <a:avLst/>
+          </a:prstGeom>
+          <a:noFill/>
+        </p:spPr>
+        <p:txBody>
+          <a:bodyPr wrap="none">
+            <a:spAutoFit/>
+          </a:bodyPr>
+          <a:lstStyle/>
+          <a:p>
+            <a:pPr algn="ctr">
+              <a:defRPr sz="4800" b="1">
                 <a:solidFill>
                   <a:srgbClr val="FFFFFF"/>
                 </a:solidFill>
               </a:defRPr>
             </a:pPr>
             <a:r>
-              <a:t>Data Types: Strings</a:t>
-            </a:r>
-          </a:p>
-        </p:txBody>
-      </p:sp>
-      <p:sp>
-        <p:nvSpPr>
-          <p:cNvPr id="6" name="Rectangle 5"/>
-          <p:cNvSpPr/>
-          <p:nvPr/>
-        </p:nvSpPr>
-        <p:spPr>
-          <a:xfrm>
-            <a:off x="365760" y="1325880"/>
-            <a:ext cx="11430000" cy="365760"/>
-          </a:xfrm>
-          <a:prstGeom prst="rect">
-            <a:avLst/>
-          </a:prstGeom>
-          <a:solidFill>
-            <a:srgbClr val="0078D7"/>
-          </a:solidFill>
-          <a:ln>
-            <a:noFill/>
-          </a:ln>
-        </p:spPr>
-        <p:style>
-          <a:lnRef idx="1">
-            <a:schemeClr val="accent1"/>
-          </a:lnRef>
-          <a:fillRef idx="3">
-            <a:schemeClr val="accent1"/>
-          </a:fillRef>
-          <a:effectRef idx="2">
-            <a:schemeClr val="accent1"/>
-          </a:effectRef>
-          <a:fontRef idx="minor">
-            <a:schemeClr val="lt1"/>
-          </a:fontRef>
-        </p:style>
-        <p:txBody>
-          <a:bodyPr rtlCol="0" anchor="ctr"/>
-          <a:lstStyle/>
-          <a:p>
-            <a:pPr algn="ctr"/>
-          </a:p>
-        </p:txBody>
-      </p:sp>
-      <p:sp>
-        <p:nvSpPr>
-          <p:cNvPr id="7" name="TextBox 6"/>
-          <p:cNvSpPr txBox="1"/>
-          <p:nvPr/>
-        </p:nvSpPr>
-        <p:spPr>
-          <a:xfrm>
-            <a:off x="548640" y="1371600"/>
-            <a:ext cx="10972800" cy="274320"/>
-          </a:xfrm>
-          <a:prstGeom prst="rect">
-            <a:avLst/>
-          </a:prstGeom>
-          <a:noFill/>
-        </p:spPr>
-        <p:txBody>
-          <a:bodyPr wrap="none">
-            <a:spAutoFit/>
-          </a:bodyPr>
-          <a:lstStyle/>
-          <a:p>
-            <a:pPr>
-              <a:defRPr sz="2000" b="1">
-                <a:solidFill>
-                  <a:srgbClr val="FFFFFF"/>
-                </a:solidFill>
-              </a:defRPr>
-            </a:pPr>
-            <a:r>
-              <a:t>Strings (str): Text data</a:t>
-            </a:r>
-          </a:p>
-        </p:txBody>
-      </p:sp>
-      <p:sp>
-        <p:nvSpPr>
-          <p:cNvPr id="8" name="TextBox 7"/>
-          <p:cNvSpPr txBox="1"/>
-          <p:nvPr/>
-        </p:nvSpPr>
-        <p:spPr>
-          <a:xfrm>
-            <a:off x="457200" y="1828800"/>
-            <a:ext cx="11247120" cy="320040"/>
-          </a:xfrm>
-          <a:prstGeom prst="rect">
-            <a:avLst/>
-          </a:prstGeom>
-          <a:noFill/>
-        </p:spPr>
-        <p:txBody>
-          <a:bodyPr wrap="none">
-            <a:spAutoFit/>
-          </a:bodyPr>
-          <a:lstStyle/>
-          <a:p>
-            <a:pPr lvl="1">
-              <a:defRPr sz="1600">
-                <a:solidFill>
-                  <a:srgbClr val="333333"/>
-                </a:solidFill>
-              </a:defRPr>
-            </a:pPr>
-            <a:r>
-              <a:t>• Enclosed in quotes: "..." or '...'</a:t>
-            </a:r>
-          </a:p>
-        </p:txBody>
-      </p:sp>
-      <p:sp>
-        <p:nvSpPr>
-          <p:cNvPr id="9" name="TextBox 8"/>
-          <p:cNvSpPr txBox="1"/>
-          <p:nvPr/>
-        </p:nvSpPr>
-        <p:spPr>
-          <a:xfrm>
-            <a:off x="457200" y="2103120"/>
-            <a:ext cx="11247120" cy="320040"/>
-          </a:xfrm>
-          <a:prstGeom prst="rect">
-            <a:avLst/>
-          </a:prstGeom>
-          <a:noFill/>
-        </p:spPr>
-        <p:txBody>
-          <a:bodyPr wrap="none">
-            <a:spAutoFit/>
-          </a:bodyPr>
-          <a:lstStyle/>
-          <a:p>
-            <a:pPr lvl="1">
-              <a:defRPr sz="1600">
-                <a:solidFill>
-                  <a:srgbClr val="333333"/>
-                </a:solidFill>
-              </a:defRPr>
-            </a:pPr>
-            <a:r>
-              <a:t>• Examples: "Hello", 'Python', "123"</a:t>
-            </a:r>
-          </a:p>
-        </p:txBody>
-      </p:sp>
-      <p:sp>
-        <p:nvSpPr>
-          <p:cNvPr id="10" name="Rectangle 9"/>
-          <p:cNvSpPr/>
-          <p:nvPr/>
-        </p:nvSpPr>
-        <p:spPr>
-          <a:xfrm>
-            <a:off x="365760" y="2331720"/>
-            <a:ext cx="11430000" cy="365760"/>
-          </a:xfrm>
-          <a:prstGeom prst="rect">
-            <a:avLst/>
-          </a:prstGeom>
-          <a:solidFill>
-            <a:srgbClr val="0078D7"/>
-          </a:solidFill>
-          <a:ln>
-            <a:noFill/>
-          </a:ln>
-        </p:spPr>
-        <p:style>
-          <a:lnRef idx="1">
-            <a:schemeClr val="accent1"/>
-          </a:lnRef>
-          <a:fillRef idx="3">
-            <a:schemeClr val="accent1"/>
-          </a:fillRef>
-          <a:effectRef idx="2">
-            <a:schemeClr val="accent1"/>
-          </a:effectRef>
-          <a:fontRef idx="minor">
-            <a:schemeClr val="lt1"/>
-          </a:fontRef>
-        </p:style>
-        <p:txBody>
-          <a:bodyPr rtlCol="0" anchor="ctr"/>
-          <a:lstStyle/>
-          <a:p>
-            <a:pPr algn="ctr"/>
-          </a:p>
-        </p:txBody>
-      </p:sp>
-      <p:sp>
-        <p:nvSpPr>
-          <p:cNvPr id="11" name="TextBox 10"/>
-          <p:cNvSpPr txBox="1"/>
-          <p:nvPr/>
-        </p:nvSpPr>
-        <p:spPr>
-          <a:xfrm>
-            <a:off x="548640" y="2377439"/>
-            <a:ext cx="10972800" cy="274320"/>
-          </a:xfrm>
-          <a:prstGeom prst="rect">
-            <a:avLst/>
-          </a:prstGeom>
-          <a:noFill/>
-        </p:spPr>
-        <p:txBody>
-          <a:bodyPr wrap="none">
-            <a:spAutoFit/>
-          </a:bodyPr>
-          <a:lstStyle/>
-          <a:p>
-            <a:pPr>
-              <a:defRPr sz="2000" b="1">
-                <a:solidFill>
-                  <a:srgbClr val="FFFFFF"/>
-                </a:solidFill>
-              </a:defRPr>
-            </a:pPr>
-            <a:r>
-              <a:t>String Operations:</a:t>
-            </a:r>
-          </a:p>
-        </p:txBody>
-      </p:sp>
-      <p:sp>
-        <p:nvSpPr>
-          <p:cNvPr id="12" name="Rectangle 11"/>
-          <p:cNvSpPr/>
-          <p:nvPr/>
-        </p:nvSpPr>
-        <p:spPr>
-          <a:xfrm>
-            <a:off x="365760" y="2788920"/>
-            <a:ext cx="11430000" cy="365760"/>
-          </a:xfrm>
-          <a:prstGeom prst="rect">
-            <a:avLst/>
-          </a:prstGeom>
-          <a:solidFill>
-            <a:srgbClr val="0078D7"/>
-          </a:solidFill>
-          <a:ln>
-            <a:noFill/>
-          </a:ln>
-        </p:spPr>
-        <p:style>
-          <a:lnRef idx="1">
-            <a:schemeClr val="accent1"/>
-          </a:lnRef>
-          <a:fillRef idx="3">
-            <a:schemeClr val="accent1"/>
-          </a:fillRef>
-          <a:effectRef idx="2">
-            <a:schemeClr val="accent1"/>
-          </a:effectRef>
-          <a:fontRef idx="minor">
-            <a:schemeClr val="lt1"/>
-          </a:fontRef>
-        </p:style>
-        <p:txBody>
-          <a:bodyPr rtlCol="0" anchor="ctr"/>
-          <a:lstStyle/>
-          <a:p>
-            <a:pPr algn="ctr"/>
-          </a:p>
-        </p:txBody>
-      </p:sp>
-      <p:sp>
-        <p:nvSpPr>
-          <p:cNvPr id="13" name="TextBox 12"/>
-          <p:cNvSpPr txBox="1"/>
-          <p:nvPr/>
-        </p:nvSpPr>
-        <p:spPr>
-          <a:xfrm>
-            <a:off x="548640" y="2834639"/>
-            <a:ext cx="10972800" cy="274320"/>
-          </a:xfrm>
-          <a:prstGeom prst="rect">
-            <a:avLst/>
-          </a:prstGeom>
-          <a:noFill/>
-        </p:spPr>
-        <p:txBody>
-          <a:bodyPr wrap="none">
-            <a:spAutoFit/>
-          </a:bodyPr>
-          <a:lstStyle/>
-          <a:p>
-            <a:pPr>
-              <a:defRPr sz="2000" b="1">
-                <a:solidFill>
-                  <a:srgbClr val="FFFFFF"/>
-                </a:solidFill>
-              </a:defRPr>
-            </a:pPr>
-            <a:r>
-              <a:t>Concatenation: "Hello" + " " + "World"</a:t>
-            </a:r>
-          </a:p>
-        </p:txBody>
-      </p:sp>
-      <p:sp>
-        <p:nvSpPr>
-          <p:cNvPr id="14" name="Rectangle 13"/>
-          <p:cNvSpPr/>
-          <p:nvPr/>
-        </p:nvSpPr>
-        <p:spPr>
-          <a:xfrm>
-            <a:off x="365760" y="3246120"/>
-            <a:ext cx="11430000" cy="365760"/>
-          </a:xfrm>
-          <a:prstGeom prst="rect">
-            <a:avLst/>
-          </a:prstGeom>
-          <a:solidFill>
-            <a:srgbClr val="0078D7"/>
-          </a:solidFill>
-          <a:ln>
-            <a:noFill/>
-          </a:ln>
-        </p:spPr>
-        <p:style>
-          <a:lnRef idx="1">
-            <a:schemeClr val="accent1"/>
-          </a:lnRef>
-          <a:fillRef idx="3">
-            <a:schemeClr val="accent1"/>
-          </a:fillRef>
-          <a:effectRef idx="2">
-            <a:schemeClr val="accent1"/>
-          </a:effectRef>
-          <a:fontRef idx="minor">
-            <a:schemeClr val="lt1"/>
-          </a:fontRef>
-        </p:style>
-        <p:txBody>
-          <a:bodyPr rtlCol="0" anchor="ctr"/>
-          <a:lstStyle/>
-          <a:p>
-            <a:pPr algn="ctr"/>
-          </a:p>
-        </p:txBody>
-      </p:sp>
-      <p:sp>
-        <p:nvSpPr>
-          <p:cNvPr id="15" name="TextBox 14"/>
-          <p:cNvSpPr txBox="1"/>
-          <p:nvPr/>
-        </p:nvSpPr>
-        <p:spPr>
-          <a:xfrm>
-            <a:off x="548640" y="3291839"/>
-            <a:ext cx="10972800" cy="274320"/>
-          </a:xfrm>
-          <a:prstGeom prst="rect">
-            <a:avLst/>
-          </a:prstGeom>
-          <a:noFill/>
-        </p:spPr>
-        <p:txBody>
-          <a:bodyPr wrap="none">
-            <a:spAutoFit/>
-          </a:bodyPr>
-          <a:lstStyle/>
-          <a:p>
-            <a:pPr>
-              <a:defRPr sz="2000" b="1">
-                <a:solidFill>
-                  <a:srgbClr val="FFFFFF"/>
-                </a:solidFill>
-              </a:defRPr>
-            </a:pPr>
-            <a:r>
-              <a:t>Repetition: "Ha" * 3  # "HaHaHa"</a:t>
-            </a:r>
-          </a:p>
-        </p:txBody>
-      </p:sp>
-      <p:sp>
-        <p:nvSpPr>
-          <p:cNvPr id="16" name="Rectangle 15"/>
-          <p:cNvSpPr/>
-          <p:nvPr/>
-        </p:nvSpPr>
-        <p:spPr>
-          <a:xfrm>
-            <a:off x="365760" y="3703320"/>
-            <a:ext cx="11430000" cy="365760"/>
-          </a:xfrm>
-          <a:prstGeom prst="rect">
-            <a:avLst/>
-          </a:prstGeom>
-          <a:solidFill>
-            <a:srgbClr val="0078D7"/>
-          </a:solidFill>
-          <a:ln>
-            <a:noFill/>
-          </a:ln>
-        </p:spPr>
-        <p:style>
-          <a:lnRef idx="1">
-            <a:schemeClr val="accent1"/>
-          </a:lnRef>
-          <a:fillRef idx="3">
-            <a:schemeClr val="accent1"/>
-          </a:fillRef>
-          <a:effectRef idx="2">
-            <a:schemeClr val="accent1"/>
-          </a:effectRef>
-          <a:fontRef idx="minor">
-            <a:schemeClr val="lt1"/>
-          </a:fontRef>
-        </p:style>
-        <p:txBody>
-          <a:bodyPr rtlCol="0" anchor="ctr"/>
-          <a:lstStyle/>
-          <a:p>
-            <a:pPr algn="ctr"/>
-          </a:p>
-        </p:txBody>
-      </p:sp>
-      <p:sp>
-        <p:nvSpPr>
-          <p:cNvPr id="17" name="TextBox 16"/>
-          <p:cNvSpPr txBox="1"/>
-          <p:nvPr/>
-        </p:nvSpPr>
-        <p:spPr>
-          <a:xfrm>
-            <a:off x="548640" y="3749039"/>
-            <a:ext cx="10972800" cy="274320"/>
-          </a:xfrm>
-          <a:prstGeom prst="rect">
-            <a:avLst/>
-          </a:prstGeom>
-          <a:noFill/>
-        </p:spPr>
-        <p:txBody>
-          <a:bodyPr wrap="none">
-            <a:spAutoFit/>
-          </a:bodyPr>
-          <a:lstStyle/>
-          <a:p>
-            <a:pPr>
-              <a:defRPr sz="2000" b="1">
-                <a:solidFill>
-                  <a:srgbClr val="FFFFFF"/>
-                </a:solidFill>
-              </a:defRPr>
-            </a:pPr>
-            <a:r>
-              <a:t>F-Strings (Formatted Strings):</a:t>
-            </a:r>
-          </a:p>
-        </p:txBody>
-      </p:sp>
-      <p:sp>
-        <p:nvSpPr>
-          <p:cNvPr id="18" name="Rectangle 17"/>
-          <p:cNvSpPr/>
-          <p:nvPr/>
-        </p:nvSpPr>
-        <p:spPr>
-          <a:xfrm>
-            <a:off x="640080" y="4160520"/>
-            <a:ext cx="10789920" cy="640080"/>
-          </a:xfrm>
-          <a:prstGeom prst="rect">
-            <a:avLst/>
-          </a:prstGeom>
-          <a:solidFill>
-            <a:srgbClr val="282C34"/>
-          </a:solidFill>
-          <a:ln>
-            <a:noFill/>
-          </a:ln>
-        </p:spPr>
-        <p:style>
-          <a:lnRef idx="1">
-            <a:schemeClr val="accent1"/>
-          </a:lnRef>
-          <a:fillRef idx="3">
-            <a:schemeClr val="accent1"/>
-          </a:fillRef>
-          <a:effectRef idx="2">
-            <a:schemeClr val="accent1"/>
-          </a:effectRef>
-          <a:fontRef idx="minor">
-            <a:schemeClr val="lt1"/>
-          </a:fontRef>
-        </p:style>
-        <p:txBody>
-          <a:bodyPr rtlCol="0" anchor="ctr"/>
-          <a:lstStyle/>
-          <a:p>
-            <a:pPr algn="ctr"/>
-          </a:p>
-        </p:txBody>
-      </p:sp>
-      <p:sp>
-        <p:nvSpPr>
-          <p:cNvPr id="19" name="Rectangle 18"/>
-          <p:cNvSpPr/>
-          <p:nvPr/>
-        </p:nvSpPr>
-        <p:spPr>
-          <a:xfrm>
-            <a:off x="640080" y="4160520"/>
-            <a:ext cx="73152" cy="640080"/>
-          </a:xfrm>
-          <a:prstGeom prst="rect">
-            <a:avLst/>
-          </a:prstGeom>
-          <a:solidFill>
-            <a:srgbClr val="61AFEF"/>
-          </a:solidFill>
-          <a:ln>
-            <a:noFill/>
-          </a:ln>
-        </p:spPr>
-        <p:style>
-          <a:lnRef idx="1">
-            <a:schemeClr val="accent1"/>
-          </a:lnRef>
-          <a:fillRef idx="3">
-            <a:schemeClr val="accent1"/>
-          </a:fillRef>
-          <a:effectRef idx="2">
-            <a:schemeClr val="accent1"/>
-          </a:effectRef>
-          <a:fontRef idx="minor">
-            <a:schemeClr val="lt1"/>
-          </a:fontRef>
-        </p:style>
-        <p:txBody>
-          <a:bodyPr rtlCol="0" anchor="ctr"/>
-          <a:lstStyle/>
-          <a:p>
-            <a:pPr algn="ctr"/>
-          </a:p>
-        </p:txBody>
-      </p:sp>
-      <p:sp>
-        <p:nvSpPr>
-          <p:cNvPr id="20" name="TextBox 19"/>
-          <p:cNvSpPr txBox="1"/>
-          <p:nvPr/>
-        </p:nvSpPr>
-        <p:spPr>
-          <a:xfrm>
-            <a:off x="914400" y="4206240"/>
-            <a:ext cx="10241280" cy="548640"/>
-          </a:xfrm>
-          <a:prstGeom prst="rect">
-            <a:avLst/>
-          </a:prstGeom>
-          <a:noFill/>
-        </p:spPr>
-        <p:txBody>
-          <a:bodyPr wrap="none">
-            <a:spAutoFit/>
-          </a:bodyPr>
-          <a:lstStyle/>
-          <a:p>
-            <a:pPr>
-              <a:spcAft>
-                <a:spcPts val="200"/>
-              </a:spcAft>
-              <a:defRPr sz="1400">
-                <a:solidFill>
-                  <a:srgbClr val="ABB2BF"/>
-                </a:solidFill>
-                <a:latin typeface="Consolas"/>
-              </a:defRPr>
-            </a:pPr>
-            <a:r>
-              <a:t>name = "Alice"</a:t>
-            </a:r>
-          </a:p>
-          <a:p>
-            <a:pPr>
-              <a:spcAft>
-                <a:spcPts val="200"/>
-              </a:spcAft>
-              <a:defRPr sz="1400">
-                <a:solidFill>
-                  <a:srgbClr val="ABB2BF"/>
-                </a:solidFill>
-                <a:latin typeface="Consolas"/>
-              </a:defRPr>
-            </a:pPr>
-            <a:r>
-              <a:t>age = 25</a:t>
-            </a:r>
-          </a:p>
-        </p:txBody>
-      </p:sp>
-      <p:sp>
-        <p:nvSpPr>
-          <p:cNvPr id="21" name="TextBox 20"/>
-          <p:cNvSpPr txBox="1"/>
-          <p:nvPr/>
-        </p:nvSpPr>
-        <p:spPr>
-          <a:xfrm>
-            <a:off x="457200" y="4983480"/>
-            <a:ext cx="11247120" cy="320040"/>
-          </a:xfrm>
-          <a:prstGeom prst="rect">
-            <a:avLst/>
-          </a:prstGeom>
-          <a:noFill/>
-        </p:spPr>
-        <p:txBody>
-          <a:bodyPr wrap="none">
-            <a:spAutoFit/>
-          </a:bodyPr>
-          <a:lstStyle/>
-          <a:p>
-            <a:pPr>
-              <a:defRPr sz="1700">
-                <a:solidFill>
-                  <a:srgbClr val="333333"/>
-                </a:solidFill>
-              </a:defRPr>
-            </a:pPr>
-            <a:r>
-              <a:t>f"My name is {name} and I am {age}"</a:t>
-            </a:r>
-          </a:p>
-        </p:txBody>
-      </p:sp>
-      <p:sp>
-        <p:nvSpPr>
-          <p:cNvPr id="22" name="Rectangle 21"/>
-          <p:cNvSpPr/>
-          <p:nvPr/>
-        </p:nvSpPr>
-        <p:spPr>
-          <a:xfrm>
-            <a:off x="365760" y="5212080"/>
-            <a:ext cx="11430000" cy="365760"/>
-          </a:xfrm>
-          <a:prstGeom prst="rect">
-            <a:avLst/>
-          </a:prstGeom>
-          <a:solidFill>
-            <a:srgbClr val="0078D7"/>
-          </a:solidFill>
-          <a:ln>
-            <a:noFill/>
-          </a:ln>
-        </p:spPr>
-        <p:style>
-          <a:lnRef idx="1">
-            <a:schemeClr val="accent1"/>
-          </a:lnRef>
-          <a:fillRef idx="3">
-            <a:schemeClr val="accent1"/>
-          </a:fillRef>
-          <a:effectRef idx="2">
-            <a:schemeClr val="accent1"/>
-          </a:effectRef>
-          <a:fontRef idx="minor">
-            <a:schemeClr val="lt1"/>
-          </a:fontRef>
-        </p:style>
-        <p:txBody>
-          <a:bodyPr rtlCol="0" anchor="ctr"/>
-          <a:lstStyle/>
-          <a:p>
-            <a:pPr algn="ctr"/>
-          </a:p>
-        </p:txBody>
-      </p:sp>
-      <p:sp>
-        <p:nvSpPr>
-          <p:cNvPr id="23" name="TextBox 22"/>
-          <p:cNvSpPr txBox="1"/>
-          <p:nvPr/>
-        </p:nvSpPr>
-        <p:spPr>
-          <a:xfrm>
-            <a:off x="548640" y="5257800"/>
-            <a:ext cx="10972800" cy="274320"/>
-          </a:xfrm>
-          <a:prstGeom prst="rect">
-            <a:avLst/>
-          </a:prstGeom>
-          <a:noFill/>
-        </p:spPr>
-        <p:txBody>
-          <a:bodyPr wrap="none">
-            <a:spAutoFit/>
-          </a:bodyPr>
-          <a:lstStyle/>
-          <a:p>
-            <a:pPr>
-              <a:defRPr sz="2000" b="1">
-                <a:solidFill>
-                  <a:srgbClr val="FFFFFF"/>
-                </a:solidFill>
-              </a:defRPr>
-            </a:pPr>
-            <a:r>
-              <a:t>Multi-line Strings:</a:t>
-            </a:r>
-          </a:p>
-        </p:txBody>
-      </p:sp>
-      <p:sp>
-        <p:nvSpPr>
-          <p:cNvPr id="24" name="TextBox 23"/>
-          <p:cNvSpPr txBox="1"/>
-          <p:nvPr/>
-        </p:nvSpPr>
-        <p:spPr>
-          <a:xfrm>
-            <a:off x="457200" y="5715000"/>
-            <a:ext cx="11247120" cy="320040"/>
-          </a:xfrm>
-          <a:prstGeom prst="rect">
-            <a:avLst/>
-          </a:prstGeom>
-          <a:noFill/>
-        </p:spPr>
-        <p:txBody>
-          <a:bodyPr wrap="none">
-            <a:spAutoFit/>
-          </a:bodyPr>
-          <a:lstStyle/>
-          <a:p>
-            <a:pPr>
-              <a:defRPr sz="1700">
-                <a:solidFill>
-                  <a:srgbClr val="333333"/>
-                </a:solidFill>
-              </a:defRPr>
-            </a:pPr>
-            <a:r>
-              <a:t>Use triple quotes """..."""</a:t>
+              <a:t>Arithmetic Operations</a:t>
             </a:r>
           </a:p>
         </p:txBody>
@@ -14832,6 +16618,131 @@
             </a:pPr>
             <a:r>
               <a:t>Multiple Operations:</a:t>
+            </a:r>
+          </a:p>
+        </p:txBody>
+      </p:sp>
+      <p:sp>
+        <p:nvSpPr>
+          <p:cNvPr id="24" name="Rectangle 23"/>
+          <p:cNvSpPr/>
+          <p:nvPr/>
+        </p:nvSpPr>
+        <p:spPr>
+          <a:xfrm>
+            <a:off x="640080" y="6035040"/>
+            <a:ext cx="10789920" cy="411480"/>
+          </a:xfrm>
+          <a:prstGeom prst="rect">
+            <a:avLst/>
+          </a:prstGeom>
+          <a:solidFill>
+            <a:srgbClr val="282C34"/>
+          </a:solidFill>
+          <a:ln>
+            <a:noFill/>
+          </a:ln>
+        </p:spPr>
+        <p:style>
+          <a:lnRef idx="1">
+            <a:schemeClr val="accent1"/>
+          </a:lnRef>
+          <a:fillRef idx="3">
+            <a:schemeClr val="accent1"/>
+          </a:fillRef>
+          <a:effectRef idx="2">
+            <a:schemeClr val="accent1"/>
+          </a:effectRef>
+          <a:fontRef idx="minor">
+            <a:schemeClr val="lt1"/>
+          </a:fontRef>
+        </p:style>
+        <p:txBody>
+          <a:bodyPr rtlCol="0" anchor="ctr"/>
+          <a:lstStyle/>
+          <a:p>
+            <a:pPr algn="ctr"/>
+          </a:p>
+        </p:txBody>
+      </p:sp>
+      <p:sp>
+        <p:nvSpPr>
+          <p:cNvPr id="25" name="Rectangle 24"/>
+          <p:cNvSpPr/>
+          <p:nvPr/>
+        </p:nvSpPr>
+        <p:spPr>
+          <a:xfrm>
+            <a:off x="640080" y="6035040"/>
+            <a:ext cx="73152" cy="411480"/>
+          </a:xfrm>
+          <a:prstGeom prst="rect">
+            <a:avLst/>
+          </a:prstGeom>
+          <a:solidFill>
+            <a:srgbClr val="61AFEF"/>
+          </a:solidFill>
+          <a:ln>
+            <a:noFill/>
+          </a:ln>
+        </p:spPr>
+        <p:style>
+          <a:lnRef idx="1">
+            <a:schemeClr val="accent1"/>
+          </a:lnRef>
+          <a:fillRef idx="3">
+            <a:schemeClr val="accent1"/>
+          </a:fillRef>
+          <a:effectRef idx="2">
+            <a:schemeClr val="accent1"/>
+          </a:effectRef>
+          <a:fontRef idx="minor">
+            <a:schemeClr val="lt1"/>
+          </a:fontRef>
+        </p:style>
+        <p:txBody>
+          <a:bodyPr rtlCol="0" anchor="ctr"/>
+          <a:lstStyle/>
+          <a:p>
+            <a:pPr algn="ctr"/>
+          </a:p>
+        </p:txBody>
+      </p:sp>
+      <p:sp>
+        <p:nvSpPr>
+          <p:cNvPr id="26" name="TextBox 25"/>
+          <p:cNvSpPr txBox="1"/>
+          <p:nvPr/>
+        </p:nvSpPr>
+        <p:spPr>
+          <a:xfrm>
+            <a:off x="914400" y="6080759"/>
+            <a:ext cx="10241280" cy="320040"/>
+          </a:xfrm>
+          <a:prstGeom prst="rect">
+            <a:avLst/>
+          </a:prstGeom>
+          <a:noFill/>
+        </p:spPr>
+        <p:txBody>
+          <a:bodyPr wrap="none">
+            <a:spAutoFit/>
+          </a:bodyPr>
+          <a:lstStyle/>
+          <a:p>
+            <a:pPr>
+              <a:spcAft>
+                <a:spcPts val="200"/>
+              </a:spcAft>
+              <a:defRPr sz="1400">
+                <a:solidFill>
+                  <a:srgbClr val="ABB2BF"/>
+                </a:solidFill>
+                <a:latin typeface="Consolas"/>
+              </a:defRPr>
+            </a:pPr>
+            <a:r>
+              <a:t>total = (price * quantity) + tax</a:t>
             </a:r>
           </a:p>
         </p:txBody>
